--- a/canvas/avc248/slides/week-04-goals-and-reach-job.pptx
+++ b/canvas/avc248/slides/week-04-goals-and-reach-job.pptx
@@ -13,9 +13,10 @@
     <p:sldId id="261" r:id="rId7"/>
     <p:sldId id="262" r:id="rId8"/>
     <p:sldId id="263" r:id="rId9"/>
+    <p:sldId id="264" r:id="rId10"/>
   </p:sldIdLst>
   <p:notesMasterIdLst>
-    <p:notesMasterId r:id="rId10"/>
+    <p:notesMasterId r:id="rId11"/>
   </p:notesMasterIdLst>
   <p:sldSz cx="9144000" cy="5143500"/>
   <p:notesSz cx="5143500" cy="9144000"/>
@@ -1167,6 +1168,94 @@
 </p:notes>
 </file>
 
+<file path=ppt/notesSlides/notesSlide9.xml><?xml version="1.0" encoding="utf-8"?>
+<p:notes xmlns:a="http://schemas.openxmlformats.org/drawingml/2006/main" xmlns:r="http://schemas.openxmlformats.org/officeDocument/2006/relationships" xmlns:p="http://schemas.openxmlformats.org/presentationml/2006/main">
+  <p:cSld>
+    <p:spTree>
+      <p:nvGrpSpPr>
+        <p:cNvPr id="1" name=""/>
+        <p:cNvGrpSpPr/>
+        <p:nvPr/>
+      </p:nvGrpSpPr>
+      <p:grpSpPr>
+        <a:xfrm>
+          <a:off x="0" y="0"/>
+          <a:ext cx="0" cy="0"/>
+          <a:chOff x="0" y="0"/>
+          <a:chExt cx="0" cy="0"/>
+        </a:xfrm>
+      </p:grpSpPr>
+      <p:sp>
+        <p:nvSpPr>
+          <p:cNvPr id="2" name="Slide Image Placeholder 1"/>
+          <p:cNvSpPr>
+            <a:spLocks noGrp="1" noRot="1" noChangeAspect="1"/>
+          </p:cNvSpPr>
+          <p:nvPr>
+            <p:ph type="sldImg"/>
+          </p:nvPr>
+        </p:nvSpPr>
+        <p:spPr/>
+      </p:sp>
+      <p:sp>
+        <p:nvSpPr>
+          <p:cNvPr id="3" name="Notes Placeholder 2"/>
+          <p:cNvSpPr>
+            <a:spLocks noGrp="1"/>
+          </p:cNvSpPr>
+          <p:nvPr>
+            <p:ph type="body" idx="1"/>
+          </p:nvPr>
+        </p:nvSpPr>
+        <p:spPr/>
+        <p:txBody>
+          <a:bodyPr/>
+          <a:lstStyle/>
+          <a:p>
+            <a:r>
+              <a:rPr lang="en-US" dirty="0"/>
+              <a:t/>
+            </a:r>
+            <a:endParaRPr lang="en-US" dirty="0"/>
+          </a:p>
+        </p:txBody>
+      </p:sp>
+      <p:sp>
+        <p:nvSpPr>
+          <p:cNvPr id="4" name="Slide Number Placeholder 3"/>
+          <p:cNvSpPr>
+            <a:spLocks noGrp="1"/>
+          </p:cNvSpPr>
+          <p:nvPr>
+            <p:ph type="sldNum" sz="quarter" idx="10"/>
+          </p:nvPr>
+        </p:nvSpPr>
+        <p:spPr/>
+        <p:txBody>
+          <a:bodyPr/>
+          <a:lstStyle/>
+          <a:p>
+            <a:fld id="{F7021451-1387-4CA6-816F-3879F97B5CBC}" type="slidenum">
+              <a:rPr lang="en-US"/>
+              <a:t>9</a:t>
+            </a:fld>
+            <a:endParaRPr lang="en-US"/>
+          </a:p>
+        </p:txBody>
+      </p:sp>
+    </p:spTree>
+    <p:extLst>
+      <p:ext uri="{BB962C8B-B14F-4D97-AF65-F5344CB8AC3E}">
+        <p14:creationId xmlns:p14="http://schemas.microsoft.com/office/powerpoint/2010/main" val="1024086991"/>
+      </p:ext>
+    </p:extLst>
+  </p:cSld>
+  <p:clrMapOvr>
+    <a:masterClrMapping/>
+  </p:clrMapOvr>
+</p:notes>
+</file>
+
 <file path=ppt/slideLayouts/slideLayout1.xml><?xml version="1.0" encoding="utf-8"?>
 <p:sldLayout xmlns:a="http://schemas.openxmlformats.org/drawingml/2006/main" xmlns:r="http://schemas.openxmlformats.org/officeDocument/2006/relationships" xmlns:p="http://schemas.openxmlformats.org/presentationml/2006/main" preserve="1">
   <p:cSld name="DEFAULT">
@@ -1535,8 +1624,8 @@
             <a:avLst/>
           </a:prstGeom>
           <a:solidFill>
-            <a:srgbClr val="7A5080">
-              <a:alpha val="55000"/>
+            <a:srgbClr val="C4929E">
+              <a:alpha val="30000"/>
             </a:srgbClr>
           </a:solidFill>
           <a:ln/>
@@ -1571,7 +1660,7 @@
         <p:spPr>
           <a:xfrm>
             <a:off x="457200" y="1143000"/>
-            <a:ext cx="7498080" cy="1737360"/>
+            <a:ext cx="7680960" cy="1737360"/>
           </a:xfrm>
           <a:prstGeom prst="rect">
             <a:avLst/>
@@ -1590,7 +1679,7 @@
               <a:buNone/>
             </a:pPr>
             <a:r>
-              <a:rPr lang="en-US" sz="4600" b="1" dirty="0">
+              <a:rPr lang="en-US" sz="4400" b="1" dirty="0">
                 <a:solidFill>
                   <a:srgbClr val="FFFFFF"/>
                 </a:solidFill>
@@ -1600,7 +1689,7 @@
               </a:rPr>
               <a:t>Strong Goals +</a:t>
             </a:r>
-            <a:endParaRPr lang="en-US" sz="4600" dirty="0"/>
+            <a:endParaRPr lang="en-US" sz="4400" dirty="0"/>
           </a:p>
           <a:p>
             <a:pPr algn="l" indent="0" marL="0">
@@ -1610,7 +1699,7 @@
               <a:buNone/>
             </a:pPr>
             <a:r>
-              <a:rPr lang="en-US" sz="4600" b="1" dirty="0">
+              <a:rPr lang="en-US" sz="4400" b="1" dirty="0">
                 <a:solidFill>
                   <a:srgbClr val="FFFFFF"/>
                 </a:solidFill>
@@ -1620,7 +1709,7 @@
               </a:rPr>
               <a:t>Your Reach Job</a:t>
             </a:r>
-            <a:endParaRPr lang="en-US" sz="4600" dirty="0"/>
+            <a:endParaRPr lang="en-US" sz="4400" dirty="0"/>
           </a:p>
         </p:txBody>
       </p:sp>
@@ -1649,7 +1738,7 @@
               <a:buNone/>
             </a:pPr>
             <a:r>
-              <a:rPr lang="en-US" sz="1200" b="1" spc="100" kern="0" dirty="0">
+              <a:rPr lang="en-US" sz="1200" b="1" dirty="0">
                 <a:solidFill>
                   <a:srgbClr val="C4929E"/>
                 </a:solidFill>
@@ -1688,13 +1777,13 @@
               <a:buNone/>
             </a:pPr>
             <a:r>
-              <a:rPr lang="en-US" sz="1600" i="1" dirty="0">
+              <a:rPr lang="en-US" sz="1600" b="1" i="1" dirty="0">
                 <a:solidFill>
                   <a:srgbClr val="B8956A"/>
                 </a:solidFill>
-                <a:latin typeface="Georgia" pitchFamily="34" charset="0"/>
-                <a:ea typeface="Georgia" pitchFamily="34" charset="-122"/>
-                <a:cs typeface="Georgia" pitchFamily="34" charset="-120"/>
+                <a:latin typeface="Calibri" pitchFamily="34" charset="0"/>
+                <a:ea typeface="Calibri" pitchFamily="34" charset="-122"/>
+                <a:cs typeface="Calibri" pitchFamily="34" charset="-120"/>
               </a:rPr>
               <a:t>“A vague goal can’t guide a single decision.”</a:t>
             </a:r>
@@ -1811,13 +1900,10 @@
           <a:ln/>
         </p:spPr>
         <p:txBody>
-          <a:bodyPr wrap="square" lIns="0" tIns="0" rIns="0" bIns="0" rtlCol="0" anchor="t"/>
-          <a:lstStyle/>
-          <a:p>
-            <a:pPr algn="l" indent="0" marL="0">
-              <a:lnSpc>
-                <a:spcPct val="98000"/>
-              </a:lnSpc>
+          <a:bodyPr wrap="square" lIns="0" tIns="0" rIns="0" bIns="0" rtlCol="0" anchor="ctr"/>
+          <a:lstStyle/>
+          <a:p>
+            <a:pPr algn="l" indent="0" marL="0">
               <a:buNone/>
             </a:pPr>
             <a:r>
@@ -1857,9 +1943,6 @@
           <a:lstStyle/>
           <a:p>
             <a:pPr algn="l" indent="0" marL="0">
-              <a:lnSpc>
-                <a:spcPct val="105000"/>
-              </a:lnSpc>
               <a:buNone/>
             </a:pPr>
             <a:r>
@@ -1896,7 +1979,7 @@
           </a:solidFill>
           <a:ln/>
           <a:effectLst>
-            <a:outerShdw sx="100000" sy="100000" kx="0" ky="0" algn="bl" rotWithShape="0" blurRad="114300" dist="38100" dir="5400000">
+            <a:outerShdw sx="100000" sy="100000" kx="0" ky="0" algn="bl" rotWithShape="0" blurRad="63500" dist="25400" dir="8100000">
               <a:srgbClr val="000000">
                 <a:alpha val="10000"/>
               </a:srgbClr>
@@ -1922,18 +2005,378 @@
             <a:srgbClr val="C4929E"/>
           </a:solidFill>
           <a:ln/>
+        </p:spPr>
+      </p:sp>
+      <p:sp>
+        <p:nvSpPr>
+          <p:cNvPr id="8" name="Text 6"/>
+          <p:cNvSpPr/>
+          <p:nvPr/>
+        </p:nvSpPr>
+        <p:spPr>
+          <a:xfrm>
+            <a:off x="758952" y="3072384"/>
+            <a:ext cx="2240280" cy="310896"/>
+          </a:xfrm>
+          <a:prstGeom prst="rect">
+            <a:avLst/>
+          </a:prstGeom>
+          <a:noFill/>
+          <a:ln/>
+        </p:spPr>
+        <p:txBody>
+          <a:bodyPr wrap="square" lIns="0" tIns="0" rIns="0" bIns="0" rtlCol="0" anchor="ctr"/>
+          <a:lstStyle/>
+          <a:p>
+            <a:pPr algn="l" indent="0" marL="0">
+              <a:buNone/>
+            </a:pPr>
+            <a:r>
+              <a:rPr lang="en-US" sz="1600" b="1" dirty="0">
+                <a:solidFill>
+                  <a:srgbClr val="7A5080"/>
+                </a:solidFill>
+                <a:latin typeface="Georgia" pitchFamily="34" charset="0"/>
+                <a:ea typeface="Georgia" pitchFamily="34" charset="-122"/>
+                <a:cs typeface="Georgia" pitchFamily="34" charset="-120"/>
+              </a:rPr>
+              <a:t>Too broad</a:t>
+            </a:r>
+            <a:endParaRPr lang="en-US" sz="1600" dirty="0"/>
+          </a:p>
+        </p:txBody>
+      </p:sp>
+      <p:sp>
+        <p:nvSpPr>
+          <p:cNvPr id="9" name="Text 7"/>
+          <p:cNvSpPr/>
+          <p:nvPr/>
+        </p:nvSpPr>
+        <p:spPr>
+          <a:xfrm>
+            <a:off x="758952" y="3401568"/>
+            <a:ext cx="2240280" cy="658368"/>
+          </a:xfrm>
+          <a:prstGeom prst="rect">
+            <a:avLst/>
+          </a:prstGeom>
+          <a:noFill/>
+          <a:ln/>
+        </p:spPr>
+        <p:txBody>
+          <a:bodyPr wrap="square" lIns="0" tIns="0" rIns="0" bIns="0" rtlCol="0" anchor="t"/>
+          <a:lstStyle/>
+          <a:p>
+            <a:pPr algn="l" indent="0" marL="0">
+              <a:buNone/>
+            </a:pPr>
+            <a:r>
+              <a:rPr lang="en-US" sz="1150" dirty="0">
+                <a:solidFill>
+                  <a:srgbClr val="3A2E3F"/>
+                </a:solidFill>
+                <a:latin typeface="Calibri" pitchFamily="34" charset="0"/>
+                <a:ea typeface="Calibri" pitchFamily="34" charset="-122"/>
+                <a:cs typeface="Calibri" pitchFamily="34" charset="-120"/>
+              </a:rPr>
+              <a:t>“I want a design job” fits a thousand roles and points at none of them.</a:t>
+            </a:r>
+            <a:endParaRPr lang="en-US" sz="1150" dirty="0"/>
+          </a:p>
+        </p:txBody>
+      </p:sp>
+      <p:sp>
+        <p:nvSpPr>
+          <p:cNvPr id="10" name="Shape 8"/>
+          <p:cNvSpPr/>
+          <p:nvPr/>
+        </p:nvSpPr>
+        <p:spPr>
+          <a:xfrm>
+            <a:off x="3396996" y="2240280"/>
+            <a:ext cx="2697480" cy="1828800"/>
+          </a:xfrm>
+          <a:prstGeom prst="rect">
+            <a:avLst/>
+          </a:prstGeom>
+          <a:solidFill>
+            <a:srgbClr val="FFFFFF"/>
+          </a:solidFill>
+          <a:ln/>
           <a:effectLst>
-            <a:outerShdw sx="100000" sy="100000" kx="0" ky="0" algn="bl" rotWithShape="0" blurRad="88900" dist="38100" dir="5400000">
+            <a:outerShdw sx="100000" sy="100000" kx="0" ky="0" algn="bl" rotWithShape="0" blurRad="63500" dist="25400" dir="8100000">
               <a:srgbClr val="000000">
-                <a:alpha val="12000"/>
+                <a:alpha val="10000"/>
               </a:srgbClr>
             </a:outerShdw>
           </a:effectLst>
         </p:spPr>
       </p:sp>
+      <p:sp>
+        <p:nvSpPr>
+          <p:cNvPr id="11" name="Shape 9"/>
+          <p:cNvSpPr/>
+          <p:nvPr/>
+        </p:nvSpPr>
+        <p:spPr>
+          <a:xfrm>
+            <a:off x="3653028" y="2468880"/>
+            <a:ext cx="548640" cy="548640"/>
+          </a:xfrm>
+          <a:prstGeom prst="ellipse">
+            <a:avLst/>
+          </a:prstGeom>
+          <a:solidFill>
+            <a:srgbClr val="7A5080"/>
+          </a:solidFill>
+          <a:ln/>
+        </p:spPr>
+      </p:sp>
+      <p:sp>
+        <p:nvSpPr>
+          <p:cNvPr id="12" name="Text 10"/>
+          <p:cNvSpPr/>
+          <p:nvPr/>
+        </p:nvSpPr>
+        <p:spPr>
+          <a:xfrm>
+            <a:off x="3653028" y="3072384"/>
+            <a:ext cx="2240280" cy="310896"/>
+          </a:xfrm>
+          <a:prstGeom prst="rect">
+            <a:avLst/>
+          </a:prstGeom>
+          <a:noFill/>
+          <a:ln/>
+        </p:spPr>
+        <p:txBody>
+          <a:bodyPr wrap="square" lIns="0" tIns="0" rIns="0" bIns="0" rtlCol="0" anchor="ctr"/>
+          <a:lstStyle/>
+          <a:p>
+            <a:pPr algn="l" indent="0" marL="0">
+              <a:buNone/>
+            </a:pPr>
+            <a:r>
+              <a:rPr lang="en-US" sz="1600" b="1" dirty="0">
+                <a:solidFill>
+                  <a:srgbClr val="7A5080"/>
+                </a:solidFill>
+                <a:latin typeface="Georgia" pitchFamily="34" charset="0"/>
+                <a:ea typeface="Georgia" pitchFamily="34" charset="-122"/>
+                <a:cs typeface="Georgia" pitchFamily="34" charset="-120"/>
+              </a:rPr>
+              <a:t>No detail</a:t>
+            </a:r>
+            <a:endParaRPr lang="en-US" sz="1600" dirty="0"/>
+          </a:p>
+        </p:txBody>
+      </p:sp>
+      <p:sp>
+        <p:nvSpPr>
+          <p:cNvPr id="13" name="Text 11"/>
+          <p:cNvSpPr/>
+          <p:nvPr/>
+        </p:nvSpPr>
+        <p:spPr>
+          <a:xfrm>
+            <a:off x="3653028" y="3401568"/>
+            <a:ext cx="2240280" cy="658368"/>
+          </a:xfrm>
+          <a:prstGeom prst="rect">
+            <a:avLst/>
+          </a:prstGeom>
+          <a:noFill/>
+          <a:ln/>
+        </p:spPr>
+        <p:txBody>
+          <a:bodyPr wrap="square" lIns="0" tIns="0" rIns="0" bIns="0" rtlCol="0" anchor="t"/>
+          <a:lstStyle/>
+          <a:p>
+            <a:pPr algn="l" indent="0" marL="0">
+              <a:buNone/>
+            </a:pPr>
+            <a:r>
+              <a:rPr lang="en-US" sz="1150" dirty="0">
+                <a:solidFill>
+                  <a:srgbClr val="3A2E3F"/>
+                </a:solidFill>
+                <a:latin typeface="Calibri" pitchFamily="34" charset="0"/>
+                <a:ea typeface="Calibri" pitchFamily="34" charset="-122"/>
+                <a:cs typeface="Calibri" pitchFamily="34" charset="-120"/>
+              </a:rPr>
+              <a:t>No industry, no setting, no day-to-day. Nothing to plan around.</a:t>
+            </a:r>
+            <a:endParaRPr lang="en-US" sz="1150" dirty="0"/>
+          </a:p>
+        </p:txBody>
+      </p:sp>
+      <p:sp>
+        <p:nvSpPr>
+          <p:cNvPr id="14" name="Shape 12"/>
+          <p:cNvSpPr/>
+          <p:nvPr/>
+        </p:nvSpPr>
+        <p:spPr>
+          <a:xfrm>
+            <a:off x="6291072" y="2240280"/>
+            <a:ext cx="2697480" cy="1828800"/>
+          </a:xfrm>
+          <a:prstGeom prst="rect">
+            <a:avLst/>
+          </a:prstGeom>
+          <a:solidFill>
+            <a:srgbClr val="FFFFFF"/>
+          </a:solidFill>
+          <a:ln/>
+          <a:effectLst>
+            <a:outerShdw sx="100000" sy="100000" kx="0" ky="0" algn="bl" rotWithShape="0" blurRad="63500" dist="25400" dir="8100000">
+              <a:srgbClr val="000000">
+                <a:alpha val="10000"/>
+              </a:srgbClr>
+            </a:outerShdw>
+          </a:effectLst>
+        </p:spPr>
+      </p:sp>
+      <p:sp>
+        <p:nvSpPr>
+          <p:cNvPr id="15" name="Shape 13"/>
+          <p:cNvSpPr/>
+          <p:nvPr/>
+        </p:nvSpPr>
+        <p:spPr>
+          <a:xfrm>
+            <a:off x="6547104" y="2468880"/>
+            <a:ext cx="548640" cy="548640"/>
+          </a:xfrm>
+          <a:prstGeom prst="ellipse">
+            <a:avLst/>
+          </a:prstGeom>
+          <a:solidFill>
+            <a:srgbClr val="B8956A"/>
+          </a:solidFill>
+          <a:ln/>
+        </p:spPr>
+      </p:sp>
+      <p:sp>
+        <p:nvSpPr>
+          <p:cNvPr id="16" name="Text 14"/>
+          <p:cNvSpPr/>
+          <p:nvPr/>
+        </p:nvSpPr>
+        <p:spPr>
+          <a:xfrm>
+            <a:off x="6547104" y="3072384"/>
+            <a:ext cx="2240280" cy="310896"/>
+          </a:xfrm>
+          <a:prstGeom prst="rect">
+            <a:avLst/>
+          </a:prstGeom>
+          <a:noFill/>
+          <a:ln/>
+        </p:spPr>
+        <p:txBody>
+          <a:bodyPr wrap="square" lIns="0" tIns="0" rIns="0" bIns="0" rtlCol="0" anchor="ctr"/>
+          <a:lstStyle/>
+          <a:p>
+            <a:pPr algn="l" indent="0" marL="0">
+              <a:buNone/>
+            </a:pPr>
+            <a:r>
+              <a:rPr lang="en-US" sz="1600" b="1" dirty="0">
+                <a:solidFill>
+                  <a:srgbClr val="7A5080"/>
+                </a:solidFill>
+                <a:latin typeface="Georgia" pitchFamily="34" charset="0"/>
+                <a:ea typeface="Georgia" pitchFamily="34" charset="-122"/>
+                <a:cs typeface="Georgia" pitchFamily="34" charset="-120"/>
+              </a:rPr>
+              <a:t>No direction</a:t>
+            </a:r>
+            <a:endParaRPr lang="en-US" sz="1600" dirty="0"/>
+          </a:p>
+        </p:txBody>
+      </p:sp>
+      <p:sp>
+        <p:nvSpPr>
+          <p:cNvPr id="17" name="Text 15"/>
+          <p:cNvSpPr/>
+          <p:nvPr/>
+        </p:nvSpPr>
+        <p:spPr>
+          <a:xfrm>
+            <a:off x="6547104" y="3401568"/>
+            <a:ext cx="2240280" cy="658368"/>
+          </a:xfrm>
+          <a:prstGeom prst="rect">
+            <a:avLst/>
+          </a:prstGeom>
+          <a:noFill/>
+          <a:ln/>
+        </p:spPr>
+        <p:txBody>
+          <a:bodyPr wrap="square" lIns="0" tIns="0" rIns="0" bIns="0" rtlCol="0" anchor="t"/>
+          <a:lstStyle/>
+          <a:p>
+            <a:pPr algn="l" indent="0" marL="0">
+              <a:buNone/>
+            </a:pPr>
+            <a:r>
+              <a:rPr lang="en-US" sz="1150" dirty="0">
+                <a:solidFill>
+                  <a:srgbClr val="3A2E3F"/>
+                </a:solidFill>
+                <a:latin typeface="Calibri" pitchFamily="34" charset="0"/>
+                <a:ea typeface="Calibri" pitchFamily="34" charset="-122"/>
+                <a:cs typeface="Calibri" pitchFamily="34" charset="-120"/>
+              </a:rPr>
+              <a:t>If it can’t pick your next task, it can’t guide your semester.</a:t>
+            </a:r>
+            <a:endParaRPr lang="en-US" sz="1150" dirty="0"/>
+          </a:p>
+        </p:txBody>
+      </p:sp>
+      <p:sp>
+        <p:nvSpPr>
+          <p:cNvPr id="18" name="Text 16"/>
+          <p:cNvSpPr/>
+          <p:nvPr/>
+        </p:nvSpPr>
+        <p:spPr>
+          <a:xfrm>
+            <a:off x="502920" y="4736592"/>
+            <a:ext cx="8229600" cy="274320"/>
+          </a:xfrm>
+          <a:prstGeom prst="rect">
+            <a:avLst/>
+          </a:prstGeom>
+          <a:noFill/>
+          <a:ln/>
+        </p:spPr>
+        <p:txBody>
+          <a:bodyPr wrap="square" lIns="0" tIns="0" rIns="0" bIns="0" rtlCol="0" anchor="ctr"/>
+          <a:lstStyle/>
+          <a:p>
+            <a:pPr algn="l" indent="0" marL="0">
+              <a:buNone/>
+            </a:pPr>
+            <a:r>
+              <a:rPr lang="en-US" sz="1350" b="1" i="1" dirty="0">
+                <a:solidFill>
+                  <a:srgbClr val="B8956A"/>
+                </a:solidFill>
+                <a:latin typeface="Calibri" pitchFamily="34" charset="0"/>
+                <a:ea typeface="Calibri" pitchFamily="34" charset="-122"/>
+                <a:cs typeface="Calibri" pitchFamily="34" charset="-120"/>
+              </a:rPr>
+              <a:t>A goal you can’t act on isn’t really a goal yet.</a:t>
+            </a:r>
+            <a:endParaRPr lang="en-US" sz="1350" dirty="0"/>
+          </a:p>
+        </p:txBody>
+      </p:sp>
       <p:pic>
         <p:nvPicPr>
-          <p:cNvPr id="8" name="Image 0" descr="preencoded.png">    </p:cNvPr>
+          <p:cNvPr id="19" name="Image 0" descr="preencoded.png">    </p:cNvPr>
           <p:cNvPicPr>
             <a:picLocks noChangeAspect="1"/>
           </p:cNvPicPr>
@@ -1955,144 +2398,9 @@
           </a:prstGeom>
         </p:spPr>
       </p:pic>
-      <p:sp>
-        <p:nvSpPr>
-          <p:cNvPr id="9" name="Text 6"/>
-          <p:cNvSpPr/>
-          <p:nvPr/>
-        </p:nvSpPr>
-        <p:spPr>
-          <a:xfrm>
-            <a:off x="758952" y="3072384"/>
-            <a:ext cx="2240280" cy="310896"/>
-          </a:xfrm>
-          <a:prstGeom prst="rect">
-            <a:avLst/>
-          </a:prstGeom>
-          <a:noFill/>
-          <a:ln/>
-        </p:spPr>
-        <p:txBody>
-          <a:bodyPr wrap="square" lIns="0" tIns="0" rIns="0" bIns="0" rtlCol="0" anchor="ctr"/>
-          <a:lstStyle/>
-          <a:p>
-            <a:pPr indent="0" marL="0">
-              <a:buNone/>
-            </a:pPr>
-            <a:r>
-              <a:rPr lang="en-US" sz="1600" b="1" dirty="0">
-                <a:solidFill>
-                  <a:srgbClr val="7A5080"/>
-                </a:solidFill>
-                <a:latin typeface="Georgia" pitchFamily="34" charset="0"/>
-                <a:ea typeface="Georgia" pitchFamily="34" charset="-122"/>
-                <a:cs typeface="Georgia" pitchFamily="34" charset="-120"/>
-              </a:rPr>
-              <a:t>Too broad</a:t>
-            </a:r>
-            <a:endParaRPr lang="en-US" sz="1600" dirty="0"/>
-          </a:p>
-        </p:txBody>
-      </p:sp>
-      <p:sp>
-        <p:nvSpPr>
-          <p:cNvPr id="10" name="Text 7"/>
-          <p:cNvSpPr/>
-          <p:nvPr/>
-        </p:nvSpPr>
-        <p:spPr>
-          <a:xfrm>
-            <a:off x="758952" y="3401568"/>
-            <a:ext cx="2185416" cy="658368"/>
-          </a:xfrm>
-          <a:prstGeom prst="rect">
-            <a:avLst/>
-          </a:prstGeom>
-          <a:noFill/>
-          <a:ln/>
-        </p:spPr>
-        <p:txBody>
-          <a:bodyPr wrap="square" lIns="0" tIns="0" rIns="0" bIns="0" rtlCol="0" anchor="ctr"/>
-          <a:lstStyle/>
-          <a:p>
-            <a:pPr indent="0" marL="0">
-              <a:lnSpc>
-                <a:spcPct val="105000"/>
-              </a:lnSpc>
-              <a:buNone/>
-            </a:pPr>
-            <a:r>
-              <a:rPr lang="en-US" sz="1150" dirty="0">
-                <a:solidFill>
-                  <a:srgbClr val="3A2E3F"/>
-                </a:solidFill>
-                <a:latin typeface="Calibri" pitchFamily="34" charset="0"/>
-                <a:ea typeface="Calibri" pitchFamily="34" charset="-122"/>
-                <a:cs typeface="Calibri" pitchFamily="34" charset="-120"/>
-              </a:rPr>
-              <a:t>“I want a design job” fits a thousand roles and points at none of them.</a:t>
-            </a:r>
-            <a:endParaRPr lang="en-US" sz="1150" dirty="0"/>
-          </a:p>
-        </p:txBody>
-      </p:sp>
-      <p:sp>
-        <p:nvSpPr>
-          <p:cNvPr id="11" name="Shape 8"/>
-          <p:cNvSpPr/>
-          <p:nvPr/>
-        </p:nvSpPr>
-        <p:spPr>
-          <a:xfrm>
-            <a:off x="3355848" y="2240280"/>
-            <a:ext cx="2697480" cy="1828800"/>
-          </a:xfrm>
-          <a:prstGeom prst="rect">
-            <a:avLst/>
-          </a:prstGeom>
-          <a:solidFill>
-            <a:srgbClr val="FFFFFF"/>
-          </a:solidFill>
-          <a:ln/>
-          <a:effectLst>
-            <a:outerShdw sx="100000" sy="100000" kx="0" ky="0" algn="bl" rotWithShape="0" blurRad="114300" dist="38100" dir="5400000">
-              <a:srgbClr val="000000">
-                <a:alpha val="10000"/>
-              </a:srgbClr>
-            </a:outerShdw>
-          </a:effectLst>
-        </p:spPr>
-      </p:sp>
-      <p:sp>
-        <p:nvSpPr>
-          <p:cNvPr id="12" name="Shape 9"/>
-          <p:cNvSpPr/>
-          <p:nvPr/>
-        </p:nvSpPr>
-        <p:spPr>
-          <a:xfrm>
-            <a:off x="3611880" y="2468880"/>
-            <a:ext cx="548640" cy="548640"/>
-          </a:xfrm>
-          <a:prstGeom prst="ellipse">
-            <a:avLst/>
-          </a:prstGeom>
-          <a:solidFill>
-            <a:srgbClr val="7A5080"/>
-          </a:solidFill>
-          <a:ln/>
-          <a:effectLst>
-            <a:outerShdw sx="100000" sy="100000" kx="0" ky="0" algn="bl" rotWithShape="0" blurRad="88900" dist="38100" dir="5400000">
-              <a:srgbClr val="000000">
-                <a:alpha val="12000"/>
-              </a:srgbClr>
-            </a:outerShdw>
-          </a:effectLst>
-        </p:spPr>
-      </p:sp>
       <p:pic>
         <p:nvPicPr>
-          <p:cNvPr id="13" name="Image 1" descr="preencoded.png">    </p:cNvPr>
+          <p:cNvPr id="20" name="Image 1" descr="preencoded.png">    </p:cNvPr>
           <p:cNvPicPr>
             <a:picLocks noChangeAspect="1"/>
           </p:cNvPicPr>
@@ -2106,7 +2414,7 @@
         </p:blipFill>
         <p:spPr>
           <a:xfrm>
-            <a:off x="3754526" y="2611526"/>
+            <a:off x="3795674" y="2611526"/>
             <a:ext cx="263347" cy="263347"/>
           </a:xfrm>
           <a:prstGeom prst="rect">
@@ -2114,144 +2422,9 @@
           </a:prstGeom>
         </p:spPr>
       </p:pic>
-      <p:sp>
-        <p:nvSpPr>
-          <p:cNvPr id="14" name="Text 10"/>
-          <p:cNvSpPr/>
-          <p:nvPr/>
-        </p:nvSpPr>
-        <p:spPr>
-          <a:xfrm>
-            <a:off x="3611880" y="3072384"/>
-            <a:ext cx="2240280" cy="310896"/>
-          </a:xfrm>
-          <a:prstGeom prst="rect">
-            <a:avLst/>
-          </a:prstGeom>
-          <a:noFill/>
-          <a:ln/>
-        </p:spPr>
-        <p:txBody>
-          <a:bodyPr wrap="square" lIns="0" tIns="0" rIns="0" bIns="0" rtlCol="0" anchor="ctr"/>
-          <a:lstStyle/>
-          <a:p>
-            <a:pPr indent="0" marL="0">
-              <a:buNone/>
-            </a:pPr>
-            <a:r>
-              <a:rPr lang="en-US" sz="1600" b="1" dirty="0">
-                <a:solidFill>
-                  <a:srgbClr val="7A5080"/>
-                </a:solidFill>
-                <a:latin typeface="Georgia" pitchFamily="34" charset="0"/>
-                <a:ea typeface="Georgia" pitchFamily="34" charset="-122"/>
-                <a:cs typeface="Georgia" pitchFamily="34" charset="-120"/>
-              </a:rPr>
-              <a:t>No detail</a:t>
-            </a:r>
-            <a:endParaRPr lang="en-US" sz="1600" dirty="0"/>
-          </a:p>
-        </p:txBody>
-      </p:sp>
-      <p:sp>
-        <p:nvSpPr>
-          <p:cNvPr id="15" name="Text 11"/>
-          <p:cNvSpPr/>
-          <p:nvPr/>
-        </p:nvSpPr>
-        <p:spPr>
-          <a:xfrm>
-            <a:off x="3611880" y="3401568"/>
-            <a:ext cx="2185416" cy="658368"/>
-          </a:xfrm>
-          <a:prstGeom prst="rect">
-            <a:avLst/>
-          </a:prstGeom>
-          <a:noFill/>
-          <a:ln/>
-        </p:spPr>
-        <p:txBody>
-          <a:bodyPr wrap="square" lIns="0" tIns="0" rIns="0" bIns="0" rtlCol="0" anchor="ctr"/>
-          <a:lstStyle/>
-          <a:p>
-            <a:pPr indent="0" marL="0">
-              <a:lnSpc>
-                <a:spcPct val="105000"/>
-              </a:lnSpc>
-              <a:buNone/>
-            </a:pPr>
-            <a:r>
-              <a:rPr lang="en-US" sz="1150" dirty="0">
-                <a:solidFill>
-                  <a:srgbClr val="3A2E3F"/>
-                </a:solidFill>
-                <a:latin typeface="Calibri" pitchFamily="34" charset="0"/>
-                <a:ea typeface="Calibri" pitchFamily="34" charset="-122"/>
-                <a:cs typeface="Calibri" pitchFamily="34" charset="-120"/>
-              </a:rPr>
-              <a:t>No industry, no setting, no day-to-day. Nothing to plan around.</a:t>
-            </a:r>
-            <a:endParaRPr lang="en-US" sz="1150" dirty="0"/>
-          </a:p>
-        </p:txBody>
-      </p:sp>
-      <p:sp>
-        <p:nvSpPr>
-          <p:cNvPr id="16" name="Shape 12"/>
-          <p:cNvSpPr/>
-          <p:nvPr/>
-        </p:nvSpPr>
-        <p:spPr>
-          <a:xfrm>
-            <a:off x="6208776" y="2240280"/>
-            <a:ext cx="2697480" cy="1828800"/>
-          </a:xfrm>
-          <a:prstGeom prst="rect">
-            <a:avLst/>
-          </a:prstGeom>
-          <a:solidFill>
-            <a:srgbClr val="FFFFFF"/>
-          </a:solidFill>
-          <a:ln/>
-          <a:effectLst>
-            <a:outerShdw sx="100000" sy="100000" kx="0" ky="0" algn="bl" rotWithShape="0" blurRad="114300" dist="38100" dir="5400000">
-              <a:srgbClr val="000000">
-                <a:alpha val="10000"/>
-              </a:srgbClr>
-            </a:outerShdw>
-          </a:effectLst>
-        </p:spPr>
-      </p:sp>
-      <p:sp>
-        <p:nvSpPr>
-          <p:cNvPr id="17" name="Shape 13"/>
-          <p:cNvSpPr/>
-          <p:nvPr/>
-        </p:nvSpPr>
-        <p:spPr>
-          <a:xfrm>
-            <a:off x="6464808" y="2468880"/>
-            <a:ext cx="548640" cy="548640"/>
-          </a:xfrm>
-          <a:prstGeom prst="ellipse">
-            <a:avLst/>
-          </a:prstGeom>
-          <a:solidFill>
-            <a:srgbClr val="B8956A"/>
-          </a:solidFill>
-          <a:ln/>
-          <a:effectLst>
-            <a:outerShdw sx="100000" sy="100000" kx="0" ky="0" algn="bl" rotWithShape="0" blurRad="88900" dist="38100" dir="5400000">
-              <a:srgbClr val="000000">
-                <a:alpha val="12000"/>
-              </a:srgbClr>
-            </a:outerShdw>
-          </a:effectLst>
-        </p:spPr>
-      </p:sp>
       <p:pic>
         <p:nvPicPr>
-          <p:cNvPr id="18" name="Image 2" descr="preencoded.png">    </p:cNvPr>
+          <p:cNvPr id="21" name="Image 2" descr="preencoded.png">    </p:cNvPr>
           <p:cNvPicPr>
             <a:picLocks noChangeAspect="1"/>
           </p:cNvPicPr>
@@ -2265,7 +2438,7 @@
         </p:blipFill>
         <p:spPr>
           <a:xfrm>
-            <a:off x="6607454" y="2611526"/>
+            <a:off x="6689750" y="2611526"/>
             <a:ext cx="263347" cy="263347"/>
           </a:xfrm>
           <a:prstGeom prst="rect">
@@ -2273,126 +2446,6 @@
           </a:prstGeom>
         </p:spPr>
       </p:pic>
-      <p:sp>
-        <p:nvSpPr>
-          <p:cNvPr id="19" name="Text 14"/>
-          <p:cNvSpPr/>
-          <p:nvPr/>
-        </p:nvSpPr>
-        <p:spPr>
-          <a:xfrm>
-            <a:off x="6464808" y="3072384"/>
-            <a:ext cx="2240280" cy="310896"/>
-          </a:xfrm>
-          <a:prstGeom prst="rect">
-            <a:avLst/>
-          </a:prstGeom>
-          <a:noFill/>
-          <a:ln/>
-        </p:spPr>
-        <p:txBody>
-          <a:bodyPr wrap="square" lIns="0" tIns="0" rIns="0" bIns="0" rtlCol="0" anchor="ctr"/>
-          <a:lstStyle/>
-          <a:p>
-            <a:pPr indent="0" marL="0">
-              <a:buNone/>
-            </a:pPr>
-            <a:r>
-              <a:rPr lang="en-US" sz="1600" b="1" dirty="0">
-                <a:solidFill>
-                  <a:srgbClr val="7A5080"/>
-                </a:solidFill>
-                <a:latin typeface="Georgia" pitchFamily="34" charset="0"/>
-                <a:ea typeface="Georgia" pitchFamily="34" charset="-122"/>
-                <a:cs typeface="Georgia" pitchFamily="34" charset="-120"/>
-              </a:rPr>
-              <a:t>No direction</a:t>
-            </a:r>
-            <a:endParaRPr lang="en-US" sz="1600" dirty="0"/>
-          </a:p>
-        </p:txBody>
-      </p:sp>
-      <p:sp>
-        <p:nvSpPr>
-          <p:cNvPr id="20" name="Text 15"/>
-          <p:cNvSpPr/>
-          <p:nvPr/>
-        </p:nvSpPr>
-        <p:spPr>
-          <a:xfrm>
-            <a:off x="6464808" y="3401568"/>
-            <a:ext cx="2185416" cy="658368"/>
-          </a:xfrm>
-          <a:prstGeom prst="rect">
-            <a:avLst/>
-          </a:prstGeom>
-          <a:noFill/>
-          <a:ln/>
-        </p:spPr>
-        <p:txBody>
-          <a:bodyPr wrap="square" lIns="0" tIns="0" rIns="0" bIns="0" rtlCol="0" anchor="ctr"/>
-          <a:lstStyle/>
-          <a:p>
-            <a:pPr indent="0" marL="0">
-              <a:lnSpc>
-                <a:spcPct val="105000"/>
-              </a:lnSpc>
-              <a:buNone/>
-            </a:pPr>
-            <a:r>
-              <a:rPr lang="en-US" sz="1150" dirty="0">
-                <a:solidFill>
-                  <a:srgbClr val="3A2E3F"/>
-                </a:solidFill>
-                <a:latin typeface="Calibri" pitchFamily="34" charset="0"/>
-                <a:ea typeface="Calibri" pitchFamily="34" charset="-122"/>
-                <a:cs typeface="Calibri" pitchFamily="34" charset="-120"/>
-              </a:rPr>
-              <a:t>If it can’t pick your next task, it can’t guide your semester.</a:t>
-            </a:r>
-            <a:endParaRPr lang="en-US" sz="1150" dirty="0"/>
-          </a:p>
-        </p:txBody>
-      </p:sp>
-      <p:sp>
-        <p:nvSpPr>
-          <p:cNvPr id="21" name="Text 16"/>
-          <p:cNvSpPr/>
-          <p:nvPr/>
-        </p:nvSpPr>
-        <p:spPr>
-          <a:xfrm>
-            <a:off x="502920" y="4736592"/>
-            <a:ext cx="8229600" cy="274320"/>
-          </a:xfrm>
-          <a:prstGeom prst="rect">
-            <a:avLst/>
-          </a:prstGeom>
-          <a:noFill/>
-          <a:ln/>
-        </p:spPr>
-        <p:txBody>
-          <a:bodyPr wrap="square" lIns="0" tIns="0" rIns="0" bIns="0" rtlCol="0" anchor="ctr"/>
-          <a:lstStyle/>
-          <a:p>
-            <a:pPr algn="l" indent="0" marL="0">
-              <a:buNone/>
-            </a:pPr>
-            <a:r>
-              <a:rPr lang="en-US" sz="1350" i="1" dirty="0">
-                <a:solidFill>
-                  <a:srgbClr val="B8956A"/>
-                </a:solidFill>
-                <a:latin typeface="Georgia" pitchFamily="34" charset="0"/>
-                <a:ea typeface="Georgia" pitchFamily="34" charset="-122"/>
-                <a:cs typeface="Georgia" pitchFamily="34" charset="-120"/>
-              </a:rPr>
-              <a:t>A goal you can’t act on isn’t really a goal yet.</a:t>
-            </a:r>
-            <a:endParaRPr lang="en-US" sz="1350" dirty="0"/>
-          </a:p>
-        </p:txBody>
-      </p:sp>
     </p:spTree>
   </p:cSld>
   <p:clrMapOvr>
@@ -2502,13 +2555,10 @@
           <a:ln/>
         </p:spPr>
         <p:txBody>
-          <a:bodyPr wrap="square" lIns="0" tIns="0" rIns="0" bIns="0" rtlCol="0" anchor="t"/>
-          <a:lstStyle/>
-          <a:p>
-            <a:pPr algn="l" indent="0" marL="0">
-              <a:lnSpc>
-                <a:spcPct val="98000"/>
-              </a:lnSpc>
+          <a:bodyPr wrap="square" lIns="0" tIns="0" rIns="0" bIns="0" rtlCol="0" anchor="ctr"/>
+          <a:lstStyle/>
+          <a:p>
+            <a:pPr algn="l" indent="0" marL="0">
               <a:buNone/>
             </a:pPr>
             <a:r>
@@ -2535,7 +2585,7 @@
         <p:spPr>
           <a:xfrm>
             <a:off x="502920" y="1444752"/>
-            <a:ext cx="8183880" cy="411480"/>
+            <a:ext cx="8183880" cy="548640"/>
           </a:xfrm>
           <a:prstGeom prst="rect">
             <a:avLst/>
@@ -2548,9 +2598,6 @@
           <a:lstStyle/>
           <a:p>
             <a:pPr algn="l" indent="0" marL="0">
-              <a:lnSpc>
-                <a:spcPct val="105000"/>
-              </a:lnSpc>
               <a:buNone/>
             </a:pPr>
             <a:r>
@@ -2576,8 +2623,8 @@
         </p:nvSpPr>
         <p:spPr>
           <a:xfrm>
-            <a:off x="502920" y="2121408"/>
-            <a:ext cx="1883664" cy="950976"/>
+            <a:off x="502920" y="2148840"/>
+            <a:ext cx="1920240" cy="1051560"/>
           </a:xfrm>
           <a:prstGeom prst="rect">
             <a:avLst/>
@@ -2587,9 +2634,9 @@
           </a:solidFill>
           <a:ln/>
           <a:effectLst>
-            <a:outerShdw sx="100000" sy="100000" kx="0" ky="0" algn="bl" rotWithShape="0" blurRad="114300" dist="38100" dir="5400000">
+            <a:outerShdw sx="100000" sy="100000" kx="0" ky="0" algn="bl" rotWithShape="0" blurRad="50800" dist="25400" dir="8100000">
               <a:srgbClr val="000000">
-                <a:alpha val="10000"/>
+                <a:alpha val="9000"/>
               </a:srgbClr>
             </a:outerShdw>
           </a:effectLst>
@@ -2603,8 +2650,8 @@
         </p:nvSpPr>
         <p:spPr>
           <a:xfrm>
-            <a:off x="1188720" y="2240280"/>
-            <a:ext cx="512064" cy="512064"/>
+            <a:off x="731520" y="2350008"/>
+            <a:ext cx="502920" cy="502920"/>
           </a:xfrm>
           <a:prstGeom prst="ellipse">
             <a:avLst/>
@@ -2613,18 +2660,691 @@
             <a:srgbClr val="7A5080"/>
           </a:solidFill>
           <a:ln/>
+        </p:spPr>
+      </p:sp>
+      <p:sp>
+        <p:nvSpPr>
+          <p:cNvPr id="8" name="Text 6"/>
+          <p:cNvSpPr/>
+          <p:nvPr/>
+        </p:nvSpPr>
+        <p:spPr>
+          <a:xfrm>
+            <a:off x="1325880" y="2148840"/>
+            <a:ext cx="1005840" cy="1051560"/>
+          </a:xfrm>
+          <a:prstGeom prst="rect">
+            <a:avLst/>
+          </a:prstGeom>
+          <a:noFill/>
+          <a:ln/>
+        </p:spPr>
+        <p:txBody>
+          <a:bodyPr wrap="square" lIns="0" tIns="0" rIns="0" bIns="0" rtlCol="0" anchor="ctr"/>
+          <a:lstStyle/>
+          <a:p>
+            <a:pPr algn="l" indent="0" marL="0">
+              <a:buNone/>
+            </a:pPr>
+            <a:r>
+              <a:rPr lang="en-US" sz="1500" b="1" dirty="0">
+                <a:solidFill>
+                  <a:srgbClr val="7A5080"/>
+                </a:solidFill>
+                <a:latin typeface="Georgia" pitchFamily="34" charset="0"/>
+                <a:ea typeface="Georgia" pitchFamily="34" charset="-122"/>
+                <a:cs typeface="Georgia" pitchFamily="34" charset="-120"/>
+              </a:rPr>
+              <a:t>Role</a:t>
+            </a:r>
+            <a:endParaRPr lang="en-US" sz="1500" dirty="0"/>
+          </a:p>
+        </p:txBody>
+      </p:sp>
+      <p:sp>
+        <p:nvSpPr>
+          <p:cNvPr id="9" name="Shape 7"/>
+          <p:cNvSpPr/>
+          <p:nvPr/>
+        </p:nvSpPr>
+        <p:spPr>
+          <a:xfrm>
+            <a:off x="2587752" y="2148840"/>
+            <a:ext cx="1920240" cy="1051560"/>
+          </a:xfrm>
+          <a:prstGeom prst="rect">
+            <a:avLst/>
+          </a:prstGeom>
+          <a:solidFill>
+            <a:srgbClr val="FFFFFF"/>
+          </a:solidFill>
+          <a:ln/>
           <a:effectLst>
-            <a:outerShdw sx="100000" sy="100000" kx="0" ky="0" algn="bl" rotWithShape="0" blurRad="88900" dist="38100" dir="5400000">
+            <a:outerShdw sx="100000" sy="100000" kx="0" ky="0" algn="bl" rotWithShape="0" blurRad="50800" dist="25400" dir="8100000">
               <a:srgbClr val="000000">
-                <a:alpha val="12000"/>
+                <a:alpha val="9000"/>
               </a:srgbClr>
             </a:outerShdw>
           </a:effectLst>
         </p:spPr>
       </p:sp>
+      <p:sp>
+        <p:nvSpPr>
+          <p:cNvPr id="10" name="Shape 8"/>
+          <p:cNvSpPr/>
+          <p:nvPr/>
+        </p:nvSpPr>
+        <p:spPr>
+          <a:xfrm>
+            <a:off x="2816352" y="2350008"/>
+            <a:ext cx="502920" cy="502920"/>
+          </a:xfrm>
+          <a:prstGeom prst="ellipse">
+            <a:avLst/>
+          </a:prstGeom>
+          <a:solidFill>
+            <a:srgbClr val="C4929E"/>
+          </a:solidFill>
+          <a:ln/>
+        </p:spPr>
+      </p:sp>
+      <p:sp>
+        <p:nvSpPr>
+          <p:cNvPr id="11" name="Text 9"/>
+          <p:cNvSpPr/>
+          <p:nvPr/>
+        </p:nvSpPr>
+        <p:spPr>
+          <a:xfrm>
+            <a:off x="3410712" y="2148840"/>
+            <a:ext cx="1005840" cy="1051560"/>
+          </a:xfrm>
+          <a:prstGeom prst="rect">
+            <a:avLst/>
+          </a:prstGeom>
+          <a:noFill/>
+          <a:ln/>
+        </p:spPr>
+        <p:txBody>
+          <a:bodyPr wrap="square" lIns="0" tIns="0" rIns="0" bIns="0" rtlCol="0" anchor="ctr"/>
+          <a:lstStyle/>
+          <a:p>
+            <a:pPr algn="l" indent="0" marL="0">
+              <a:buNone/>
+            </a:pPr>
+            <a:r>
+              <a:rPr lang="en-US" sz="1500" b="1" dirty="0">
+                <a:solidFill>
+                  <a:srgbClr val="7A5080"/>
+                </a:solidFill>
+                <a:latin typeface="Georgia" pitchFamily="34" charset="0"/>
+                <a:ea typeface="Georgia" pitchFamily="34" charset="-122"/>
+                <a:cs typeface="Georgia" pitchFamily="34" charset="-120"/>
+              </a:rPr>
+              <a:t>Industry</a:t>
+            </a:r>
+            <a:endParaRPr lang="en-US" sz="1500" dirty="0"/>
+          </a:p>
+        </p:txBody>
+      </p:sp>
+      <p:sp>
+        <p:nvSpPr>
+          <p:cNvPr id="12" name="Shape 10"/>
+          <p:cNvSpPr/>
+          <p:nvPr/>
+        </p:nvSpPr>
+        <p:spPr>
+          <a:xfrm>
+            <a:off x="4672584" y="2148840"/>
+            <a:ext cx="1920240" cy="1051560"/>
+          </a:xfrm>
+          <a:prstGeom prst="rect">
+            <a:avLst/>
+          </a:prstGeom>
+          <a:solidFill>
+            <a:srgbClr val="FFFFFF"/>
+          </a:solidFill>
+          <a:ln/>
+          <a:effectLst>
+            <a:outerShdw sx="100000" sy="100000" kx="0" ky="0" algn="bl" rotWithShape="0" blurRad="50800" dist="25400" dir="8100000">
+              <a:srgbClr val="000000">
+                <a:alpha val="9000"/>
+              </a:srgbClr>
+            </a:outerShdw>
+          </a:effectLst>
+        </p:spPr>
+      </p:sp>
+      <p:sp>
+        <p:nvSpPr>
+          <p:cNvPr id="13" name="Shape 11"/>
+          <p:cNvSpPr/>
+          <p:nvPr/>
+        </p:nvSpPr>
+        <p:spPr>
+          <a:xfrm>
+            <a:off x="4901184" y="2350008"/>
+            <a:ext cx="502920" cy="502920"/>
+          </a:xfrm>
+          <a:prstGeom prst="ellipse">
+            <a:avLst/>
+          </a:prstGeom>
+          <a:solidFill>
+            <a:srgbClr val="6B8F6E"/>
+          </a:solidFill>
+          <a:ln/>
+        </p:spPr>
+      </p:sp>
+      <p:sp>
+        <p:nvSpPr>
+          <p:cNvPr id="14" name="Text 12"/>
+          <p:cNvSpPr/>
+          <p:nvPr/>
+        </p:nvSpPr>
+        <p:spPr>
+          <a:xfrm>
+            <a:off x="5495544" y="2148840"/>
+            <a:ext cx="1005840" cy="1051560"/>
+          </a:xfrm>
+          <a:prstGeom prst="rect">
+            <a:avLst/>
+          </a:prstGeom>
+          <a:noFill/>
+          <a:ln/>
+        </p:spPr>
+        <p:txBody>
+          <a:bodyPr wrap="square" lIns="0" tIns="0" rIns="0" bIns="0" rtlCol="0" anchor="ctr"/>
+          <a:lstStyle/>
+          <a:p>
+            <a:pPr algn="l" indent="0" marL="0">
+              <a:buNone/>
+            </a:pPr>
+            <a:r>
+              <a:rPr lang="en-US" sz="1500" b="1" dirty="0">
+                <a:solidFill>
+                  <a:srgbClr val="7A5080"/>
+                </a:solidFill>
+                <a:latin typeface="Georgia" pitchFamily="34" charset="0"/>
+                <a:ea typeface="Georgia" pitchFamily="34" charset="-122"/>
+                <a:cs typeface="Georgia" pitchFamily="34" charset="-120"/>
+              </a:rPr>
+              <a:t>Setting</a:t>
+            </a:r>
+            <a:endParaRPr lang="en-US" sz="1500" dirty="0"/>
+          </a:p>
+        </p:txBody>
+      </p:sp>
+      <p:sp>
+        <p:nvSpPr>
+          <p:cNvPr id="15" name="Shape 13"/>
+          <p:cNvSpPr/>
+          <p:nvPr/>
+        </p:nvSpPr>
+        <p:spPr>
+          <a:xfrm>
+            <a:off x="6757416" y="2148840"/>
+            <a:ext cx="1920240" cy="1051560"/>
+          </a:xfrm>
+          <a:prstGeom prst="rect">
+            <a:avLst/>
+          </a:prstGeom>
+          <a:solidFill>
+            <a:srgbClr val="FFFFFF"/>
+          </a:solidFill>
+          <a:ln/>
+          <a:effectLst>
+            <a:outerShdw sx="100000" sy="100000" kx="0" ky="0" algn="bl" rotWithShape="0" blurRad="50800" dist="25400" dir="8100000">
+              <a:srgbClr val="000000">
+                <a:alpha val="9000"/>
+              </a:srgbClr>
+            </a:outerShdw>
+          </a:effectLst>
+        </p:spPr>
+      </p:sp>
+      <p:sp>
+        <p:nvSpPr>
+          <p:cNvPr id="16" name="Shape 14"/>
+          <p:cNvSpPr/>
+          <p:nvPr/>
+        </p:nvSpPr>
+        <p:spPr>
+          <a:xfrm>
+            <a:off x="6986016" y="2350008"/>
+            <a:ext cx="502920" cy="502920"/>
+          </a:xfrm>
+          <a:prstGeom prst="ellipse">
+            <a:avLst/>
+          </a:prstGeom>
+          <a:solidFill>
+            <a:srgbClr val="B8956A"/>
+          </a:solidFill>
+          <a:ln/>
+        </p:spPr>
+      </p:sp>
+      <p:sp>
+        <p:nvSpPr>
+          <p:cNvPr id="17" name="Text 15"/>
+          <p:cNvSpPr/>
+          <p:nvPr/>
+        </p:nvSpPr>
+        <p:spPr>
+          <a:xfrm>
+            <a:off x="7580376" y="2148840"/>
+            <a:ext cx="1005840" cy="1051560"/>
+          </a:xfrm>
+          <a:prstGeom prst="rect">
+            <a:avLst/>
+          </a:prstGeom>
+          <a:noFill/>
+          <a:ln/>
+        </p:spPr>
+        <p:txBody>
+          <a:bodyPr wrap="square" lIns="0" tIns="0" rIns="0" bIns="0" rtlCol="0" anchor="ctr"/>
+          <a:lstStyle/>
+          <a:p>
+            <a:pPr algn="l" indent="0" marL="0">
+              <a:buNone/>
+            </a:pPr>
+            <a:r>
+              <a:rPr lang="en-US" sz="1500" b="1" dirty="0">
+                <a:solidFill>
+                  <a:srgbClr val="7A5080"/>
+                </a:solidFill>
+                <a:latin typeface="Georgia" pitchFamily="34" charset="0"/>
+                <a:ea typeface="Georgia" pitchFamily="34" charset="-122"/>
+                <a:cs typeface="Georgia" pitchFamily="34" charset="-120"/>
+              </a:rPr>
+              <a:t>Location</a:t>
+            </a:r>
+            <a:endParaRPr lang="en-US" sz="1500" dirty="0"/>
+          </a:p>
+        </p:txBody>
+      </p:sp>
+      <p:sp>
+        <p:nvSpPr>
+          <p:cNvPr id="18" name="Shape 16"/>
+          <p:cNvSpPr/>
+          <p:nvPr/>
+        </p:nvSpPr>
+        <p:spPr>
+          <a:xfrm>
+            <a:off x="502920" y="3364992"/>
+            <a:ext cx="1920240" cy="1051560"/>
+          </a:xfrm>
+          <a:prstGeom prst="rect">
+            <a:avLst/>
+          </a:prstGeom>
+          <a:solidFill>
+            <a:srgbClr val="FFFFFF"/>
+          </a:solidFill>
+          <a:ln/>
+          <a:effectLst>
+            <a:outerShdw sx="100000" sy="100000" kx="0" ky="0" algn="bl" rotWithShape="0" blurRad="50800" dist="25400" dir="8100000">
+              <a:srgbClr val="000000">
+                <a:alpha val="9000"/>
+              </a:srgbClr>
+            </a:outerShdw>
+          </a:effectLst>
+        </p:spPr>
+      </p:sp>
+      <p:sp>
+        <p:nvSpPr>
+          <p:cNvPr id="19" name="Shape 17"/>
+          <p:cNvSpPr/>
+          <p:nvPr/>
+        </p:nvSpPr>
+        <p:spPr>
+          <a:xfrm>
+            <a:off x="731520" y="3566160"/>
+            <a:ext cx="502920" cy="502920"/>
+          </a:xfrm>
+          <a:prstGeom prst="ellipse">
+            <a:avLst/>
+          </a:prstGeom>
+          <a:solidFill>
+            <a:srgbClr val="C4929E"/>
+          </a:solidFill>
+          <a:ln/>
+        </p:spPr>
+      </p:sp>
+      <p:sp>
+        <p:nvSpPr>
+          <p:cNvPr id="20" name="Text 18"/>
+          <p:cNvSpPr/>
+          <p:nvPr/>
+        </p:nvSpPr>
+        <p:spPr>
+          <a:xfrm>
+            <a:off x="1325880" y="3364992"/>
+            <a:ext cx="1005840" cy="1051560"/>
+          </a:xfrm>
+          <a:prstGeom prst="rect">
+            <a:avLst/>
+          </a:prstGeom>
+          <a:noFill/>
+          <a:ln/>
+        </p:spPr>
+        <p:txBody>
+          <a:bodyPr wrap="square" lIns="0" tIns="0" rIns="0" bIns="0" rtlCol="0" anchor="ctr"/>
+          <a:lstStyle/>
+          <a:p>
+            <a:pPr algn="l" indent="0" marL="0">
+              <a:buNone/>
+            </a:pPr>
+            <a:r>
+              <a:rPr lang="en-US" sz="1500" b="1" dirty="0">
+                <a:solidFill>
+                  <a:srgbClr val="7A5080"/>
+                </a:solidFill>
+                <a:latin typeface="Georgia" pitchFamily="34" charset="0"/>
+                <a:ea typeface="Georgia" pitchFamily="34" charset="-122"/>
+                <a:cs typeface="Georgia" pitchFamily="34" charset="-120"/>
+              </a:rPr>
+              <a:t>Day-to-day</a:t>
+            </a:r>
+            <a:endParaRPr lang="en-US" sz="1500" dirty="0"/>
+          </a:p>
+        </p:txBody>
+      </p:sp>
+      <p:sp>
+        <p:nvSpPr>
+          <p:cNvPr id="21" name="Shape 19"/>
+          <p:cNvSpPr/>
+          <p:nvPr/>
+        </p:nvSpPr>
+        <p:spPr>
+          <a:xfrm>
+            <a:off x="2587752" y="3364992"/>
+            <a:ext cx="1920240" cy="1051560"/>
+          </a:xfrm>
+          <a:prstGeom prst="rect">
+            <a:avLst/>
+          </a:prstGeom>
+          <a:solidFill>
+            <a:srgbClr val="FFFFFF"/>
+          </a:solidFill>
+          <a:ln/>
+          <a:effectLst>
+            <a:outerShdw sx="100000" sy="100000" kx="0" ky="0" algn="bl" rotWithShape="0" blurRad="50800" dist="25400" dir="8100000">
+              <a:srgbClr val="000000">
+                <a:alpha val="9000"/>
+              </a:srgbClr>
+            </a:outerShdw>
+          </a:effectLst>
+        </p:spPr>
+      </p:sp>
+      <p:sp>
+        <p:nvSpPr>
+          <p:cNvPr id="22" name="Shape 20"/>
+          <p:cNvSpPr/>
+          <p:nvPr/>
+        </p:nvSpPr>
+        <p:spPr>
+          <a:xfrm>
+            <a:off x="2816352" y="3566160"/>
+            <a:ext cx="502920" cy="502920"/>
+          </a:xfrm>
+          <a:prstGeom prst="ellipse">
+            <a:avLst/>
+          </a:prstGeom>
+          <a:solidFill>
+            <a:srgbClr val="7A5080"/>
+          </a:solidFill>
+          <a:ln/>
+        </p:spPr>
+      </p:sp>
+      <p:sp>
+        <p:nvSpPr>
+          <p:cNvPr id="23" name="Text 21"/>
+          <p:cNvSpPr/>
+          <p:nvPr/>
+        </p:nvSpPr>
+        <p:spPr>
+          <a:xfrm>
+            <a:off x="3410712" y="3364992"/>
+            <a:ext cx="1005840" cy="1051560"/>
+          </a:xfrm>
+          <a:prstGeom prst="rect">
+            <a:avLst/>
+          </a:prstGeom>
+          <a:noFill/>
+          <a:ln/>
+        </p:spPr>
+        <p:txBody>
+          <a:bodyPr wrap="square" lIns="0" tIns="0" rIns="0" bIns="0" rtlCol="0" anchor="ctr"/>
+          <a:lstStyle/>
+          <a:p>
+            <a:pPr algn="l" indent="0" marL="0">
+              <a:buNone/>
+            </a:pPr>
+            <a:r>
+              <a:rPr lang="en-US" sz="1500" b="1" dirty="0">
+                <a:solidFill>
+                  <a:srgbClr val="7A5080"/>
+                </a:solidFill>
+                <a:latin typeface="Georgia" pitchFamily="34" charset="0"/>
+                <a:ea typeface="Georgia" pitchFamily="34" charset="-122"/>
+                <a:cs typeface="Georgia" pitchFamily="34" charset="-120"/>
+              </a:rPr>
+              <a:t>Timeline</a:t>
+            </a:r>
+            <a:endParaRPr lang="en-US" sz="1500" dirty="0"/>
+          </a:p>
+        </p:txBody>
+      </p:sp>
+      <p:sp>
+        <p:nvSpPr>
+          <p:cNvPr id="24" name="Shape 22"/>
+          <p:cNvSpPr/>
+          <p:nvPr/>
+        </p:nvSpPr>
+        <p:spPr>
+          <a:xfrm>
+            <a:off x="4672584" y="3364992"/>
+            <a:ext cx="1920240" cy="1051560"/>
+          </a:xfrm>
+          <a:prstGeom prst="rect">
+            <a:avLst/>
+          </a:prstGeom>
+          <a:solidFill>
+            <a:srgbClr val="FFFFFF"/>
+          </a:solidFill>
+          <a:ln/>
+          <a:effectLst>
+            <a:outerShdw sx="100000" sy="100000" kx="0" ky="0" algn="bl" rotWithShape="0" blurRad="50800" dist="25400" dir="8100000">
+              <a:srgbClr val="000000">
+                <a:alpha val="9000"/>
+              </a:srgbClr>
+            </a:outerShdw>
+          </a:effectLst>
+        </p:spPr>
+      </p:sp>
+      <p:sp>
+        <p:nvSpPr>
+          <p:cNvPr id="25" name="Shape 23"/>
+          <p:cNvSpPr/>
+          <p:nvPr/>
+        </p:nvSpPr>
+        <p:spPr>
+          <a:xfrm>
+            <a:off x="4901184" y="3566160"/>
+            <a:ext cx="502920" cy="502920"/>
+          </a:xfrm>
+          <a:prstGeom prst="ellipse">
+            <a:avLst/>
+          </a:prstGeom>
+          <a:solidFill>
+            <a:srgbClr val="B8956A"/>
+          </a:solidFill>
+          <a:ln/>
+        </p:spPr>
+      </p:sp>
+      <p:sp>
+        <p:nvSpPr>
+          <p:cNvPr id="26" name="Text 24"/>
+          <p:cNvSpPr/>
+          <p:nvPr/>
+        </p:nvSpPr>
+        <p:spPr>
+          <a:xfrm>
+            <a:off x="5495544" y="3364992"/>
+            <a:ext cx="1005840" cy="1051560"/>
+          </a:xfrm>
+          <a:prstGeom prst="rect">
+            <a:avLst/>
+          </a:prstGeom>
+          <a:noFill/>
+          <a:ln/>
+        </p:spPr>
+        <p:txBody>
+          <a:bodyPr wrap="square" lIns="0" tIns="0" rIns="0" bIns="0" rtlCol="0" anchor="ctr"/>
+          <a:lstStyle/>
+          <a:p>
+            <a:pPr algn="l" indent="0" marL="0">
+              <a:buNone/>
+            </a:pPr>
+            <a:r>
+              <a:rPr lang="en-US" sz="1500" b="1" dirty="0">
+                <a:solidFill>
+                  <a:srgbClr val="7A5080"/>
+                </a:solidFill>
+                <a:latin typeface="Georgia" pitchFamily="34" charset="0"/>
+                <a:ea typeface="Georgia" pitchFamily="34" charset="-122"/>
+                <a:cs typeface="Georgia" pitchFamily="34" charset="-120"/>
+              </a:rPr>
+              <a:t>Values</a:t>
+            </a:r>
+            <a:endParaRPr lang="en-US" sz="1500" dirty="0"/>
+          </a:p>
+        </p:txBody>
+      </p:sp>
+      <p:sp>
+        <p:nvSpPr>
+          <p:cNvPr id="27" name="Shape 25"/>
+          <p:cNvSpPr/>
+          <p:nvPr/>
+        </p:nvSpPr>
+        <p:spPr>
+          <a:xfrm>
+            <a:off x="6757416" y="3364992"/>
+            <a:ext cx="1920240" cy="1051560"/>
+          </a:xfrm>
+          <a:prstGeom prst="rect">
+            <a:avLst/>
+          </a:prstGeom>
+          <a:solidFill>
+            <a:srgbClr val="FFFFFF"/>
+          </a:solidFill>
+          <a:ln/>
+          <a:effectLst>
+            <a:outerShdw sx="100000" sy="100000" kx="0" ky="0" algn="bl" rotWithShape="0" blurRad="50800" dist="25400" dir="8100000">
+              <a:srgbClr val="000000">
+                <a:alpha val="9000"/>
+              </a:srgbClr>
+            </a:outerShdw>
+          </a:effectLst>
+        </p:spPr>
+      </p:sp>
+      <p:sp>
+        <p:nvSpPr>
+          <p:cNvPr id="28" name="Shape 26"/>
+          <p:cNvSpPr/>
+          <p:nvPr/>
+        </p:nvSpPr>
+        <p:spPr>
+          <a:xfrm>
+            <a:off x="6986016" y="3566160"/>
+            <a:ext cx="502920" cy="502920"/>
+          </a:xfrm>
+          <a:prstGeom prst="ellipse">
+            <a:avLst/>
+          </a:prstGeom>
+          <a:solidFill>
+            <a:srgbClr val="6B8F6E"/>
+          </a:solidFill>
+          <a:ln/>
+        </p:spPr>
+      </p:sp>
+      <p:sp>
+        <p:nvSpPr>
+          <p:cNvPr id="29" name="Text 27"/>
+          <p:cNvSpPr/>
+          <p:nvPr/>
+        </p:nvSpPr>
+        <p:spPr>
+          <a:xfrm>
+            <a:off x="7580376" y="3364992"/>
+            <a:ext cx="1005840" cy="1051560"/>
+          </a:xfrm>
+          <a:prstGeom prst="rect">
+            <a:avLst/>
+          </a:prstGeom>
+          <a:noFill/>
+          <a:ln/>
+        </p:spPr>
+        <p:txBody>
+          <a:bodyPr wrap="square" lIns="0" tIns="0" rIns="0" bIns="0" rtlCol="0" anchor="ctr"/>
+          <a:lstStyle/>
+          <a:p>
+            <a:pPr algn="l" indent="0" marL="0">
+              <a:buNone/>
+            </a:pPr>
+            <a:r>
+              <a:rPr lang="en-US" sz="1500" b="1" dirty="0">
+                <a:solidFill>
+                  <a:srgbClr val="7A5080"/>
+                </a:solidFill>
+                <a:latin typeface="Georgia" pitchFamily="34" charset="0"/>
+                <a:ea typeface="Georgia" pitchFamily="34" charset="-122"/>
+                <a:cs typeface="Georgia" pitchFamily="34" charset="-120"/>
+              </a:rPr>
+              <a:t>Pay range</a:t>
+            </a:r>
+            <a:endParaRPr lang="en-US" sz="1500" dirty="0"/>
+          </a:p>
+        </p:txBody>
+      </p:sp>
+      <p:sp>
+        <p:nvSpPr>
+          <p:cNvPr id="30" name="Text 28"/>
+          <p:cNvSpPr/>
+          <p:nvPr/>
+        </p:nvSpPr>
+        <p:spPr>
+          <a:xfrm>
+            <a:off x="502920" y="4572000"/>
+            <a:ext cx="8229600" cy="274320"/>
+          </a:xfrm>
+          <a:prstGeom prst="rect">
+            <a:avLst/>
+          </a:prstGeom>
+          <a:noFill/>
+          <a:ln/>
+        </p:spPr>
+        <p:txBody>
+          <a:bodyPr wrap="square" lIns="0" tIns="0" rIns="0" bIns="0" rtlCol="0" anchor="ctr"/>
+          <a:lstStyle/>
+          <a:p>
+            <a:pPr algn="l" indent="0" marL="0">
+              <a:buNone/>
+            </a:pPr>
+            <a:r>
+              <a:rPr lang="en-US" sz="1350" b="1" i="1" dirty="0">
+                <a:solidFill>
+                  <a:srgbClr val="B8956A"/>
+                </a:solidFill>
+                <a:latin typeface="Calibri" pitchFamily="34" charset="0"/>
+                <a:ea typeface="Calibri" pitchFamily="34" charset="-122"/>
+                <a:cs typeface="Calibri" pitchFamily="34" charset="-120"/>
+              </a:rPr>
+              <a:t>Name all eight, and your goal can finally do its job.</a:t>
+            </a:r>
+            <a:endParaRPr lang="en-US" sz="1350" dirty="0"/>
+          </a:p>
+        </p:txBody>
+      </p:sp>
       <p:pic>
         <p:nvPicPr>
-          <p:cNvPr id="8" name="Image 0" descr="preencoded.png">    </p:cNvPr>
+          <p:cNvPr id="31" name="Image 0" descr="preencoded.png">    </p:cNvPr>
           <p:cNvPicPr>
             <a:picLocks noChangeAspect="1"/>
           </p:cNvPicPr>
@@ -2638,110 +3358,17 @@
         </p:blipFill>
         <p:spPr>
           <a:xfrm>
-            <a:off x="1321857" y="2373417"/>
-            <a:ext cx="245791" cy="245791"/>
+            <a:off x="2947111" y="2480767"/>
+            <a:ext cx="241402" cy="241402"/>
           </a:xfrm>
           <a:prstGeom prst="rect">
             <a:avLst/>
           </a:prstGeom>
         </p:spPr>
       </p:pic>
-      <p:sp>
-        <p:nvSpPr>
-          <p:cNvPr id="9" name="Text 6"/>
-          <p:cNvSpPr/>
-          <p:nvPr/>
-        </p:nvSpPr>
-        <p:spPr>
-          <a:xfrm>
-            <a:off x="502920" y="2761488"/>
-            <a:ext cx="1883664" cy="237744"/>
-          </a:xfrm>
-          <a:prstGeom prst="rect">
-            <a:avLst/>
-          </a:prstGeom>
-          <a:noFill/>
-          <a:ln/>
-        </p:spPr>
-        <p:txBody>
-          <a:bodyPr wrap="square" lIns="0" tIns="0" rIns="0" bIns="0" rtlCol="0" anchor="ctr"/>
-          <a:lstStyle/>
-          <a:p>
-            <a:pPr algn="ctr" indent="0" marL="0">
-              <a:buNone/>
-            </a:pPr>
-            <a:r>
-              <a:rPr lang="en-US" sz="1250" b="1" dirty="0">
-                <a:solidFill>
-                  <a:srgbClr val="7A5080"/>
-                </a:solidFill>
-                <a:latin typeface="Georgia" pitchFamily="34" charset="0"/>
-                <a:ea typeface="Georgia" pitchFamily="34" charset="-122"/>
-                <a:cs typeface="Georgia" pitchFamily="34" charset="-120"/>
-              </a:rPr>
-              <a:t>Role</a:t>
-            </a:r>
-            <a:endParaRPr lang="en-US" sz="1250" dirty="0"/>
-          </a:p>
-        </p:txBody>
-      </p:sp>
-      <p:sp>
-        <p:nvSpPr>
-          <p:cNvPr id="10" name="Shape 7"/>
-          <p:cNvSpPr/>
-          <p:nvPr/>
-        </p:nvSpPr>
-        <p:spPr>
-          <a:xfrm>
-            <a:off x="2551176" y="2121408"/>
-            <a:ext cx="1883664" cy="950976"/>
-          </a:xfrm>
-          <a:prstGeom prst="rect">
-            <a:avLst/>
-          </a:prstGeom>
-          <a:solidFill>
-            <a:srgbClr val="FFFFFF"/>
-          </a:solidFill>
-          <a:ln/>
-          <a:effectLst>
-            <a:outerShdw sx="100000" sy="100000" kx="0" ky="0" algn="bl" rotWithShape="0" blurRad="114300" dist="38100" dir="5400000">
-              <a:srgbClr val="000000">
-                <a:alpha val="10000"/>
-              </a:srgbClr>
-            </a:outerShdw>
-          </a:effectLst>
-        </p:spPr>
-      </p:sp>
-      <p:sp>
-        <p:nvSpPr>
-          <p:cNvPr id="11" name="Shape 8"/>
-          <p:cNvSpPr/>
-          <p:nvPr/>
-        </p:nvSpPr>
-        <p:spPr>
-          <a:xfrm>
-            <a:off x="3236976" y="2240280"/>
-            <a:ext cx="512064" cy="512064"/>
-          </a:xfrm>
-          <a:prstGeom prst="ellipse">
-            <a:avLst/>
-          </a:prstGeom>
-          <a:solidFill>
-            <a:srgbClr val="6B8F6E"/>
-          </a:solidFill>
-          <a:ln/>
-          <a:effectLst>
-            <a:outerShdw sx="100000" sy="100000" kx="0" ky="0" algn="bl" rotWithShape="0" blurRad="88900" dist="38100" dir="5400000">
-              <a:srgbClr val="000000">
-                <a:alpha val="12000"/>
-              </a:srgbClr>
-            </a:outerShdw>
-          </a:effectLst>
-        </p:spPr>
-      </p:sp>
       <p:pic>
         <p:nvPicPr>
-          <p:cNvPr id="12" name="Image 1" descr="preencoded.png">    </p:cNvPr>
+          <p:cNvPr id="32" name="Image 1" descr="preencoded.png">    </p:cNvPr>
           <p:cNvPicPr>
             <a:picLocks noChangeAspect="1"/>
           </p:cNvPicPr>
@@ -2755,110 +3382,17 @@
         </p:blipFill>
         <p:spPr>
           <a:xfrm>
-            <a:off x="3370113" y="2373417"/>
-            <a:ext cx="245791" cy="245791"/>
+            <a:off x="862279" y="2480767"/>
+            <a:ext cx="241402" cy="241402"/>
           </a:xfrm>
           <a:prstGeom prst="rect">
             <a:avLst/>
           </a:prstGeom>
         </p:spPr>
       </p:pic>
-      <p:sp>
-        <p:nvSpPr>
-          <p:cNvPr id="13" name="Text 9"/>
-          <p:cNvSpPr/>
-          <p:nvPr/>
-        </p:nvSpPr>
-        <p:spPr>
-          <a:xfrm>
-            <a:off x="2551176" y="2761488"/>
-            <a:ext cx="1883664" cy="237744"/>
-          </a:xfrm>
-          <a:prstGeom prst="rect">
-            <a:avLst/>
-          </a:prstGeom>
-          <a:noFill/>
-          <a:ln/>
-        </p:spPr>
-        <p:txBody>
-          <a:bodyPr wrap="square" lIns="0" tIns="0" rIns="0" bIns="0" rtlCol="0" anchor="ctr"/>
-          <a:lstStyle/>
-          <a:p>
-            <a:pPr algn="ctr" indent="0" marL="0">
-              <a:buNone/>
-            </a:pPr>
-            <a:r>
-              <a:rPr lang="en-US" sz="1250" b="1" dirty="0">
-                <a:solidFill>
-                  <a:srgbClr val="7A5080"/>
-                </a:solidFill>
-                <a:latin typeface="Georgia" pitchFamily="34" charset="0"/>
-                <a:ea typeface="Georgia" pitchFamily="34" charset="-122"/>
-                <a:cs typeface="Georgia" pitchFamily="34" charset="-120"/>
-              </a:rPr>
-              <a:t>Industry</a:t>
-            </a:r>
-            <a:endParaRPr lang="en-US" sz="1250" dirty="0"/>
-          </a:p>
-        </p:txBody>
-      </p:sp>
-      <p:sp>
-        <p:nvSpPr>
-          <p:cNvPr id="14" name="Shape 10"/>
-          <p:cNvSpPr/>
-          <p:nvPr/>
-        </p:nvSpPr>
-        <p:spPr>
-          <a:xfrm>
-            <a:off x="4599432" y="2121408"/>
-            <a:ext cx="1883664" cy="950976"/>
-          </a:xfrm>
-          <a:prstGeom prst="rect">
-            <a:avLst/>
-          </a:prstGeom>
-          <a:solidFill>
-            <a:srgbClr val="FFFFFF"/>
-          </a:solidFill>
-          <a:ln/>
-          <a:effectLst>
-            <a:outerShdw sx="100000" sy="100000" kx="0" ky="0" algn="bl" rotWithShape="0" blurRad="114300" dist="38100" dir="5400000">
-              <a:srgbClr val="000000">
-                <a:alpha val="10000"/>
-              </a:srgbClr>
-            </a:outerShdw>
-          </a:effectLst>
-        </p:spPr>
-      </p:sp>
-      <p:sp>
-        <p:nvSpPr>
-          <p:cNvPr id="15" name="Shape 11"/>
-          <p:cNvSpPr/>
-          <p:nvPr/>
-        </p:nvSpPr>
-        <p:spPr>
-          <a:xfrm>
-            <a:off x="5285232" y="2240280"/>
-            <a:ext cx="512064" cy="512064"/>
-          </a:xfrm>
-          <a:prstGeom prst="ellipse">
-            <a:avLst/>
-          </a:prstGeom>
-          <a:solidFill>
-            <a:srgbClr val="C4929E"/>
-          </a:solidFill>
-          <a:ln/>
-          <a:effectLst>
-            <a:outerShdw sx="100000" sy="100000" kx="0" ky="0" algn="bl" rotWithShape="0" blurRad="88900" dist="38100" dir="5400000">
-              <a:srgbClr val="000000">
-                <a:alpha val="12000"/>
-              </a:srgbClr>
-            </a:outerShdw>
-          </a:effectLst>
-        </p:spPr>
-      </p:sp>
       <p:pic>
         <p:nvPicPr>
-          <p:cNvPr id="16" name="Image 2" descr="preencoded.png">    </p:cNvPr>
+          <p:cNvPr id="33" name="Image 2" descr="preencoded.png">    </p:cNvPr>
           <p:cNvPicPr>
             <a:picLocks noChangeAspect="1"/>
           </p:cNvPicPr>
@@ -2872,110 +3406,17 @@
         </p:blipFill>
         <p:spPr>
           <a:xfrm>
-            <a:off x="5418369" y="2373417"/>
-            <a:ext cx="245791" cy="245791"/>
+            <a:off x="7116775" y="2480767"/>
+            <a:ext cx="241402" cy="241402"/>
           </a:xfrm>
           <a:prstGeom prst="rect">
             <a:avLst/>
           </a:prstGeom>
         </p:spPr>
       </p:pic>
-      <p:sp>
-        <p:nvSpPr>
-          <p:cNvPr id="17" name="Text 12"/>
-          <p:cNvSpPr/>
-          <p:nvPr/>
-        </p:nvSpPr>
-        <p:spPr>
-          <a:xfrm>
-            <a:off x="4599432" y="2761488"/>
-            <a:ext cx="1883664" cy="237744"/>
-          </a:xfrm>
-          <a:prstGeom prst="rect">
-            <a:avLst/>
-          </a:prstGeom>
-          <a:noFill/>
-          <a:ln/>
-        </p:spPr>
-        <p:txBody>
-          <a:bodyPr wrap="square" lIns="0" tIns="0" rIns="0" bIns="0" rtlCol="0" anchor="ctr"/>
-          <a:lstStyle/>
-          <a:p>
-            <a:pPr algn="ctr" indent="0" marL="0">
-              <a:buNone/>
-            </a:pPr>
-            <a:r>
-              <a:rPr lang="en-US" sz="1250" b="1" dirty="0">
-                <a:solidFill>
-                  <a:srgbClr val="7A5080"/>
-                </a:solidFill>
-                <a:latin typeface="Georgia" pitchFamily="34" charset="0"/>
-                <a:ea typeface="Georgia" pitchFamily="34" charset="-122"/>
-                <a:cs typeface="Georgia" pitchFamily="34" charset="-120"/>
-              </a:rPr>
-              <a:t>Setting</a:t>
-            </a:r>
-            <a:endParaRPr lang="en-US" sz="1250" dirty="0"/>
-          </a:p>
-        </p:txBody>
-      </p:sp>
-      <p:sp>
-        <p:nvSpPr>
-          <p:cNvPr id="18" name="Shape 13"/>
-          <p:cNvSpPr/>
-          <p:nvPr/>
-        </p:nvSpPr>
-        <p:spPr>
-          <a:xfrm>
-            <a:off x="6647688" y="2121408"/>
-            <a:ext cx="1883664" cy="950976"/>
-          </a:xfrm>
-          <a:prstGeom prst="rect">
-            <a:avLst/>
-          </a:prstGeom>
-          <a:solidFill>
-            <a:srgbClr val="FFFFFF"/>
-          </a:solidFill>
-          <a:ln/>
-          <a:effectLst>
-            <a:outerShdw sx="100000" sy="100000" kx="0" ky="0" algn="bl" rotWithShape="0" blurRad="114300" dist="38100" dir="5400000">
-              <a:srgbClr val="000000">
-                <a:alpha val="10000"/>
-              </a:srgbClr>
-            </a:outerShdw>
-          </a:effectLst>
-        </p:spPr>
-      </p:sp>
-      <p:sp>
-        <p:nvSpPr>
-          <p:cNvPr id="19" name="Shape 14"/>
-          <p:cNvSpPr/>
-          <p:nvPr/>
-        </p:nvSpPr>
-        <p:spPr>
-          <a:xfrm>
-            <a:off x="7333488" y="2240280"/>
-            <a:ext cx="512064" cy="512064"/>
-          </a:xfrm>
-          <a:prstGeom prst="ellipse">
-            <a:avLst/>
-          </a:prstGeom>
-          <a:solidFill>
-            <a:srgbClr val="B8956A"/>
-          </a:solidFill>
-          <a:ln/>
-          <a:effectLst>
-            <a:outerShdw sx="100000" sy="100000" kx="0" ky="0" algn="bl" rotWithShape="0" blurRad="88900" dist="38100" dir="5400000">
-              <a:srgbClr val="000000">
-                <a:alpha val="12000"/>
-              </a:srgbClr>
-            </a:outerShdw>
-          </a:effectLst>
-        </p:spPr>
-      </p:sp>
       <p:pic>
         <p:nvPicPr>
-          <p:cNvPr id="20" name="Image 3" descr="preencoded.png">    </p:cNvPr>
+          <p:cNvPr id="34" name="Image 3" descr="preencoded.png">    </p:cNvPr>
           <p:cNvPicPr>
             <a:picLocks noChangeAspect="1"/>
           </p:cNvPicPr>
@@ -2989,110 +3430,17 @@
         </p:blipFill>
         <p:spPr>
           <a:xfrm>
-            <a:off x="7466625" y="2373417"/>
-            <a:ext cx="245791" cy="245791"/>
+            <a:off x="5031943" y="2480767"/>
+            <a:ext cx="241402" cy="241402"/>
           </a:xfrm>
           <a:prstGeom prst="rect">
             <a:avLst/>
           </a:prstGeom>
         </p:spPr>
       </p:pic>
-      <p:sp>
-        <p:nvSpPr>
-          <p:cNvPr id="21" name="Text 15"/>
-          <p:cNvSpPr/>
-          <p:nvPr/>
-        </p:nvSpPr>
-        <p:spPr>
-          <a:xfrm>
-            <a:off x="6647688" y="2761488"/>
-            <a:ext cx="1883664" cy="237744"/>
-          </a:xfrm>
-          <a:prstGeom prst="rect">
-            <a:avLst/>
-          </a:prstGeom>
-          <a:noFill/>
-          <a:ln/>
-        </p:spPr>
-        <p:txBody>
-          <a:bodyPr wrap="square" lIns="0" tIns="0" rIns="0" bIns="0" rtlCol="0" anchor="ctr"/>
-          <a:lstStyle/>
-          <a:p>
-            <a:pPr algn="ctr" indent="0" marL="0">
-              <a:buNone/>
-            </a:pPr>
-            <a:r>
-              <a:rPr lang="en-US" sz="1250" b="1" dirty="0">
-                <a:solidFill>
-                  <a:srgbClr val="7A5080"/>
-                </a:solidFill>
-                <a:latin typeface="Georgia" pitchFamily="34" charset="0"/>
-                <a:ea typeface="Georgia" pitchFamily="34" charset="-122"/>
-                <a:cs typeface="Georgia" pitchFamily="34" charset="-120"/>
-              </a:rPr>
-              <a:t>Location</a:t>
-            </a:r>
-            <a:endParaRPr lang="en-US" sz="1250" dirty="0"/>
-          </a:p>
-        </p:txBody>
-      </p:sp>
-      <p:sp>
-        <p:nvSpPr>
-          <p:cNvPr id="22" name="Shape 16"/>
-          <p:cNvSpPr/>
-          <p:nvPr/>
-        </p:nvSpPr>
-        <p:spPr>
-          <a:xfrm>
-            <a:off x="502920" y="3200400"/>
-            <a:ext cx="1883664" cy="950976"/>
-          </a:xfrm>
-          <a:prstGeom prst="rect">
-            <a:avLst/>
-          </a:prstGeom>
-          <a:solidFill>
-            <a:srgbClr val="FFFFFF"/>
-          </a:solidFill>
-          <a:ln/>
-          <a:effectLst>
-            <a:outerShdw sx="100000" sy="100000" kx="0" ky="0" algn="bl" rotWithShape="0" blurRad="114300" dist="38100" dir="5400000">
-              <a:srgbClr val="000000">
-                <a:alpha val="10000"/>
-              </a:srgbClr>
-            </a:outerShdw>
-          </a:effectLst>
-        </p:spPr>
-      </p:sp>
-      <p:sp>
-        <p:nvSpPr>
-          <p:cNvPr id="23" name="Shape 17"/>
-          <p:cNvSpPr/>
-          <p:nvPr/>
-        </p:nvSpPr>
-        <p:spPr>
-          <a:xfrm>
-            <a:off x="1188720" y="3319272"/>
-            <a:ext cx="512064" cy="512064"/>
-          </a:xfrm>
-          <a:prstGeom prst="ellipse">
-            <a:avLst/>
-          </a:prstGeom>
-          <a:solidFill>
-            <a:srgbClr val="7A5080"/>
-          </a:solidFill>
-          <a:ln/>
-          <a:effectLst>
-            <a:outerShdw sx="100000" sy="100000" kx="0" ky="0" algn="bl" rotWithShape="0" blurRad="88900" dist="38100" dir="5400000">
-              <a:srgbClr val="000000">
-                <a:alpha val="12000"/>
-              </a:srgbClr>
-            </a:outerShdw>
-          </a:effectLst>
-        </p:spPr>
-      </p:sp>
       <p:pic>
         <p:nvPicPr>
-          <p:cNvPr id="24" name="Image 4" descr="preencoded.png">    </p:cNvPr>
+          <p:cNvPr id="35" name="Image 4" descr="preencoded.png">    </p:cNvPr>
           <p:cNvPicPr>
             <a:picLocks noChangeAspect="1"/>
           </p:cNvPicPr>
@@ -3106,110 +3454,17 @@
         </p:blipFill>
         <p:spPr>
           <a:xfrm>
-            <a:off x="1321857" y="3452409"/>
-            <a:ext cx="245791" cy="245791"/>
+            <a:off x="2947111" y="3696919"/>
+            <a:ext cx="241402" cy="241402"/>
           </a:xfrm>
           <a:prstGeom prst="rect">
             <a:avLst/>
           </a:prstGeom>
         </p:spPr>
       </p:pic>
-      <p:sp>
-        <p:nvSpPr>
-          <p:cNvPr id="25" name="Text 18"/>
-          <p:cNvSpPr/>
-          <p:nvPr/>
-        </p:nvSpPr>
-        <p:spPr>
-          <a:xfrm>
-            <a:off x="502920" y="3840480"/>
-            <a:ext cx="1883664" cy="237744"/>
-          </a:xfrm>
-          <a:prstGeom prst="rect">
-            <a:avLst/>
-          </a:prstGeom>
-          <a:noFill/>
-          <a:ln/>
-        </p:spPr>
-        <p:txBody>
-          <a:bodyPr wrap="square" lIns="0" tIns="0" rIns="0" bIns="0" rtlCol="0" anchor="ctr"/>
-          <a:lstStyle/>
-          <a:p>
-            <a:pPr algn="ctr" indent="0" marL="0">
-              <a:buNone/>
-            </a:pPr>
-            <a:r>
-              <a:rPr lang="en-US" sz="1250" b="1" dirty="0">
-                <a:solidFill>
-                  <a:srgbClr val="7A5080"/>
-                </a:solidFill>
-                <a:latin typeface="Georgia" pitchFamily="34" charset="0"/>
-                <a:ea typeface="Georgia" pitchFamily="34" charset="-122"/>
-                <a:cs typeface="Georgia" pitchFamily="34" charset="-120"/>
-              </a:rPr>
-              <a:t>Day-to-day</a:t>
-            </a:r>
-            <a:endParaRPr lang="en-US" sz="1250" dirty="0"/>
-          </a:p>
-        </p:txBody>
-      </p:sp>
-      <p:sp>
-        <p:nvSpPr>
-          <p:cNvPr id="26" name="Shape 19"/>
-          <p:cNvSpPr/>
-          <p:nvPr/>
-        </p:nvSpPr>
-        <p:spPr>
-          <a:xfrm>
-            <a:off x="2551176" y="3200400"/>
-            <a:ext cx="1883664" cy="950976"/>
-          </a:xfrm>
-          <a:prstGeom prst="rect">
-            <a:avLst/>
-          </a:prstGeom>
-          <a:solidFill>
-            <a:srgbClr val="FFFFFF"/>
-          </a:solidFill>
-          <a:ln/>
-          <a:effectLst>
-            <a:outerShdw sx="100000" sy="100000" kx="0" ky="0" algn="bl" rotWithShape="0" blurRad="114300" dist="38100" dir="5400000">
-              <a:srgbClr val="000000">
-                <a:alpha val="10000"/>
-              </a:srgbClr>
-            </a:outerShdw>
-          </a:effectLst>
-        </p:spPr>
-      </p:sp>
-      <p:sp>
-        <p:nvSpPr>
-          <p:cNvPr id="27" name="Shape 20"/>
-          <p:cNvSpPr/>
-          <p:nvPr/>
-        </p:nvSpPr>
-        <p:spPr>
-          <a:xfrm>
-            <a:off x="3236976" y="3319272"/>
-            <a:ext cx="512064" cy="512064"/>
-          </a:xfrm>
-          <a:prstGeom prst="ellipse">
-            <a:avLst/>
-          </a:prstGeom>
-          <a:solidFill>
-            <a:srgbClr val="6B8F6E"/>
-          </a:solidFill>
-          <a:ln/>
-          <a:effectLst>
-            <a:outerShdw sx="100000" sy="100000" kx="0" ky="0" algn="bl" rotWithShape="0" blurRad="88900" dist="38100" dir="5400000">
-              <a:srgbClr val="000000">
-                <a:alpha val="12000"/>
-              </a:srgbClr>
-            </a:outerShdw>
-          </a:effectLst>
-        </p:spPr>
-      </p:sp>
       <p:pic>
         <p:nvPicPr>
-          <p:cNvPr id="28" name="Image 5" descr="preencoded.png">    </p:cNvPr>
+          <p:cNvPr id="36" name="Image 5" descr="preencoded.png">    </p:cNvPr>
           <p:cNvPicPr>
             <a:picLocks noChangeAspect="1"/>
           </p:cNvPicPr>
@@ -3223,110 +3478,17 @@
         </p:blipFill>
         <p:spPr>
           <a:xfrm>
-            <a:off x="3370113" y="3452409"/>
-            <a:ext cx="245791" cy="245791"/>
+            <a:off x="862279" y="3696919"/>
+            <a:ext cx="241402" cy="241402"/>
           </a:xfrm>
           <a:prstGeom prst="rect">
             <a:avLst/>
           </a:prstGeom>
         </p:spPr>
       </p:pic>
-      <p:sp>
-        <p:nvSpPr>
-          <p:cNvPr id="29" name="Text 21"/>
-          <p:cNvSpPr/>
-          <p:nvPr/>
-        </p:nvSpPr>
-        <p:spPr>
-          <a:xfrm>
-            <a:off x="2551176" y="3840480"/>
-            <a:ext cx="1883664" cy="237744"/>
-          </a:xfrm>
-          <a:prstGeom prst="rect">
-            <a:avLst/>
-          </a:prstGeom>
-          <a:noFill/>
-          <a:ln/>
-        </p:spPr>
-        <p:txBody>
-          <a:bodyPr wrap="square" lIns="0" tIns="0" rIns="0" bIns="0" rtlCol="0" anchor="ctr"/>
-          <a:lstStyle/>
-          <a:p>
-            <a:pPr algn="ctr" indent="0" marL="0">
-              <a:buNone/>
-            </a:pPr>
-            <a:r>
-              <a:rPr lang="en-US" sz="1250" b="1" dirty="0">
-                <a:solidFill>
-                  <a:srgbClr val="7A5080"/>
-                </a:solidFill>
-                <a:latin typeface="Georgia" pitchFamily="34" charset="0"/>
-                <a:ea typeface="Georgia" pitchFamily="34" charset="-122"/>
-                <a:cs typeface="Georgia" pitchFamily="34" charset="-120"/>
-              </a:rPr>
-              <a:t>Timeline</a:t>
-            </a:r>
-            <a:endParaRPr lang="en-US" sz="1250" dirty="0"/>
-          </a:p>
-        </p:txBody>
-      </p:sp>
-      <p:sp>
-        <p:nvSpPr>
-          <p:cNvPr id="30" name="Shape 22"/>
-          <p:cNvSpPr/>
-          <p:nvPr/>
-        </p:nvSpPr>
-        <p:spPr>
-          <a:xfrm>
-            <a:off x="4599432" y="3200400"/>
-            <a:ext cx="1883664" cy="950976"/>
-          </a:xfrm>
-          <a:prstGeom prst="rect">
-            <a:avLst/>
-          </a:prstGeom>
-          <a:solidFill>
-            <a:srgbClr val="FFFFFF"/>
-          </a:solidFill>
-          <a:ln/>
-          <a:effectLst>
-            <a:outerShdw sx="100000" sy="100000" kx="0" ky="0" algn="bl" rotWithShape="0" blurRad="114300" dist="38100" dir="5400000">
-              <a:srgbClr val="000000">
-                <a:alpha val="10000"/>
-              </a:srgbClr>
-            </a:outerShdw>
-          </a:effectLst>
-        </p:spPr>
-      </p:sp>
-      <p:sp>
-        <p:nvSpPr>
-          <p:cNvPr id="31" name="Shape 23"/>
-          <p:cNvSpPr/>
-          <p:nvPr/>
-        </p:nvSpPr>
-        <p:spPr>
-          <a:xfrm>
-            <a:off x="5285232" y="3319272"/>
-            <a:ext cx="512064" cy="512064"/>
-          </a:xfrm>
-          <a:prstGeom prst="ellipse">
-            <a:avLst/>
-          </a:prstGeom>
-          <a:solidFill>
-            <a:srgbClr val="C4929E"/>
-          </a:solidFill>
-          <a:ln/>
-          <a:effectLst>
-            <a:outerShdw sx="100000" sy="100000" kx="0" ky="0" algn="bl" rotWithShape="0" blurRad="88900" dist="38100" dir="5400000">
-              <a:srgbClr val="000000">
-                <a:alpha val="12000"/>
-              </a:srgbClr>
-            </a:outerShdw>
-          </a:effectLst>
-        </p:spPr>
-      </p:sp>
       <p:pic>
         <p:nvPicPr>
-          <p:cNvPr id="32" name="Image 6" descr="preencoded.png">    </p:cNvPr>
+          <p:cNvPr id="37" name="Image 6" descr="preencoded.png">    </p:cNvPr>
           <p:cNvPicPr>
             <a:picLocks noChangeAspect="1"/>
           </p:cNvPicPr>
@@ -3340,110 +3502,17 @@
         </p:blipFill>
         <p:spPr>
           <a:xfrm>
-            <a:off x="5418369" y="3452409"/>
-            <a:ext cx="245791" cy="245791"/>
+            <a:off x="5031943" y="3696919"/>
+            <a:ext cx="241402" cy="241402"/>
           </a:xfrm>
           <a:prstGeom prst="rect">
             <a:avLst/>
           </a:prstGeom>
         </p:spPr>
       </p:pic>
-      <p:sp>
-        <p:nvSpPr>
-          <p:cNvPr id="33" name="Text 24"/>
-          <p:cNvSpPr/>
-          <p:nvPr/>
-        </p:nvSpPr>
-        <p:spPr>
-          <a:xfrm>
-            <a:off x="4599432" y="3840480"/>
-            <a:ext cx="1883664" cy="237744"/>
-          </a:xfrm>
-          <a:prstGeom prst="rect">
-            <a:avLst/>
-          </a:prstGeom>
-          <a:noFill/>
-          <a:ln/>
-        </p:spPr>
-        <p:txBody>
-          <a:bodyPr wrap="square" lIns="0" tIns="0" rIns="0" bIns="0" rtlCol="0" anchor="ctr"/>
-          <a:lstStyle/>
-          <a:p>
-            <a:pPr algn="ctr" indent="0" marL="0">
-              <a:buNone/>
-            </a:pPr>
-            <a:r>
-              <a:rPr lang="en-US" sz="1250" b="1" dirty="0">
-                <a:solidFill>
-                  <a:srgbClr val="7A5080"/>
-                </a:solidFill>
-                <a:latin typeface="Georgia" pitchFamily="34" charset="0"/>
-                <a:ea typeface="Georgia" pitchFamily="34" charset="-122"/>
-                <a:cs typeface="Georgia" pitchFamily="34" charset="-120"/>
-              </a:rPr>
-              <a:t>Values</a:t>
-            </a:r>
-            <a:endParaRPr lang="en-US" sz="1250" dirty="0"/>
-          </a:p>
-        </p:txBody>
-      </p:sp>
-      <p:sp>
-        <p:nvSpPr>
-          <p:cNvPr id="34" name="Shape 25"/>
-          <p:cNvSpPr/>
-          <p:nvPr/>
-        </p:nvSpPr>
-        <p:spPr>
-          <a:xfrm>
-            <a:off x="6647688" y="3200400"/>
-            <a:ext cx="1883664" cy="950976"/>
-          </a:xfrm>
-          <a:prstGeom prst="rect">
-            <a:avLst/>
-          </a:prstGeom>
-          <a:solidFill>
-            <a:srgbClr val="FFFFFF"/>
-          </a:solidFill>
-          <a:ln/>
-          <a:effectLst>
-            <a:outerShdw sx="100000" sy="100000" kx="0" ky="0" algn="bl" rotWithShape="0" blurRad="114300" dist="38100" dir="5400000">
-              <a:srgbClr val="000000">
-                <a:alpha val="10000"/>
-              </a:srgbClr>
-            </a:outerShdw>
-          </a:effectLst>
-        </p:spPr>
-      </p:sp>
-      <p:sp>
-        <p:nvSpPr>
-          <p:cNvPr id="35" name="Shape 26"/>
-          <p:cNvSpPr/>
-          <p:nvPr/>
-        </p:nvSpPr>
-        <p:spPr>
-          <a:xfrm>
-            <a:off x="7333488" y="3319272"/>
-            <a:ext cx="512064" cy="512064"/>
-          </a:xfrm>
-          <a:prstGeom prst="ellipse">
-            <a:avLst/>
-          </a:prstGeom>
-          <a:solidFill>
-            <a:srgbClr val="B8956A"/>
-          </a:solidFill>
-          <a:ln/>
-          <a:effectLst>
-            <a:outerShdw sx="100000" sy="100000" kx="0" ky="0" algn="bl" rotWithShape="0" blurRad="88900" dist="38100" dir="5400000">
-              <a:srgbClr val="000000">
-                <a:alpha val="12000"/>
-              </a:srgbClr>
-            </a:outerShdw>
-          </a:effectLst>
-        </p:spPr>
-      </p:sp>
       <p:pic>
         <p:nvPicPr>
-          <p:cNvPr id="36" name="Image 7" descr="preencoded.png">    </p:cNvPr>
+          <p:cNvPr id="38" name="Image 7" descr="preencoded.png">    </p:cNvPr>
           <p:cNvPicPr>
             <a:picLocks noChangeAspect="1"/>
           </p:cNvPicPr>
@@ -3457,92 +3526,14 @@
         </p:blipFill>
         <p:spPr>
           <a:xfrm>
-            <a:off x="7466625" y="3452409"/>
-            <a:ext cx="245791" cy="245791"/>
+            <a:off x="7116775" y="3696919"/>
+            <a:ext cx="241402" cy="241402"/>
           </a:xfrm>
           <a:prstGeom prst="rect">
             <a:avLst/>
           </a:prstGeom>
         </p:spPr>
       </p:pic>
-      <p:sp>
-        <p:nvSpPr>
-          <p:cNvPr id="37" name="Text 27"/>
-          <p:cNvSpPr/>
-          <p:nvPr/>
-        </p:nvSpPr>
-        <p:spPr>
-          <a:xfrm>
-            <a:off x="6647688" y="3840480"/>
-            <a:ext cx="1883664" cy="237744"/>
-          </a:xfrm>
-          <a:prstGeom prst="rect">
-            <a:avLst/>
-          </a:prstGeom>
-          <a:noFill/>
-          <a:ln/>
-        </p:spPr>
-        <p:txBody>
-          <a:bodyPr wrap="square" lIns="0" tIns="0" rIns="0" bIns="0" rtlCol="0" anchor="ctr"/>
-          <a:lstStyle/>
-          <a:p>
-            <a:pPr algn="ctr" indent="0" marL="0">
-              <a:buNone/>
-            </a:pPr>
-            <a:r>
-              <a:rPr lang="en-US" sz="1250" b="1" dirty="0">
-                <a:solidFill>
-                  <a:srgbClr val="7A5080"/>
-                </a:solidFill>
-                <a:latin typeface="Georgia" pitchFamily="34" charset="0"/>
-                <a:ea typeface="Georgia" pitchFamily="34" charset="-122"/>
-                <a:cs typeface="Georgia" pitchFamily="34" charset="-120"/>
-              </a:rPr>
-              <a:t>Pay range</a:t>
-            </a:r>
-            <a:endParaRPr lang="en-US" sz="1250" dirty="0"/>
-          </a:p>
-        </p:txBody>
-      </p:sp>
-      <p:sp>
-        <p:nvSpPr>
-          <p:cNvPr id="38" name="Text 28"/>
-          <p:cNvSpPr/>
-          <p:nvPr/>
-        </p:nvSpPr>
-        <p:spPr>
-          <a:xfrm>
-            <a:off x="502920" y="4297680"/>
-            <a:ext cx="8229600" cy="274320"/>
-          </a:xfrm>
-          <a:prstGeom prst="rect">
-            <a:avLst/>
-          </a:prstGeom>
-          <a:noFill/>
-          <a:ln/>
-        </p:spPr>
-        <p:txBody>
-          <a:bodyPr wrap="square" lIns="0" tIns="0" rIns="0" bIns="0" rtlCol="0" anchor="ctr"/>
-          <a:lstStyle/>
-          <a:p>
-            <a:pPr algn="l" indent="0" marL="0">
-              <a:buNone/>
-            </a:pPr>
-            <a:r>
-              <a:rPr lang="en-US" sz="1350" i="1" dirty="0">
-                <a:solidFill>
-                  <a:srgbClr val="B8956A"/>
-                </a:solidFill>
-                <a:latin typeface="Georgia" pitchFamily="34" charset="0"/>
-                <a:ea typeface="Georgia" pitchFamily="34" charset="-122"/>
-                <a:cs typeface="Georgia" pitchFamily="34" charset="-120"/>
-              </a:rPr>
-              <a:t>Name all eight, and your goal can finally do its job.</a:t>
-            </a:r>
-            <a:endParaRPr lang="en-US" sz="1350" dirty="0"/>
-          </a:p>
-        </p:txBody>
-      </p:sp>
     </p:spTree>
   </p:cSld>
   <p:clrMapOvr>
@@ -3652,13 +3643,10 @@
           <a:ln/>
         </p:spPr>
         <p:txBody>
-          <a:bodyPr wrap="square" lIns="0" tIns="0" rIns="0" bIns="0" rtlCol="0" anchor="t"/>
-          <a:lstStyle/>
-          <a:p>
-            <a:pPr algn="l" indent="0" marL="0">
-              <a:lnSpc>
-                <a:spcPct val="98000"/>
-              </a:lnSpc>
+          <a:bodyPr wrap="square" lIns="0" tIns="0" rIns="0" bIns="0" rtlCol="0" anchor="ctr"/>
+          <a:lstStyle/>
+          <a:p>
+            <a:pPr algn="l" indent="0" marL="0">
               <a:buNone/>
             </a:pPr>
             <a:r>
@@ -3685,7 +3673,7 @@
         <p:spPr>
           <a:xfrm>
             <a:off x="502920" y="1554480"/>
-            <a:ext cx="3822192" cy="2697480"/>
+            <a:ext cx="3822192" cy="2788920"/>
           </a:xfrm>
           <a:prstGeom prst="rect">
             <a:avLst/>
@@ -3695,7 +3683,7 @@
           </a:solidFill>
           <a:ln/>
           <a:effectLst>
-            <a:outerShdw sx="100000" sy="100000" kx="0" ky="0" algn="bl" rotWithShape="0" blurRad="114300" dist="38100" dir="5400000">
+            <a:outerShdw sx="100000" sy="100000" kx="0" ky="0" algn="bl" rotWithShape="0" blurRad="63500" dist="25400" dir="8100000">
               <a:srgbClr val="000000">
                 <a:alpha val="10000"/>
               </a:srgbClr>
@@ -3712,7 +3700,7 @@
         <p:spPr>
           <a:xfrm>
             <a:off x="502920" y="1554480"/>
-            <a:ext cx="128016" cy="2697480"/>
+            <a:ext cx="128016" cy="2788920"/>
           </a:xfrm>
           <a:prstGeom prst="rect">
             <a:avLst/>
@@ -3741,8 +3729,145 @@
             <a:srgbClr val="C4929E"/>
           </a:solidFill>
           <a:ln/>
+        </p:spPr>
+      </p:sp>
+      <p:sp>
+        <p:nvSpPr>
+          <p:cNvPr id="8" name="Text 6"/>
+          <p:cNvSpPr/>
+          <p:nvPr/>
+        </p:nvSpPr>
+        <p:spPr>
+          <a:xfrm>
+            <a:off x="1417320" y="1773936"/>
+            <a:ext cx="2743200" cy="530352"/>
+          </a:xfrm>
+          <a:prstGeom prst="rect">
+            <a:avLst/>
+          </a:prstGeom>
+          <a:noFill/>
+          <a:ln/>
+        </p:spPr>
+        <p:txBody>
+          <a:bodyPr wrap="square" lIns="0" tIns="0" rIns="0" bIns="0" rtlCol="0" anchor="ctr"/>
+          <a:lstStyle/>
+          <a:p>
+            <a:pPr algn="l" indent="0" marL="0">
+              <a:buNone/>
+            </a:pPr>
+            <a:r>
+              <a:rPr lang="en-US" sz="1700" b="1" dirty="0">
+                <a:solidFill>
+                  <a:srgbClr val="7A5080"/>
+                </a:solidFill>
+                <a:latin typeface="Georgia" pitchFamily="34" charset="0"/>
+                <a:ea typeface="Georgia" pitchFamily="34" charset="-122"/>
+                <a:cs typeface="Georgia" pitchFamily="34" charset="-120"/>
+              </a:rPr>
+              <a:t>Weak</a:t>
+            </a:r>
+            <a:endParaRPr lang="en-US" sz="1700" dirty="0"/>
+          </a:p>
+        </p:txBody>
+      </p:sp>
+      <p:sp>
+        <p:nvSpPr>
+          <p:cNvPr id="9" name="Text 7"/>
+          <p:cNvSpPr/>
+          <p:nvPr/>
+        </p:nvSpPr>
+        <p:spPr>
+          <a:xfrm>
+            <a:off x="777240" y="2468880"/>
+            <a:ext cx="3383280" cy="960120"/>
+          </a:xfrm>
+          <a:prstGeom prst="rect">
+            <a:avLst/>
+          </a:prstGeom>
+          <a:noFill/>
+          <a:ln/>
+        </p:spPr>
+        <p:txBody>
+          <a:bodyPr wrap="square" lIns="0" tIns="0" rIns="0" bIns="0" rtlCol="0" anchor="t"/>
+          <a:lstStyle/>
+          <a:p>
+            <a:pPr algn="l" indent="0" marL="0">
+              <a:buNone/>
+            </a:pPr>
+            <a:r>
+              <a:rPr lang="en-US" sz="1350" i="1" dirty="0">
+                <a:solidFill>
+                  <a:srgbClr val="3A2E3F"/>
+                </a:solidFill>
+                <a:latin typeface="Calibri" pitchFamily="34" charset="0"/>
+                <a:ea typeface="Calibri" pitchFamily="34" charset="-122"/>
+                <a:cs typeface="Calibri" pitchFamily="34" charset="-120"/>
+              </a:rPr>
+              <a:t>“I want to get a graphic design job somewhere good after I graduate.”</a:t>
+            </a:r>
+            <a:endParaRPr lang="en-US" sz="1350" dirty="0"/>
+          </a:p>
+        </p:txBody>
+      </p:sp>
+      <p:sp>
+        <p:nvSpPr>
+          <p:cNvPr id="10" name="Text 8"/>
+          <p:cNvSpPr/>
+          <p:nvPr/>
+        </p:nvSpPr>
+        <p:spPr>
+          <a:xfrm>
+            <a:off x="777240" y="3611880"/>
+            <a:ext cx="3383280" cy="594360"/>
+          </a:xfrm>
+          <a:prstGeom prst="rect">
+            <a:avLst/>
+          </a:prstGeom>
+          <a:noFill/>
+          <a:ln/>
+        </p:spPr>
+        <p:txBody>
+          <a:bodyPr wrap="square" lIns="0" tIns="0" rIns="0" bIns="0" rtlCol="0" anchor="t"/>
+          <a:lstStyle/>
+          <a:p>
+            <a:pPr algn="l" indent="0" marL="0">
+              <a:buNone/>
+            </a:pPr>
+            <a:r>
+              <a:rPr lang="en-US" sz="1100" dirty="0">
+                <a:solidFill>
+                  <a:srgbClr val="6B5A6E"/>
+                </a:solidFill>
+                <a:latin typeface="Calibri" pitchFamily="34" charset="0"/>
+                <a:ea typeface="Calibri" pitchFamily="34" charset="-122"/>
+                <a:cs typeface="Calibri" pitchFamily="34" charset="-120"/>
+              </a:rPr>
+              <a:t>No role, industry, setting, pay, or timeline. Nothing to build on.</a:t>
+            </a:r>
+            <a:endParaRPr lang="en-US" sz="1100" dirty="0"/>
+          </a:p>
+        </p:txBody>
+      </p:sp>
+      <p:sp>
+        <p:nvSpPr>
+          <p:cNvPr id="11" name="Shape 9"/>
+          <p:cNvSpPr/>
+          <p:nvPr/>
+        </p:nvSpPr>
+        <p:spPr>
+          <a:xfrm>
+            <a:off x="4818888" y="1554480"/>
+            <a:ext cx="3822192" cy="2788920"/>
+          </a:xfrm>
+          <a:prstGeom prst="rect">
+            <a:avLst/>
+          </a:prstGeom>
+          <a:solidFill>
+            <a:srgbClr val="7A5080"/>
+          </a:solidFill>
+          <a:ln/>
           <a:effectLst>
-            <a:outerShdw sx="100000" sy="100000" kx="0" ky="0" algn="bl" rotWithShape="0" blurRad="88900" dist="38100" dir="5400000">
+            <a:outerShdw sx="100000" sy="100000" kx="0" ky="0" algn="bl" rotWithShape="0" blurRad="63500" dist="25400" dir="8100000">
               <a:srgbClr val="000000">
                 <a:alpha val="12000"/>
               </a:srgbClr>
@@ -3750,9 +3875,205 @@
           </a:effectLst>
         </p:spPr>
       </p:sp>
+      <p:sp>
+        <p:nvSpPr>
+          <p:cNvPr id="12" name="Shape 10"/>
+          <p:cNvSpPr/>
+          <p:nvPr/>
+        </p:nvSpPr>
+        <p:spPr>
+          <a:xfrm>
+            <a:off x="5093208" y="1773936"/>
+            <a:ext cx="530352" cy="530352"/>
+          </a:xfrm>
+          <a:prstGeom prst="ellipse">
+            <a:avLst/>
+          </a:prstGeom>
+          <a:solidFill>
+            <a:srgbClr val="6B8F6E"/>
+          </a:solidFill>
+          <a:ln/>
+        </p:spPr>
+      </p:sp>
+      <p:sp>
+        <p:nvSpPr>
+          <p:cNvPr id="13" name="Text 11"/>
+          <p:cNvSpPr/>
+          <p:nvPr/>
+        </p:nvSpPr>
+        <p:spPr>
+          <a:xfrm>
+            <a:off x="5733288" y="1773936"/>
+            <a:ext cx="2743200" cy="530352"/>
+          </a:xfrm>
+          <a:prstGeom prst="rect">
+            <a:avLst/>
+          </a:prstGeom>
+          <a:noFill/>
+          <a:ln/>
+        </p:spPr>
+        <p:txBody>
+          <a:bodyPr wrap="square" lIns="0" tIns="0" rIns="0" bIns="0" rtlCol="0" anchor="ctr"/>
+          <a:lstStyle/>
+          <a:p>
+            <a:pPr algn="l" indent="0" marL="0">
+              <a:buNone/>
+            </a:pPr>
+            <a:r>
+              <a:rPr lang="en-US" sz="1700" b="1" dirty="0">
+                <a:solidFill>
+                  <a:srgbClr val="FFFFFF"/>
+                </a:solidFill>
+                <a:latin typeface="Georgia" pitchFamily="34" charset="0"/>
+                <a:ea typeface="Georgia" pitchFamily="34" charset="-122"/>
+                <a:cs typeface="Georgia" pitchFamily="34" charset="-120"/>
+              </a:rPr>
+              <a:t>Strong</a:t>
+            </a:r>
+            <a:endParaRPr lang="en-US" sz="1700" dirty="0"/>
+          </a:p>
+        </p:txBody>
+      </p:sp>
+      <p:sp>
+        <p:nvSpPr>
+          <p:cNvPr id="14" name="Text 12"/>
+          <p:cNvSpPr/>
+          <p:nvPr/>
+        </p:nvSpPr>
+        <p:spPr>
+          <a:xfrm>
+            <a:off x="5093208" y="2395728"/>
+            <a:ext cx="3291840" cy="1325880"/>
+          </a:xfrm>
+          <a:prstGeom prst="rect">
+            <a:avLst/>
+          </a:prstGeom>
+          <a:noFill/>
+          <a:ln/>
+        </p:spPr>
+        <p:txBody>
+          <a:bodyPr wrap="square" lIns="0" tIns="0" rIns="0" bIns="0" rtlCol="0" anchor="t"/>
+          <a:lstStyle/>
+          <a:p>
+            <a:pPr algn="l" indent="0" marL="0">
+              <a:buNone/>
+            </a:pPr>
+            <a:r>
+              <a:rPr lang="en-US" sz="1150" i="1" dirty="0">
+                <a:solidFill>
+                  <a:srgbClr val="FFFFFF"/>
+                </a:solidFill>
+                <a:latin typeface="Calibri" pitchFamily="34" charset="0"/>
+                <a:ea typeface="Calibri" pitchFamily="34" charset="-122"/>
+                <a:cs typeface="Calibri" pitchFamily="34" charset="-120"/>
+              </a:rPr>
+              <a:t>“Junior motion designer at a mid-size brand studio in Denver or remote, animating social and product spots day-to-day, hired within a year, on a team that values craft, paying $58K to $68K.”</a:t>
+            </a:r>
+            <a:endParaRPr lang="en-US" sz="1150" dirty="0"/>
+          </a:p>
+        </p:txBody>
+      </p:sp>
+      <p:sp>
+        <p:nvSpPr>
+          <p:cNvPr id="15" name="Shape 13"/>
+          <p:cNvSpPr/>
+          <p:nvPr/>
+        </p:nvSpPr>
+        <p:spPr>
+          <a:xfrm>
+            <a:off x="5093208" y="3767328"/>
+            <a:ext cx="3291840" cy="457200"/>
+          </a:xfrm>
+          <a:prstGeom prst="rect">
+            <a:avLst/>
+          </a:prstGeom>
+          <a:solidFill>
+            <a:srgbClr val="E7DFE6"/>
+          </a:solidFill>
+          <a:ln/>
+        </p:spPr>
+      </p:sp>
+      <p:sp>
+        <p:nvSpPr>
+          <p:cNvPr id="16" name="Text 14"/>
+          <p:cNvSpPr/>
+          <p:nvPr/>
+        </p:nvSpPr>
+        <p:spPr>
+          <a:xfrm>
+            <a:off x="5212080" y="3767328"/>
+            <a:ext cx="3108960" cy="457200"/>
+          </a:xfrm>
+          <a:prstGeom prst="rect">
+            <a:avLst/>
+          </a:prstGeom>
+          <a:noFill/>
+          <a:ln/>
+        </p:spPr>
+        <p:txBody>
+          <a:bodyPr wrap="square" lIns="0" tIns="0" rIns="0" bIns="0" rtlCol="0" anchor="ctr"/>
+          <a:lstStyle/>
+          <a:p>
+            <a:pPr algn="l" indent="0" marL="0">
+              <a:buNone/>
+            </a:pPr>
+            <a:r>
+              <a:rPr lang="en-US" sz="1100" b="1" dirty="0">
+                <a:solidFill>
+                  <a:srgbClr val="5C3A63"/>
+                </a:solidFill>
+                <a:latin typeface="Calibri" pitchFamily="34" charset="0"/>
+                <a:ea typeface="Calibri" pitchFamily="34" charset="-122"/>
+                <a:cs typeface="Calibri" pitchFamily="34" charset="-120"/>
+              </a:rPr>
+              <a:t>Every piece is named. You can plan around it.</a:t>
+            </a:r>
+            <a:endParaRPr lang="en-US" sz="1100" dirty="0"/>
+          </a:p>
+        </p:txBody>
+      </p:sp>
+      <p:sp>
+        <p:nvSpPr>
+          <p:cNvPr id="17" name="Text 15"/>
+          <p:cNvSpPr/>
+          <p:nvPr/>
+        </p:nvSpPr>
+        <p:spPr>
+          <a:xfrm>
+            <a:off x="502920" y="4434840"/>
+            <a:ext cx="8229600" cy="274320"/>
+          </a:xfrm>
+          <a:prstGeom prst="rect">
+            <a:avLst/>
+          </a:prstGeom>
+          <a:noFill/>
+          <a:ln/>
+        </p:spPr>
+        <p:txBody>
+          <a:bodyPr wrap="square" lIns="0" tIns="0" rIns="0" bIns="0" rtlCol="0" anchor="ctr"/>
+          <a:lstStyle/>
+          <a:p>
+            <a:pPr algn="l" indent="0" marL="0">
+              <a:buNone/>
+            </a:pPr>
+            <a:r>
+              <a:rPr lang="en-US" sz="1350" b="1" i="1" dirty="0">
+                <a:solidFill>
+                  <a:srgbClr val="B8956A"/>
+                </a:solidFill>
+                <a:latin typeface="Calibri" pitchFamily="34" charset="0"/>
+                <a:ea typeface="Calibri" pitchFamily="34" charset="-122"/>
+                <a:cs typeface="Calibri" pitchFamily="34" charset="-120"/>
+              </a:rPr>
+              <a:t>Same person. One version you can act on.</a:t>
+            </a:r>
+            <a:endParaRPr lang="en-US" sz="1350" dirty="0"/>
+          </a:p>
+        </p:txBody>
+      </p:sp>
       <p:pic>
         <p:nvPicPr>
-          <p:cNvPr id="8" name="Image 0" descr="preencoded.png">    </p:cNvPr>
+          <p:cNvPr id="18" name="Image 0" descr="preencoded.png">    </p:cNvPr>
           <p:cNvPicPr>
             <a:picLocks noChangeAspect="1"/>
           </p:cNvPicPr>
@@ -3766,194 +4087,17 @@
         </p:blipFill>
         <p:spPr>
           <a:xfrm>
-            <a:off x="909828" y="1906524"/>
-            <a:ext cx="265176" cy="265176"/>
+            <a:off x="915132" y="1911828"/>
+            <a:ext cx="254569" cy="254569"/>
           </a:xfrm>
           <a:prstGeom prst="rect">
             <a:avLst/>
           </a:prstGeom>
         </p:spPr>
       </p:pic>
-      <p:sp>
-        <p:nvSpPr>
-          <p:cNvPr id="9" name="Text 6"/>
-          <p:cNvSpPr/>
-          <p:nvPr/>
-        </p:nvSpPr>
-        <p:spPr>
-          <a:xfrm>
-            <a:off x="1417320" y="1773936"/>
-            <a:ext cx="2743200" cy="530352"/>
-          </a:xfrm>
-          <a:prstGeom prst="rect">
-            <a:avLst/>
-          </a:prstGeom>
-          <a:noFill/>
-          <a:ln/>
-        </p:spPr>
-        <p:txBody>
-          <a:bodyPr wrap="square" lIns="0" tIns="0" rIns="0" bIns="0" rtlCol="0" anchor="ctr"/>
-          <a:lstStyle/>
-          <a:p>
-            <a:pPr indent="0" marL="0">
-              <a:buNone/>
-            </a:pPr>
-            <a:r>
-              <a:rPr lang="en-US" sz="1700" b="1" dirty="0">
-                <a:solidFill>
-                  <a:srgbClr val="7A5080"/>
-                </a:solidFill>
-                <a:latin typeface="Georgia" pitchFamily="34" charset="0"/>
-                <a:ea typeface="Georgia" pitchFamily="34" charset="-122"/>
-                <a:cs typeface="Georgia" pitchFamily="34" charset="-120"/>
-              </a:rPr>
-              <a:t>Weak</a:t>
-            </a:r>
-            <a:endParaRPr lang="en-US" sz="1700" dirty="0"/>
-          </a:p>
-        </p:txBody>
-      </p:sp>
-      <p:sp>
-        <p:nvSpPr>
-          <p:cNvPr id="10" name="Text 7"/>
-          <p:cNvSpPr/>
-          <p:nvPr/>
-        </p:nvSpPr>
-        <p:spPr>
-          <a:xfrm>
-            <a:off x="777240" y="2468880"/>
-            <a:ext cx="3383280" cy="868680"/>
-          </a:xfrm>
-          <a:prstGeom prst="rect">
-            <a:avLst/>
-          </a:prstGeom>
-          <a:noFill/>
-          <a:ln/>
-        </p:spPr>
-        <p:txBody>
-          <a:bodyPr wrap="square" lIns="0" tIns="0" rIns="0" bIns="0" rtlCol="0" anchor="ctr"/>
-          <a:lstStyle/>
-          <a:p>
-            <a:pPr indent="0" marL="0">
-              <a:lnSpc>
-                <a:spcPct val="110000"/>
-              </a:lnSpc>
-              <a:buNone/>
-            </a:pPr>
-            <a:r>
-              <a:rPr lang="en-US" sz="1350" i="1" dirty="0">
-                <a:solidFill>
-                  <a:srgbClr val="3A2E3F"/>
-                </a:solidFill>
-                <a:latin typeface="Georgia" pitchFamily="34" charset="0"/>
-                <a:ea typeface="Georgia" pitchFamily="34" charset="-122"/>
-                <a:cs typeface="Georgia" pitchFamily="34" charset="-120"/>
-              </a:rPr>
-              <a:t>“I want to get a graphic design job somewhere good after I graduate.”</a:t>
-            </a:r>
-            <a:endParaRPr lang="en-US" sz="1350" dirty="0"/>
-          </a:p>
-        </p:txBody>
-      </p:sp>
-      <p:sp>
-        <p:nvSpPr>
-          <p:cNvPr id="11" name="Text 8"/>
-          <p:cNvSpPr/>
-          <p:nvPr/>
-        </p:nvSpPr>
-        <p:spPr>
-          <a:xfrm>
-            <a:off x="777240" y="3520440"/>
-            <a:ext cx="3383280" cy="548640"/>
-          </a:xfrm>
-          <a:prstGeom prst="rect">
-            <a:avLst/>
-          </a:prstGeom>
-          <a:noFill/>
-          <a:ln/>
-        </p:spPr>
-        <p:txBody>
-          <a:bodyPr wrap="square" lIns="0" tIns="0" rIns="0" bIns="0" rtlCol="0" anchor="ctr"/>
-          <a:lstStyle/>
-          <a:p>
-            <a:pPr indent="0" marL="0">
-              <a:lnSpc>
-                <a:spcPct val="105000"/>
-              </a:lnSpc>
-              <a:buNone/>
-            </a:pPr>
-            <a:r>
-              <a:rPr lang="en-US" sz="1100" dirty="0">
-                <a:solidFill>
-                  <a:srgbClr val="6B5A6E"/>
-                </a:solidFill>
-                <a:latin typeface="Calibri" pitchFamily="34" charset="0"/>
-                <a:ea typeface="Calibri" pitchFamily="34" charset="-122"/>
-                <a:cs typeface="Calibri" pitchFamily="34" charset="-120"/>
-              </a:rPr>
-              <a:t>No role, industry, setting, pay, or timeline. Nothing to build on.</a:t>
-            </a:r>
-            <a:endParaRPr lang="en-US" sz="1100" dirty="0"/>
-          </a:p>
-        </p:txBody>
-      </p:sp>
-      <p:sp>
-        <p:nvSpPr>
-          <p:cNvPr id="12" name="Shape 9"/>
-          <p:cNvSpPr/>
-          <p:nvPr/>
-        </p:nvSpPr>
-        <p:spPr>
-          <a:xfrm>
-            <a:off x="4818888" y="1554480"/>
-            <a:ext cx="3822192" cy="2697480"/>
-          </a:xfrm>
-          <a:prstGeom prst="rect">
-            <a:avLst/>
-          </a:prstGeom>
-          <a:solidFill>
-            <a:srgbClr val="7A5080"/>
-          </a:solidFill>
-          <a:ln/>
-          <a:effectLst>
-            <a:outerShdw sx="100000" sy="100000" kx="0" ky="0" algn="bl" rotWithShape="0" blurRad="114300" dist="38100" dir="5400000">
-              <a:srgbClr val="000000">
-                <a:alpha val="10000"/>
-              </a:srgbClr>
-            </a:outerShdw>
-          </a:effectLst>
-        </p:spPr>
-      </p:sp>
-      <p:sp>
-        <p:nvSpPr>
-          <p:cNvPr id="13" name="Shape 10"/>
-          <p:cNvSpPr/>
-          <p:nvPr/>
-        </p:nvSpPr>
-        <p:spPr>
-          <a:xfrm>
-            <a:off x="5093208" y="1773936"/>
-            <a:ext cx="530352" cy="530352"/>
-          </a:xfrm>
-          <a:prstGeom prst="ellipse">
-            <a:avLst/>
-          </a:prstGeom>
-          <a:solidFill>
-            <a:srgbClr val="6B8F6E"/>
-          </a:solidFill>
-          <a:ln/>
-          <a:effectLst>
-            <a:outerShdw sx="100000" sy="100000" kx="0" ky="0" algn="bl" rotWithShape="0" blurRad="88900" dist="38100" dir="5400000">
-              <a:srgbClr val="000000">
-                <a:alpha val="12000"/>
-              </a:srgbClr>
-            </a:outerShdw>
-          </a:effectLst>
-        </p:spPr>
-      </p:sp>
       <p:pic>
         <p:nvPicPr>
-          <p:cNvPr id="14" name="Image 1" descr="preencoded.png">    </p:cNvPr>
+          <p:cNvPr id="19" name="Image 1" descr="preencoded.png">    </p:cNvPr>
           <p:cNvPicPr>
             <a:picLocks noChangeAspect="1"/>
           </p:cNvPicPr>
@@ -3967,176 +4111,14 @@
         </p:blipFill>
         <p:spPr>
           <a:xfrm>
-            <a:off x="5225796" y="1906524"/>
-            <a:ext cx="265176" cy="265176"/>
+            <a:off x="5231100" y="1911828"/>
+            <a:ext cx="254569" cy="254569"/>
           </a:xfrm>
           <a:prstGeom prst="rect">
             <a:avLst/>
           </a:prstGeom>
         </p:spPr>
       </p:pic>
-      <p:sp>
-        <p:nvSpPr>
-          <p:cNvPr id="15" name="Text 11"/>
-          <p:cNvSpPr/>
-          <p:nvPr/>
-        </p:nvSpPr>
-        <p:spPr>
-          <a:xfrm>
-            <a:off x="5733288" y="1773936"/>
-            <a:ext cx="2743200" cy="530352"/>
-          </a:xfrm>
-          <a:prstGeom prst="rect">
-            <a:avLst/>
-          </a:prstGeom>
-          <a:noFill/>
-          <a:ln/>
-        </p:spPr>
-        <p:txBody>
-          <a:bodyPr wrap="square" lIns="0" tIns="0" rIns="0" bIns="0" rtlCol="0" anchor="ctr"/>
-          <a:lstStyle/>
-          <a:p>
-            <a:pPr indent="0" marL="0">
-              <a:buNone/>
-            </a:pPr>
-            <a:r>
-              <a:rPr lang="en-US" sz="1700" b="1" dirty="0">
-                <a:solidFill>
-                  <a:srgbClr val="FFFFFF"/>
-                </a:solidFill>
-                <a:latin typeface="Georgia" pitchFamily="34" charset="0"/>
-                <a:ea typeface="Georgia" pitchFamily="34" charset="-122"/>
-                <a:cs typeface="Georgia" pitchFamily="34" charset="-120"/>
-              </a:rPr>
-              <a:t>Strong</a:t>
-            </a:r>
-            <a:endParaRPr lang="en-US" sz="1700" dirty="0"/>
-          </a:p>
-        </p:txBody>
-      </p:sp>
-      <p:sp>
-        <p:nvSpPr>
-          <p:cNvPr id="16" name="Text 12"/>
-          <p:cNvSpPr/>
-          <p:nvPr/>
-        </p:nvSpPr>
-        <p:spPr>
-          <a:xfrm>
-            <a:off x="5093208" y="2395728"/>
-            <a:ext cx="3291840" cy="1234440"/>
-          </a:xfrm>
-          <a:prstGeom prst="rect">
-            <a:avLst/>
-          </a:prstGeom>
-          <a:noFill/>
-          <a:ln/>
-        </p:spPr>
-        <p:txBody>
-          <a:bodyPr wrap="square" lIns="0" tIns="0" rIns="0" bIns="0" rtlCol="0" anchor="ctr"/>
-          <a:lstStyle/>
-          <a:p>
-            <a:pPr indent="0" marL="0">
-              <a:lnSpc>
-                <a:spcPct val="112000"/>
-              </a:lnSpc>
-              <a:buNone/>
-            </a:pPr>
-            <a:r>
-              <a:rPr lang="en-US" sz="1200" i="1" dirty="0">
-                <a:solidFill>
-                  <a:srgbClr val="FFFFFF"/>
-                </a:solidFill>
-                <a:latin typeface="Georgia" pitchFamily="34" charset="0"/>
-                <a:ea typeface="Georgia" pitchFamily="34" charset="-122"/>
-                <a:cs typeface="Georgia" pitchFamily="34" charset="-120"/>
-              </a:rPr>
-              <a:t>“Junior motion designer at a mid-size brand studio in Denver or remote, animating social and product spots day-to-day, hired within a year, on a team that values craft, paying $58K to $68K.”</a:t>
-            </a:r>
-            <a:endParaRPr lang="en-US" sz="1200" dirty="0"/>
-          </a:p>
-        </p:txBody>
-      </p:sp>
-      <p:sp>
-        <p:nvSpPr>
-          <p:cNvPr id="17" name="Text 13"/>
-          <p:cNvSpPr/>
-          <p:nvPr/>
-        </p:nvSpPr>
-        <p:spPr>
-          <a:xfrm>
-            <a:off x="5093208" y="3675888"/>
-            <a:ext cx="3291840" cy="457200"/>
-          </a:xfrm>
-          <a:prstGeom prst="rect">
-            <a:avLst/>
-          </a:prstGeom>
-          <a:noFill/>
-          <a:ln/>
-        </p:spPr>
-        <p:txBody>
-          <a:bodyPr wrap="square" lIns="0" tIns="0" rIns="0" bIns="0" rtlCol="0" anchor="ctr"/>
-          <a:lstStyle/>
-          <a:p>
-            <a:pPr indent="0" marL="0">
-              <a:lnSpc>
-                <a:spcPct val="100000"/>
-              </a:lnSpc>
-              <a:buNone/>
-            </a:pPr>
-            <a:r>
-              <a:rPr lang="en-US" sz="1100" dirty="0">
-                <a:solidFill>
-                  <a:srgbClr val="E7DFE6"/>
-                </a:solidFill>
-                <a:latin typeface="Calibri" pitchFamily="34" charset="0"/>
-                <a:ea typeface="Calibri" pitchFamily="34" charset="-122"/>
-                <a:cs typeface="Calibri" pitchFamily="34" charset="-120"/>
-              </a:rPr>
-              <a:t>Every piece is named. You can plan around it.</a:t>
-            </a:r>
-            <a:endParaRPr lang="en-US" sz="1100" dirty="0"/>
-          </a:p>
-        </p:txBody>
-      </p:sp>
-      <p:sp>
-        <p:nvSpPr>
-          <p:cNvPr id="18" name="Text 14"/>
-          <p:cNvSpPr/>
-          <p:nvPr/>
-        </p:nvSpPr>
-        <p:spPr>
-          <a:xfrm>
-            <a:off x="502920" y="4370832"/>
-            <a:ext cx="8229600" cy="274320"/>
-          </a:xfrm>
-          <a:prstGeom prst="rect">
-            <a:avLst/>
-          </a:prstGeom>
-          <a:noFill/>
-          <a:ln/>
-        </p:spPr>
-        <p:txBody>
-          <a:bodyPr wrap="square" lIns="0" tIns="0" rIns="0" bIns="0" rtlCol="0" anchor="ctr"/>
-          <a:lstStyle/>
-          <a:p>
-            <a:pPr algn="l" indent="0" marL="0">
-              <a:buNone/>
-            </a:pPr>
-            <a:r>
-              <a:rPr lang="en-US" sz="1350" i="1" dirty="0">
-                <a:solidFill>
-                  <a:srgbClr val="B8956A"/>
-                </a:solidFill>
-                <a:latin typeface="Georgia" pitchFamily="34" charset="0"/>
-                <a:ea typeface="Georgia" pitchFamily="34" charset="-122"/>
-                <a:cs typeface="Georgia" pitchFamily="34" charset="-120"/>
-              </a:rPr>
-              <a:t>Same person. One version you can act on.</a:t>
-            </a:r>
-            <a:endParaRPr lang="en-US" sz="1350" dirty="0"/>
-          </a:p>
-        </p:txBody>
-      </p:sp>
     </p:spTree>
   </p:cSld>
   <p:clrMapOvr>
@@ -4246,13 +4228,10 @@
           <a:ln/>
         </p:spPr>
         <p:txBody>
-          <a:bodyPr wrap="square" lIns="0" tIns="0" rIns="0" bIns="0" rtlCol="0" anchor="t"/>
-          <a:lstStyle/>
-          <a:p>
-            <a:pPr algn="l" indent="0" marL="0">
-              <a:lnSpc>
-                <a:spcPct val="98000"/>
-              </a:lnSpc>
+          <a:bodyPr wrap="square" lIns="0" tIns="0" rIns="0" bIns="0" rtlCol="0" anchor="ctr"/>
+          <a:lstStyle/>
+          <a:p>
+            <a:pPr algn="l" indent="0" marL="0">
               <a:buNone/>
             </a:pPr>
             <a:r>
@@ -4264,7 +4243,7 @@
                 <a:ea typeface="Georgia" pitchFamily="34" charset="-122"/>
                 <a:cs typeface="Georgia" pitchFamily="34" charset="-120"/>
               </a:rPr>
-              <a:t>Pick one reach job posting</a:t>
+              <a:t>Pick two real job postings</a:t>
             </a:r>
             <a:endParaRPr lang="en-US" sz="3300" dirty="0"/>
           </a:p>
@@ -4292,9 +4271,6 @@
           <a:lstStyle/>
           <a:p>
             <a:pPr algn="l" indent="0" marL="0">
-              <a:lnSpc>
-                <a:spcPct val="105000"/>
-              </a:lnSpc>
               <a:buNone/>
             </a:pPr>
             <a:r>
@@ -4306,7 +4282,7 @@
                 <a:ea typeface="Calibri" pitchFamily="34" charset="-122"/>
                 <a:cs typeface="Calibri" pitchFamily="34" charset="-120"/>
               </a:rPr>
-              <a:t>Now turn the goal into something concrete: find one real job posting that excites you, just out of reach, and make it your anchor.</a:t>
+              <a:t>Turn your goal into something concrete by anchoring to real listings. You will pick two: one local you could actually walk into, and one reach that can be anywhere.</a:t>
             </a:r>
             <a:endParaRPr lang="en-US" sz="1300" dirty="0"/>
           </a:p>
@@ -4320,8 +4296,8 @@
         </p:nvSpPr>
         <p:spPr>
           <a:xfrm>
-            <a:off x="502920" y="2240280"/>
-            <a:ext cx="2697480" cy="1828800"/>
+            <a:off x="502920" y="2103120"/>
+            <a:ext cx="4023360" cy="2148840"/>
           </a:xfrm>
           <a:prstGeom prst="rect">
             <a:avLst/>
@@ -4331,7 +4307,7 @@
           </a:solidFill>
           <a:ln/>
           <a:effectLst>
-            <a:outerShdw sx="100000" sy="100000" kx="0" ky="0" algn="bl" rotWithShape="0" blurRad="114300" dist="38100" dir="5400000">
+            <a:outerShdw sx="100000" sy="100000" kx="0" ky="0" algn="bl" rotWithShape="0" blurRad="63500" dist="25400" dir="8100000">
               <a:srgbClr val="000000">
                 <a:alpha val="10000"/>
               </a:srgbClr>
@@ -4347,28 +4323,343 @@
         </p:nvSpPr>
         <p:spPr>
           <a:xfrm>
-            <a:off x="758952" y="2468880"/>
-            <a:ext cx="548640" cy="548640"/>
+            <a:off x="502920" y="2103120"/>
+            <a:ext cx="128016" cy="2148840"/>
+          </a:xfrm>
+          <a:prstGeom prst="rect">
+            <a:avLst/>
+          </a:prstGeom>
+          <a:solidFill>
+            <a:srgbClr val="6B8F6E"/>
+          </a:solidFill>
+          <a:ln/>
+        </p:spPr>
+      </p:sp>
+      <p:sp>
+        <p:nvSpPr>
+          <p:cNvPr id="8" name="Shape 6"/>
+          <p:cNvSpPr/>
+          <p:nvPr/>
+        </p:nvSpPr>
+        <p:spPr>
+          <a:xfrm>
+            <a:off x="777240" y="2331720"/>
+            <a:ext cx="566928" cy="566928"/>
           </a:xfrm>
           <a:prstGeom prst="ellipse">
             <a:avLst/>
           </a:prstGeom>
           <a:solidFill>
-            <a:srgbClr val="7A5080"/>
+            <a:srgbClr val="6B8F6E"/>
+          </a:solidFill>
+          <a:ln/>
+        </p:spPr>
+      </p:sp>
+      <p:sp>
+        <p:nvSpPr>
+          <p:cNvPr id="9" name="Text 7"/>
+          <p:cNvSpPr/>
+          <p:nvPr/>
+        </p:nvSpPr>
+        <p:spPr>
+          <a:xfrm>
+            <a:off x="1481328" y="2331720"/>
+            <a:ext cx="2926080" cy="566928"/>
+          </a:xfrm>
+          <a:prstGeom prst="rect">
+            <a:avLst/>
+          </a:prstGeom>
+          <a:noFill/>
+          <a:ln/>
+        </p:spPr>
+        <p:txBody>
+          <a:bodyPr wrap="square" lIns="0" tIns="0" rIns="0" bIns="0" rtlCol="0" anchor="ctr"/>
+          <a:lstStyle/>
+          <a:p>
+            <a:pPr algn="l" indent="0" marL="0">
+              <a:buNone/>
+            </a:pPr>
+            <a:r>
+              <a:rPr lang="en-US" sz="1700" b="1" dirty="0">
+                <a:solidFill>
+                  <a:srgbClr val="7A5080"/>
+                </a:solidFill>
+                <a:latin typeface="Georgia" pitchFamily="34" charset="0"/>
+                <a:ea typeface="Georgia" pitchFamily="34" charset="-122"/>
+                <a:cs typeface="Georgia" pitchFamily="34" charset="-120"/>
+              </a:rPr>
+              <a:t>Job one: Local</a:t>
+            </a:r>
+            <a:endParaRPr lang="en-US" sz="1700" dirty="0"/>
+          </a:p>
+        </p:txBody>
+      </p:sp>
+      <p:sp>
+        <p:nvSpPr>
+          <p:cNvPr id="10" name="Text 8"/>
+          <p:cNvSpPr/>
+          <p:nvPr/>
+        </p:nvSpPr>
+        <p:spPr>
+          <a:xfrm>
+            <a:off x="777240" y="3035808"/>
+            <a:ext cx="3520440" cy="1143000"/>
+          </a:xfrm>
+          <a:prstGeom prst="rect">
+            <a:avLst/>
+          </a:prstGeom>
+          <a:noFill/>
+          <a:ln/>
+        </p:spPr>
+        <p:txBody>
+          <a:bodyPr wrap="square" lIns="0" tIns="0" rIns="0" bIns="0" rtlCol="0" anchor="t"/>
+          <a:lstStyle/>
+          <a:p>
+            <a:pPr algn="l" indent="0" marL="0">
+              <a:lnSpc>
+                <a:spcPct val="105000"/>
+              </a:lnSpc>
+              <a:buNone/>
+            </a:pPr>
+            <a:r>
+              <a:rPr lang="en-US" sz="1200" b="1" dirty="0">
+                <a:solidFill>
+                  <a:srgbClr val="3A2E3F"/>
+                </a:solidFill>
+                <a:latin typeface="Calibri" pitchFamily="34" charset="0"/>
+                <a:ea typeface="Calibri" pitchFamily="34" charset="-122"/>
+                <a:cs typeface="Calibri" pitchFamily="34" charset="-120"/>
+              </a:rPr>
+              <a:t>A real studio, agency, or company near you. </a:t>
+            </a:r>
+            <a:pPr algn="l" indent="0" marL="0">
+              <a:lnSpc>
+                <a:spcPct val="105000"/>
+              </a:lnSpc>
+              <a:buNone/>
+            </a:pPr>
+            <a:r>
+              <a:rPr lang="en-US" sz="1200" dirty="0">
+                <a:solidFill>
+                  <a:srgbClr val="3A2E3F"/>
+                </a:solidFill>
+                <a:latin typeface="Calibri" pitchFamily="34" charset="0"/>
+                <a:ea typeface="Calibri" pitchFamily="34" charset="-122"/>
+                <a:cs typeface="Calibri" pitchFamily="34" charset="-120"/>
+              </a:rPr>
+              <a:t>Career Services can build relationships with local employers, so a nearby target opens real doors.</a:t>
+            </a:r>
+            <a:endParaRPr lang="en-US" sz="1200" dirty="0"/>
+          </a:p>
+        </p:txBody>
+      </p:sp>
+      <p:sp>
+        <p:nvSpPr>
+          <p:cNvPr id="11" name="Shape 9"/>
+          <p:cNvSpPr/>
+          <p:nvPr/>
+        </p:nvSpPr>
+        <p:spPr>
+          <a:xfrm>
+            <a:off x="4617720" y="2103120"/>
+            <a:ext cx="4023360" cy="2148840"/>
+          </a:xfrm>
+          <a:prstGeom prst="rect">
+            <a:avLst/>
+          </a:prstGeom>
+          <a:solidFill>
+            <a:srgbClr val="FFFFFF"/>
           </a:solidFill>
           <a:ln/>
           <a:effectLst>
-            <a:outerShdw sx="100000" sy="100000" kx="0" ky="0" algn="bl" rotWithShape="0" blurRad="88900" dist="38100" dir="5400000">
+            <a:outerShdw sx="100000" sy="100000" kx="0" ky="0" algn="bl" rotWithShape="0" blurRad="63500" dist="25400" dir="8100000">
               <a:srgbClr val="000000">
-                <a:alpha val="12000"/>
+                <a:alpha val="10000"/>
               </a:srgbClr>
             </a:outerShdw>
           </a:effectLst>
         </p:spPr>
       </p:sp>
+      <p:sp>
+        <p:nvSpPr>
+          <p:cNvPr id="12" name="Shape 10"/>
+          <p:cNvSpPr/>
+          <p:nvPr/>
+        </p:nvSpPr>
+        <p:spPr>
+          <a:xfrm>
+            <a:off x="4617720" y="2103120"/>
+            <a:ext cx="128016" cy="2148840"/>
+          </a:xfrm>
+          <a:prstGeom prst="rect">
+            <a:avLst/>
+          </a:prstGeom>
+          <a:solidFill>
+            <a:srgbClr val="B8956A"/>
+          </a:solidFill>
+          <a:ln/>
+        </p:spPr>
+      </p:sp>
+      <p:sp>
+        <p:nvSpPr>
+          <p:cNvPr id="13" name="Shape 11"/>
+          <p:cNvSpPr/>
+          <p:nvPr/>
+        </p:nvSpPr>
+        <p:spPr>
+          <a:xfrm>
+            <a:off x="4892040" y="2331720"/>
+            <a:ext cx="566928" cy="566928"/>
+          </a:xfrm>
+          <a:prstGeom prst="ellipse">
+            <a:avLst/>
+          </a:prstGeom>
+          <a:solidFill>
+            <a:srgbClr val="B8956A"/>
+          </a:solidFill>
+          <a:ln/>
+        </p:spPr>
+      </p:sp>
+      <p:sp>
+        <p:nvSpPr>
+          <p:cNvPr id="14" name="Text 12"/>
+          <p:cNvSpPr/>
+          <p:nvPr/>
+        </p:nvSpPr>
+        <p:spPr>
+          <a:xfrm>
+            <a:off x="5596128" y="2331720"/>
+            <a:ext cx="2926080" cy="566928"/>
+          </a:xfrm>
+          <a:prstGeom prst="rect">
+            <a:avLst/>
+          </a:prstGeom>
+          <a:noFill/>
+          <a:ln/>
+        </p:spPr>
+        <p:txBody>
+          <a:bodyPr wrap="square" lIns="0" tIns="0" rIns="0" bIns="0" rtlCol="0" anchor="ctr"/>
+          <a:lstStyle/>
+          <a:p>
+            <a:pPr algn="l" indent="0" marL="0">
+              <a:buNone/>
+            </a:pPr>
+            <a:r>
+              <a:rPr lang="en-US" sz="1700" b="1" dirty="0">
+                <a:solidFill>
+                  <a:srgbClr val="7A5080"/>
+                </a:solidFill>
+                <a:latin typeface="Georgia" pitchFamily="34" charset="0"/>
+                <a:ea typeface="Georgia" pitchFamily="34" charset="-122"/>
+                <a:cs typeface="Georgia" pitchFamily="34" charset="-120"/>
+              </a:rPr>
+              <a:t>Job two: Reach</a:t>
+            </a:r>
+            <a:endParaRPr lang="en-US" sz="1700" dirty="0"/>
+          </a:p>
+        </p:txBody>
+      </p:sp>
+      <p:sp>
+        <p:nvSpPr>
+          <p:cNvPr id="15" name="Text 13"/>
+          <p:cNvSpPr/>
+          <p:nvPr/>
+        </p:nvSpPr>
+        <p:spPr>
+          <a:xfrm>
+            <a:off x="4892040" y="3035808"/>
+            <a:ext cx="3520440" cy="1143000"/>
+          </a:xfrm>
+          <a:prstGeom prst="rect">
+            <a:avLst/>
+          </a:prstGeom>
+          <a:noFill/>
+          <a:ln/>
+        </p:spPr>
+        <p:txBody>
+          <a:bodyPr wrap="square" lIns="0" tIns="0" rIns="0" bIns="0" rtlCol="0" anchor="t"/>
+          <a:lstStyle/>
+          <a:p>
+            <a:pPr algn="l" indent="0" marL="0">
+              <a:lnSpc>
+                <a:spcPct val="105000"/>
+              </a:lnSpc>
+              <a:buNone/>
+            </a:pPr>
+            <a:r>
+              <a:rPr lang="en-US" sz="1200" b="1" dirty="0">
+                <a:solidFill>
+                  <a:srgbClr val="3A2E3F"/>
+                </a:solidFill>
+                <a:latin typeface="Calibri" pitchFamily="34" charset="0"/>
+                <a:ea typeface="Calibri" pitchFamily="34" charset="-122"/>
+                <a:cs typeface="Calibri" pitchFamily="34" charset="-120"/>
+              </a:rPr>
+              <a:t>A posting that excites you, just out of reach, anywhere. </a:t>
+            </a:r>
+            <a:pPr algn="l" indent="0" marL="0">
+              <a:lnSpc>
+                <a:spcPct val="105000"/>
+              </a:lnSpc>
+              <a:buNone/>
+            </a:pPr>
+            <a:r>
+              <a:rPr lang="en-US" sz="1200" dirty="0">
+                <a:solidFill>
+                  <a:srgbClr val="3A2E3F"/>
+                </a:solidFill>
+                <a:latin typeface="Calibri" pitchFamily="34" charset="0"/>
+                <a:ea typeface="Calibri" pitchFamily="34" charset="-122"/>
+                <a:cs typeface="Calibri" pitchFamily="34" charset="-120"/>
+              </a:rPr>
+              <a:t>Slightly above your current level, something to grow into. It can be in any city or fully remote.</a:t>
+            </a:r>
+            <a:endParaRPr lang="en-US" sz="1200" dirty="0"/>
+          </a:p>
+        </p:txBody>
+      </p:sp>
+      <p:sp>
+        <p:nvSpPr>
+          <p:cNvPr id="16" name="Text 14"/>
+          <p:cNvSpPr/>
+          <p:nvPr/>
+        </p:nvSpPr>
+        <p:spPr>
+          <a:xfrm>
+            <a:off x="502920" y="4434840"/>
+            <a:ext cx="8229600" cy="274320"/>
+          </a:xfrm>
+          <a:prstGeom prst="rect">
+            <a:avLst/>
+          </a:prstGeom>
+          <a:noFill/>
+          <a:ln/>
+        </p:spPr>
+        <p:txBody>
+          <a:bodyPr wrap="square" lIns="0" tIns="0" rIns="0" bIns="0" rtlCol="0" anchor="ctr"/>
+          <a:lstStyle/>
+          <a:p>
+            <a:pPr algn="l" indent="0" marL="0">
+              <a:buNone/>
+            </a:pPr>
+            <a:r>
+              <a:rPr lang="en-US" sz="1350" b="1" i="1" dirty="0">
+                <a:solidFill>
+                  <a:srgbClr val="B8956A"/>
+                </a:solidFill>
+                <a:latin typeface="Calibri" pitchFamily="34" charset="0"/>
+                <a:ea typeface="Calibri" pitchFamily="34" charset="-122"/>
+                <a:cs typeface="Calibri" pitchFamily="34" charset="-120"/>
+              </a:rPr>
+              <a:t>Two postings, chosen on purpose. One close to home, one to grow into.</a:t>
+            </a:r>
+            <a:endParaRPr lang="en-US" sz="1350" dirty="0"/>
+          </a:p>
+        </p:txBody>
+      </p:sp>
       <p:pic>
         <p:nvPicPr>
-          <p:cNvPr id="8" name="Image 0" descr="preencoded.png">    </p:cNvPr>
+          <p:cNvPr id="17" name="Image 0" descr="preencoded.png">    </p:cNvPr>
           <p:cNvPicPr>
             <a:picLocks noChangeAspect="1"/>
           </p:cNvPicPr>
@@ -4382,152 +4673,17 @@
         </p:blipFill>
         <p:spPr>
           <a:xfrm>
-            <a:off x="901598" y="2611526"/>
-            <a:ext cx="263347" cy="263347"/>
+            <a:off x="5039441" y="2479121"/>
+            <a:ext cx="272125" cy="272125"/>
           </a:xfrm>
           <a:prstGeom prst="rect">
             <a:avLst/>
           </a:prstGeom>
         </p:spPr>
       </p:pic>
-      <p:sp>
-        <p:nvSpPr>
-          <p:cNvPr id="9" name="Text 6"/>
-          <p:cNvSpPr/>
-          <p:nvPr/>
-        </p:nvSpPr>
-        <p:spPr>
-          <a:xfrm>
-            <a:off x="758952" y="3072384"/>
-            <a:ext cx="2240280" cy="310896"/>
-          </a:xfrm>
-          <a:prstGeom prst="rect">
-            <a:avLst/>
-          </a:prstGeom>
-          <a:noFill/>
-          <a:ln/>
-        </p:spPr>
-        <p:txBody>
-          <a:bodyPr wrap="square" lIns="0" tIns="0" rIns="0" bIns="0" rtlCol="0" anchor="ctr"/>
-          <a:lstStyle/>
-          <a:p>
-            <a:pPr indent="0" marL="0">
-              <a:buNone/>
-            </a:pPr>
-            <a:r>
-              <a:rPr lang="en-US" sz="1600" b="1" dirty="0">
-                <a:solidFill>
-                  <a:srgbClr val="7A5080"/>
-                </a:solidFill>
-                <a:latin typeface="Georgia" pitchFamily="34" charset="0"/>
-                <a:ea typeface="Georgia" pitchFamily="34" charset="-122"/>
-                <a:cs typeface="Georgia" pitchFamily="34" charset="-120"/>
-              </a:rPr>
-              <a:t>Real posting</a:t>
-            </a:r>
-            <a:endParaRPr lang="en-US" sz="1600" dirty="0"/>
-          </a:p>
-        </p:txBody>
-      </p:sp>
-      <p:sp>
-        <p:nvSpPr>
-          <p:cNvPr id="10" name="Text 7"/>
-          <p:cNvSpPr/>
-          <p:nvPr/>
-        </p:nvSpPr>
-        <p:spPr>
-          <a:xfrm>
-            <a:off x="758952" y="3401568"/>
-            <a:ext cx="2185416" cy="640080"/>
-          </a:xfrm>
-          <a:prstGeom prst="rect">
-            <a:avLst/>
-          </a:prstGeom>
-          <a:noFill/>
-          <a:ln/>
-        </p:spPr>
-        <p:txBody>
-          <a:bodyPr wrap="square" lIns="0" tIns="0" rIns="0" bIns="0" rtlCol="0" anchor="ctr"/>
-          <a:lstStyle/>
-          <a:p>
-            <a:pPr indent="0" marL="0">
-              <a:lnSpc>
-                <a:spcPct val="105000"/>
-              </a:lnSpc>
-              <a:buNone/>
-            </a:pPr>
-            <a:r>
-              <a:rPr lang="en-US" sz="1150" dirty="0">
-                <a:solidFill>
-                  <a:srgbClr val="3A2E3F"/>
-                </a:solidFill>
-                <a:latin typeface="Calibri" pitchFamily="34" charset="0"/>
-                <a:ea typeface="Calibri" pitchFamily="34" charset="-122"/>
-                <a:cs typeface="Calibri" pitchFamily="34" charset="-120"/>
-              </a:rPr>
-              <a:t>An actual listing you found, not a made-up wish.</a:t>
-            </a:r>
-            <a:endParaRPr lang="en-US" sz="1150" dirty="0"/>
-          </a:p>
-        </p:txBody>
-      </p:sp>
-      <p:sp>
-        <p:nvSpPr>
-          <p:cNvPr id="11" name="Shape 8"/>
-          <p:cNvSpPr/>
-          <p:nvPr/>
-        </p:nvSpPr>
-        <p:spPr>
-          <a:xfrm>
-            <a:off x="3355848" y="2240280"/>
-            <a:ext cx="2697480" cy="1828800"/>
-          </a:xfrm>
-          <a:prstGeom prst="rect">
-            <a:avLst/>
-          </a:prstGeom>
-          <a:solidFill>
-            <a:srgbClr val="FFFFFF"/>
-          </a:solidFill>
-          <a:ln/>
-          <a:effectLst>
-            <a:outerShdw sx="100000" sy="100000" kx="0" ky="0" algn="bl" rotWithShape="0" blurRad="114300" dist="38100" dir="5400000">
-              <a:srgbClr val="000000">
-                <a:alpha val="10000"/>
-              </a:srgbClr>
-            </a:outerShdw>
-          </a:effectLst>
-        </p:spPr>
-      </p:sp>
-      <p:sp>
-        <p:nvSpPr>
-          <p:cNvPr id="12" name="Shape 9"/>
-          <p:cNvSpPr/>
-          <p:nvPr/>
-        </p:nvSpPr>
-        <p:spPr>
-          <a:xfrm>
-            <a:off x="3611880" y="2468880"/>
-            <a:ext cx="548640" cy="548640"/>
-          </a:xfrm>
-          <a:prstGeom prst="ellipse">
-            <a:avLst/>
-          </a:prstGeom>
-          <a:solidFill>
-            <a:srgbClr val="B8956A"/>
-          </a:solidFill>
-          <a:ln/>
-          <a:effectLst>
-            <a:outerShdw sx="100000" sy="100000" kx="0" ky="0" algn="bl" rotWithShape="0" blurRad="88900" dist="38100" dir="5400000">
-              <a:srgbClr val="000000">
-                <a:alpha val="12000"/>
-              </a:srgbClr>
-            </a:outerShdw>
-          </a:effectLst>
-        </p:spPr>
-      </p:sp>
       <p:pic>
         <p:nvPicPr>
-          <p:cNvPr id="13" name="Image 1" descr="preencoded.png">    </p:cNvPr>
+          <p:cNvPr id="18" name="Image 1" descr="preencoded.png">    </p:cNvPr>
           <p:cNvPicPr>
             <a:picLocks noChangeAspect="1"/>
           </p:cNvPicPr>
@@ -4541,293 +4697,14 @@
         </p:blipFill>
         <p:spPr>
           <a:xfrm>
-            <a:off x="3754526" y="2611526"/>
-            <a:ext cx="263347" cy="263347"/>
+            <a:off x="924641" y="2479121"/>
+            <a:ext cx="272125" cy="272125"/>
           </a:xfrm>
           <a:prstGeom prst="rect">
             <a:avLst/>
           </a:prstGeom>
         </p:spPr>
       </p:pic>
-      <p:sp>
-        <p:nvSpPr>
-          <p:cNvPr id="14" name="Text 10"/>
-          <p:cNvSpPr/>
-          <p:nvPr/>
-        </p:nvSpPr>
-        <p:spPr>
-          <a:xfrm>
-            <a:off x="3611880" y="3072384"/>
-            <a:ext cx="2240280" cy="310896"/>
-          </a:xfrm>
-          <a:prstGeom prst="rect">
-            <a:avLst/>
-          </a:prstGeom>
-          <a:noFill/>
-          <a:ln/>
-        </p:spPr>
-        <p:txBody>
-          <a:bodyPr wrap="square" lIns="0" tIns="0" rIns="0" bIns="0" rtlCol="0" anchor="ctr"/>
-          <a:lstStyle/>
-          <a:p>
-            <a:pPr indent="0" marL="0">
-              <a:buNone/>
-            </a:pPr>
-            <a:r>
-              <a:rPr lang="en-US" sz="1600" b="1" dirty="0">
-                <a:solidFill>
-                  <a:srgbClr val="7A5080"/>
-                </a:solidFill>
-                <a:latin typeface="Georgia" pitchFamily="34" charset="0"/>
-                <a:ea typeface="Georgia" pitchFamily="34" charset="-122"/>
-                <a:cs typeface="Georgia" pitchFamily="34" charset="-120"/>
-              </a:rPr>
-              <a:t>A reach</a:t>
-            </a:r>
-            <a:endParaRPr lang="en-US" sz="1600" dirty="0"/>
-          </a:p>
-        </p:txBody>
-      </p:sp>
-      <p:sp>
-        <p:nvSpPr>
-          <p:cNvPr id="15" name="Text 11"/>
-          <p:cNvSpPr/>
-          <p:nvPr/>
-        </p:nvSpPr>
-        <p:spPr>
-          <a:xfrm>
-            <a:off x="3611880" y="3401568"/>
-            <a:ext cx="2185416" cy="640080"/>
-          </a:xfrm>
-          <a:prstGeom prst="rect">
-            <a:avLst/>
-          </a:prstGeom>
-          <a:noFill/>
-          <a:ln/>
-        </p:spPr>
-        <p:txBody>
-          <a:bodyPr wrap="square" lIns="0" tIns="0" rIns="0" bIns="0" rtlCol="0" anchor="ctr"/>
-          <a:lstStyle/>
-          <a:p>
-            <a:pPr indent="0" marL="0">
-              <a:lnSpc>
-                <a:spcPct val="105000"/>
-              </a:lnSpc>
-              <a:buNone/>
-            </a:pPr>
-            <a:r>
-              <a:rPr lang="en-US" sz="1150" dirty="0">
-                <a:solidFill>
-                  <a:srgbClr val="3A2E3F"/>
-                </a:solidFill>
-                <a:latin typeface="Calibri" pitchFamily="34" charset="0"/>
-                <a:ea typeface="Calibri" pitchFamily="34" charset="-122"/>
-                <a:cs typeface="Calibri" pitchFamily="34" charset="-120"/>
-              </a:rPr>
-              <a:t>Slightly above your current level, something to grow into.</a:t>
-            </a:r>
-            <a:endParaRPr lang="en-US" sz="1150" dirty="0"/>
-          </a:p>
-        </p:txBody>
-      </p:sp>
-      <p:sp>
-        <p:nvSpPr>
-          <p:cNvPr id="16" name="Shape 12"/>
-          <p:cNvSpPr/>
-          <p:nvPr/>
-        </p:nvSpPr>
-        <p:spPr>
-          <a:xfrm>
-            <a:off x="6208776" y="2240280"/>
-            <a:ext cx="2697480" cy="1828800"/>
-          </a:xfrm>
-          <a:prstGeom prst="rect">
-            <a:avLst/>
-          </a:prstGeom>
-          <a:solidFill>
-            <a:srgbClr val="FFFFFF"/>
-          </a:solidFill>
-          <a:ln/>
-          <a:effectLst>
-            <a:outerShdw sx="100000" sy="100000" kx="0" ky="0" algn="bl" rotWithShape="0" blurRad="114300" dist="38100" dir="5400000">
-              <a:srgbClr val="000000">
-                <a:alpha val="10000"/>
-              </a:srgbClr>
-            </a:outerShdw>
-          </a:effectLst>
-        </p:spPr>
-      </p:sp>
-      <p:sp>
-        <p:nvSpPr>
-          <p:cNvPr id="17" name="Shape 13"/>
-          <p:cNvSpPr/>
-          <p:nvPr/>
-        </p:nvSpPr>
-        <p:spPr>
-          <a:xfrm>
-            <a:off x="6464808" y="2468880"/>
-            <a:ext cx="548640" cy="548640"/>
-          </a:xfrm>
-          <a:prstGeom prst="ellipse">
-            <a:avLst/>
-          </a:prstGeom>
-          <a:solidFill>
-            <a:srgbClr val="6B8F6E"/>
-          </a:solidFill>
-          <a:ln/>
-          <a:effectLst>
-            <a:outerShdw sx="100000" sy="100000" kx="0" ky="0" algn="bl" rotWithShape="0" blurRad="88900" dist="38100" dir="5400000">
-              <a:srgbClr val="000000">
-                <a:alpha val="12000"/>
-              </a:srgbClr>
-            </a:outerShdw>
-          </a:effectLst>
-        </p:spPr>
-      </p:sp>
-      <p:pic>
-        <p:nvPicPr>
-          <p:cNvPr id="18" name="Image 2" descr="preencoded.png">    </p:cNvPr>
-          <p:cNvPicPr>
-            <a:picLocks noChangeAspect="1"/>
-          </p:cNvPicPr>
-          <p:nvPr/>
-        </p:nvPicPr>
-        <p:blipFill>
-          <a:blip r:embed="rId3"/>
-          <a:stretch>
-            <a:fillRect/>
-          </a:stretch>
-        </p:blipFill>
-        <p:spPr>
-          <a:xfrm>
-            <a:off x="6607454" y="2611526"/>
-            <a:ext cx="263347" cy="263347"/>
-          </a:xfrm>
-          <a:prstGeom prst="rect">
-            <a:avLst/>
-          </a:prstGeom>
-        </p:spPr>
-      </p:pic>
-      <p:sp>
-        <p:nvSpPr>
-          <p:cNvPr id="19" name="Text 14"/>
-          <p:cNvSpPr/>
-          <p:nvPr/>
-        </p:nvSpPr>
-        <p:spPr>
-          <a:xfrm>
-            <a:off x="6464808" y="3072384"/>
-            <a:ext cx="2240280" cy="310896"/>
-          </a:xfrm>
-          <a:prstGeom prst="rect">
-            <a:avLst/>
-          </a:prstGeom>
-          <a:noFill/>
-          <a:ln/>
-        </p:spPr>
-        <p:txBody>
-          <a:bodyPr wrap="square" lIns="0" tIns="0" rIns="0" bIns="0" rtlCol="0" anchor="ctr"/>
-          <a:lstStyle/>
-          <a:p>
-            <a:pPr indent="0" marL="0">
-              <a:buNone/>
-            </a:pPr>
-            <a:r>
-              <a:rPr lang="en-US" sz="1600" b="1" dirty="0">
-                <a:solidFill>
-                  <a:srgbClr val="7A5080"/>
-                </a:solidFill>
-                <a:latin typeface="Georgia" pitchFamily="34" charset="0"/>
-                <a:ea typeface="Georgia" pitchFamily="34" charset="-122"/>
-                <a:cs typeface="Georgia" pitchFamily="34" charset="-120"/>
-              </a:rPr>
-              <a:t>Your anchor</a:t>
-            </a:r>
-            <a:endParaRPr lang="en-US" sz="1600" dirty="0"/>
-          </a:p>
-        </p:txBody>
-      </p:sp>
-      <p:sp>
-        <p:nvSpPr>
-          <p:cNvPr id="20" name="Text 15"/>
-          <p:cNvSpPr/>
-          <p:nvPr/>
-        </p:nvSpPr>
-        <p:spPr>
-          <a:xfrm>
-            <a:off x="6464808" y="3401568"/>
-            <a:ext cx="2185416" cy="640080"/>
-          </a:xfrm>
-          <a:prstGeom prst="rect">
-            <a:avLst/>
-          </a:prstGeom>
-          <a:noFill/>
-          <a:ln/>
-        </p:spPr>
-        <p:txBody>
-          <a:bodyPr wrap="square" lIns="0" tIns="0" rIns="0" bIns="0" rtlCol="0" anchor="ctr"/>
-          <a:lstStyle/>
-          <a:p>
-            <a:pPr indent="0" marL="0">
-              <a:lnSpc>
-                <a:spcPct val="105000"/>
-              </a:lnSpc>
-              <a:buNone/>
-            </a:pPr>
-            <a:r>
-              <a:rPr lang="en-US" sz="1150" dirty="0">
-                <a:solidFill>
-                  <a:srgbClr val="3A2E3F"/>
-                </a:solidFill>
-                <a:latin typeface="Calibri" pitchFamily="34" charset="0"/>
-                <a:ea typeface="Calibri" pitchFamily="34" charset="-122"/>
-                <a:cs typeface="Calibri" pitchFamily="34" charset="-120"/>
-              </a:rPr>
-              <a:t>It holds the whole semester’s work steady in one place.</a:t>
-            </a:r>
-            <a:endParaRPr lang="en-US" sz="1150" dirty="0"/>
-          </a:p>
-        </p:txBody>
-      </p:sp>
-      <p:sp>
-        <p:nvSpPr>
-          <p:cNvPr id="21" name="Text 16"/>
-          <p:cNvSpPr/>
-          <p:nvPr/>
-        </p:nvSpPr>
-        <p:spPr>
-          <a:xfrm>
-            <a:off x="502920" y="4736592"/>
-            <a:ext cx="8229600" cy="274320"/>
-          </a:xfrm>
-          <a:prstGeom prst="rect">
-            <a:avLst/>
-          </a:prstGeom>
-          <a:noFill/>
-          <a:ln/>
-        </p:spPr>
-        <p:txBody>
-          <a:bodyPr wrap="square" lIns="0" tIns="0" rIns="0" bIns="0" rtlCol="0" anchor="ctr"/>
-          <a:lstStyle/>
-          <a:p>
-            <a:pPr algn="l" indent="0" marL="0">
-              <a:buNone/>
-            </a:pPr>
-            <a:r>
-              <a:rPr lang="en-US" sz="1350" i="1" dirty="0">
-                <a:solidFill>
-                  <a:srgbClr val="B8956A"/>
-                </a:solidFill>
-                <a:latin typeface="Georgia" pitchFamily="34" charset="0"/>
-                <a:ea typeface="Georgia" pitchFamily="34" charset="-122"/>
-                <a:cs typeface="Georgia" pitchFamily="34" charset="-120"/>
-              </a:rPr>
-              <a:t>One posting, chosen on purpose, beats a hundred maybes.</a:t>
-            </a:r>
-            <a:endParaRPr lang="en-US" sz="1350" dirty="0"/>
-          </a:p>
-        </p:txBody>
-      </p:sp>
     </p:spTree>
   </p:cSld>
   <p:clrMapOvr>
@@ -4913,7 +4790,7 @@
                 <a:ea typeface="Calibri" pitchFamily="34" charset="-122"/>
                 <a:cs typeface="Calibri" pitchFamily="34" charset="-120"/>
               </a:rPr>
-              <a:t>ONE TARGET</a:t>
+              <a:t>WHERE TO LOOK</a:t>
             </a:r>
             <a:endParaRPr lang="en-US" sz="1100" dirty="0"/>
           </a:p>
@@ -4937,13 +4814,10 @@
           <a:ln/>
         </p:spPr>
         <p:txBody>
-          <a:bodyPr wrap="square" lIns="0" tIns="0" rIns="0" bIns="0" rtlCol="0" anchor="t"/>
-          <a:lstStyle/>
-          <a:p>
-            <a:pPr algn="l" indent="0" marL="0">
-              <a:lnSpc>
-                <a:spcPct val="98000"/>
-              </a:lnSpc>
+          <a:bodyPr wrap="square" lIns="0" tIns="0" rIns="0" bIns="0" rtlCol="0" anchor="ctr"/>
+          <a:lstStyle/>
+          <a:p>
+            <a:pPr algn="l" indent="0" marL="0">
               <a:buNone/>
             </a:pPr>
             <a:r>
@@ -4955,7 +4829,7 @@
                 <a:ea typeface="Georgia" pitchFamily="34" charset="-122"/>
                 <a:cs typeface="Georgia" pitchFamily="34" charset="-120"/>
               </a:rPr>
-              <a:t>Everything aligns to it</a:t>
+              <a:t>Creative jobs beyond Indeed</a:t>
             </a:r>
             <a:endParaRPr lang="en-US" sz="3300" dirty="0"/>
           </a:p>
@@ -4970,7 +4844,7 @@
         <p:spPr>
           <a:xfrm>
             <a:off x="502920" y="1444752"/>
-            <a:ext cx="8183880" cy="502920"/>
+            <a:ext cx="8183880" cy="548640"/>
           </a:xfrm>
           <a:prstGeom prst="rect">
             <a:avLst/>
@@ -4983,9 +4857,6 @@
           <a:lstStyle/>
           <a:p>
             <a:pPr algn="l" indent="0" marL="0">
-              <a:lnSpc>
-                <a:spcPct val="105000"/>
-              </a:lnSpc>
               <a:buNone/>
             </a:pPr>
             <a:r>
@@ -4997,7 +4868,7 @@
                 <a:ea typeface="Calibri" pitchFamily="34" charset="-122"/>
                 <a:cs typeface="Calibri" pitchFamily="34" charset="-120"/>
               </a:rPr>
-              <a:t>Once your reach job is set, every assignment this semester points back at it. That is what keeps your work focused.</a:t>
+              <a:t>The best design roles often never hit the big generic boards. Search where creative employers actually post.</a:t>
             </a:r>
             <a:endParaRPr lang="en-US" sz="1300" dirty="0"/>
           </a:p>
@@ -5011,20 +4882,20 @@
         </p:nvSpPr>
         <p:spPr>
           <a:xfrm>
-            <a:off x="502920" y="2212848"/>
-            <a:ext cx="3017520" cy="1874520"/>
-          </a:xfrm>
-          <a:prstGeom prst="rect">
-            <a:avLst/>
-          </a:prstGeom>
-          <a:solidFill>
-            <a:srgbClr val="7A5080"/>
+            <a:off x="502920" y="2121408"/>
+            <a:ext cx="1993392" cy="1078992"/>
+          </a:xfrm>
+          <a:prstGeom prst="rect">
+            <a:avLst/>
+          </a:prstGeom>
+          <a:solidFill>
+            <a:srgbClr val="FFFFFF"/>
           </a:solidFill>
           <a:ln/>
           <a:effectLst>
-            <a:outerShdw sx="100000" sy="100000" kx="0" ky="0" algn="bl" rotWithShape="0" blurRad="114300" dist="38100" dir="5400000">
+            <a:outerShdw sx="100000" sy="100000" kx="0" ky="0" algn="bl" rotWithShape="0" blurRad="50800" dist="25400" dir="8100000">
               <a:srgbClr val="000000">
-                <a:alpha val="10000"/>
+                <a:alpha val="9000"/>
               </a:srgbClr>
             </a:outerShdw>
           </a:effectLst>
@@ -5038,143 +4909,231 @@
         </p:nvSpPr>
         <p:spPr>
           <a:xfrm>
-            <a:off x="777240" y="2468880"/>
-            <a:ext cx="566928" cy="566928"/>
-          </a:xfrm>
-          <a:prstGeom prst="ellipse">
-            <a:avLst/>
-          </a:prstGeom>
-          <a:solidFill>
-            <a:srgbClr val="B8956A"/>
+            <a:off x="502920" y="2121408"/>
+            <a:ext cx="1993392" cy="91440"/>
+          </a:xfrm>
+          <a:prstGeom prst="rect">
+            <a:avLst/>
+          </a:prstGeom>
+          <a:solidFill>
+            <a:srgbClr val="7A5080"/>
+          </a:solidFill>
+          <a:ln/>
+        </p:spPr>
+      </p:sp>
+      <p:sp>
+        <p:nvSpPr>
+          <p:cNvPr id="8" name="Text 6"/>
+          <p:cNvSpPr/>
+          <p:nvPr/>
+        </p:nvSpPr>
+        <p:spPr>
+          <a:xfrm>
+            <a:off x="685800" y="2304288"/>
+            <a:ext cx="1673352" cy="411480"/>
+          </a:xfrm>
+          <a:prstGeom prst="rect">
+            <a:avLst/>
+          </a:prstGeom>
+          <a:noFill/>
+          <a:ln/>
+        </p:spPr>
+        <p:txBody>
+          <a:bodyPr wrap="square" lIns="0" tIns="0" rIns="0" bIns="0" rtlCol="0" anchor="t"/>
+          <a:lstStyle/>
+          <a:p>
+            <a:pPr algn="l" indent="0" marL="0">
+              <a:buNone/>
+            </a:pPr>
+            <a:r>
+              <a:rPr lang="en-US" sz="1350" b="1" dirty="0">
+                <a:solidFill>
+                  <a:srgbClr val="7A5080"/>
+                </a:solidFill>
+                <a:latin typeface="Georgia" pitchFamily="34" charset="0"/>
+                <a:ea typeface="Georgia" pitchFamily="34" charset="-122"/>
+                <a:cs typeface="Georgia" pitchFamily="34" charset="-120"/>
+              </a:rPr>
+              <a:t>AIGA Design Jobs</a:t>
+            </a:r>
+            <a:endParaRPr lang="en-US" sz="1350" dirty="0"/>
+          </a:p>
+        </p:txBody>
+      </p:sp>
+      <p:sp>
+        <p:nvSpPr>
+          <p:cNvPr id="9" name="Text 7"/>
+          <p:cNvSpPr/>
+          <p:nvPr/>
+        </p:nvSpPr>
+        <p:spPr>
+          <a:xfrm>
+            <a:off x="685800" y="2724912"/>
+            <a:ext cx="1673352" cy="411480"/>
+          </a:xfrm>
+          <a:prstGeom prst="rect">
+            <a:avLst/>
+          </a:prstGeom>
+          <a:noFill/>
+          <a:ln/>
+        </p:spPr>
+        <p:txBody>
+          <a:bodyPr wrap="square" lIns="0" tIns="0" rIns="0" bIns="0" rtlCol="0" anchor="t"/>
+          <a:lstStyle/>
+          <a:p>
+            <a:pPr algn="l" indent="0" marL="0">
+              <a:buNone/>
+            </a:pPr>
+            <a:r>
+              <a:rPr lang="en-US" sz="1000" dirty="0">
+                <a:solidFill>
+                  <a:srgbClr val="3A2E3F"/>
+                </a:solidFill>
+                <a:latin typeface="Calibri" pitchFamily="34" charset="0"/>
+                <a:ea typeface="Calibri" pitchFamily="34" charset="-122"/>
+                <a:cs typeface="Calibri" pitchFamily="34" charset="-120"/>
+              </a:rPr>
+              <a:t>The national design org’s board.</a:t>
+            </a:r>
+            <a:endParaRPr lang="en-US" sz="1000" dirty="0"/>
+          </a:p>
+        </p:txBody>
+      </p:sp>
+      <p:sp>
+        <p:nvSpPr>
+          <p:cNvPr id="10" name="Shape 8"/>
+          <p:cNvSpPr/>
+          <p:nvPr/>
+        </p:nvSpPr>
+        <p:spPr>
+          <a:xfrm>
+            <a:off x="2615184" y="2121408"/>
+            <a:ext cx="1993392" cy="1078992"/>
+          </a:xfrm>
+          <a:prstGeom prst="rect">
+            <a:avLst/>
+          </a:prstGeom>
+          <a:solidFill>
+            <a:srgbClr val="FFFFFF"/>
           </a:solidFill>
           <a:ln/>
           <a:effectLst>
-            <a:outerShdw sx="100000" sy="100000" kx="0" ky="0" algn="bl" rotWithShape="0" blurRad="88900" dist="38100" dir="5400000">
+            <a:outerShdw sx="100000" sy="100000" kx="0" ky="0" algn="bl" rotWithShape="0" blurRad="50800" dist="25400" dir="8100000">
               <a:srgbClr val="000000">
-                <a:alpha val="12000"/>
+                <a:alpha val="9000"/>
               </a:srgbClr>
             </a:outerShdw>
           </a:effectLst>
         </p:spPr>
       </p:sp>
-      <p:pic>
-        <p:nvPicPr>
-          <p:cNvPr id="8" name="Image 0" descr="preencoded.png">    </p:cNvPr>
-          <p:cNvPicPr>
-            <a:picLocks noChangeAspect="1"/>
-          </p:cNvPicPr>
-          <p:nvPr/>
-        </p:nvPicPr>
-        <p:blipFill>
-          <a:blip r:embed="rId1"/>
-          <a:stretch>
-            <a:fillRect/>
-          </a:stretch>
-        </p:blipFill>
-        <p:spPr>
-          <a:xfrm>
-            <a:off x="918972" y="2610612"/>
-            <a:ext cx="283464" cy="283464"/>
-          </a:xfrm>
-          <a:prstGeom prst="rect">
-            <a:avLst/>
-          </a:prstGeom>
-        </p:spPr>
-      </p:pic>
-      <p:sp>
-        <p:nvSpPr>
-          <p:cNvPr id="9" name="Text 6"/>
-          <p:cNvSpPr/>
-          <p:nvPr/>
-        </p:nvSpPr>
-        <p:spPr>
-          <a:xfrm>
-            <a:off x="777240" y="3127248"/>
-            <a:ext cx="2468880" cy="457200"/>
-          </a:xfrm>
-          <a:prstGeom prst="rect">
-            <a:avLst/>
-          </a:prstGeom>
-          <a:noFill/>
-          <a:ln/>
-        </p:spPr>
-        <p:txBody>
-          <a:bodyPr wrap="square" lIns="0" tIns="0" rIns="0" bIns="0" rtlCol="0" anchor="ctr"/>
-          <a:lstStyle/>
-          <a:p>
-            <a:pPr indent="0" marL="0">
-              <a:lnSpc>
-                <a:spcPct val="95000"/>
-              </a:lnSpc>
-              <a:buNone/>
-            </a:pPr>
-            <a:r>
-              <a:rPr lang="en-US" sz="1800" b="1" dirty="0">
-                <a:solidFill>
-                  <a:srgbClr val="FFFFFF"/>
+      <p:sp>
+        <p:nvSpPr>
+          <p:cNvPr id="11" name="Shape 9"/>
+          <p:cNvSpPr/>
+          <p:nvPr/>
+        </p:nvSpPr>
+        <p:spPr>
+          <a:xfrm>
+            <a:off x="2615184" y="2121408"/>
+            <a:ext cx="1993392" cy="91440"/>
+          </a:xfrm>
+          <a:prstGeom prst="rect">
+            <a:avLst/>
+          </a:prstGeom>
+          <a:solidFill>
+            <a:srgbClr val="C4929E"/>
+          </a:solidFill>
+          <a:ln/>
+        </p:spPr>
+      </p:sp>
+      <p:sp>
+        <p:nvSpPr>
+          <p:cNvPr id="12" name="Text 10"/>
+          <p:cNvSpPr/>
+          <p:nvPr/>
+        </p:nvSpPr>
+        <p:spPr>
+          <a:xfrm>
+            <a:off x="2798064" y="2304288"/>
+            <a:ext cx="1673352" cy="411480"/>
+          </a:xfrm>
+          <a:prstGeom prst="rect">
+            <a:avLst/>
+          </a:prstGeom>
+          <a:noFill/>
+          <a:ln/>
+        </p:spPr>
+        <p:txBody>
+          <a:bodyPr wrap="square" lIns="0" tIns="0" rIns="0" bIns="0" rtlCol="0" anchor="t"/>
+          <a:lstStyle/>
+          <a:p>
+            <a:pPr algn="l" indent="0" marL="0">
+              <a:buNone/>
+            </a:pPr>
+            <a:r>
+              <a:rPr lang="en-US" sz="1350" b="1" dirty="0">
+                <a:solidFill>
+                  <a:srgbClr val="7A5080"/>
                 </a:solidFill>
                 <a:latin typeface="Georgia" pitchFamily="34" charset="0"/>
                 <a:ea typeface="Georgia" pitchFamily="34" charset="-122"/>
                 <a:cs typeface="Georgia" pitchFamily="34" charset="-120"/>
               </a:rPr>
-              <a:t>Your reach job</a:t>
-            </a:r>
-            <a:endParaRPr lang="en-US" sz="1800" dirty="0"/>
-          </a:p>
-        </p:txBody>
-      </p:sp>
-      <p:sp>
-        <p:nvSpPr>
-          <p:cNvPr id="10" name="Text 7"/>
-          <p:cNvSpPr/>
-          <p:nvPr/>
-        </p:nvSpPr>
-        <p:spPr>
-          <a:xfrm>
-            <a:off x="777240" y="3602736"/>
-            <a:ext cx="2468880" cy="411480"/>
-          </a:xfrm>
-          <a:prstGeom prst="rect">
-            <a:avLst/>
-          </a:prstGeom>
-          <a:noFill/>
-          <a:ln/>
-        </p:spPr>
-        <p:txBody>
-          <a:bodyPr wrap="square" lIns="0" tIns="0" rIns="0" bIns="0" rtlCol="0" anchor="ctr"/>
-          <a:lstStyle/>
-          <a:p>
-            <a:pPr indent="0" marL="0">
-              <a:lnSpc>
-                <a:spcPct val="100000"/>
-              </a:lnSpc>
-              <a:buNone/>
-            </a:pPr>
-            <a:r>
-              <a:rPr lang="en-US" sz="1200" dirty="0">
-                <a:solidFill>
-                  <a:srgbClr val="FFFFFF"/>
+              <a:t>Behance</a:t>
+            </a:r>
+            <a:endParaRPr lang="en-US" sz="1350" dirty="0"/>
+          </a:p>
+        </p:txBody>
+      </p:sp>
+      <p:sp>
+        <p:nvSpPr>
+          <p:cNvPr id="13" name="Text 11"/>
+          <p:cNvSpPr/>
+          <p:nvPr/>
+        </p:nvSpPr>
+        <p:spPr>
+          <a:xfrm>
+            <a:off x="2798064" y="2724912"/>
+            <a:ext cx="1673352" cy="411480"/>
+          </a:xfrm>
+          <a:prstGeom prst="rect">
+            <a:avLst/>
+          </a:prstGeom>
+          <a:noFill/>
+          <a:ln/>
+        </p:spPr>
+        <p:txBody>
+          <a:bodyPr wrap="square" lIns="0" tIns="0" rIns="0" bIns="0" rtlCol="0" anchor="t"/>
+          <a:lstStyle/>
+          <a:p>
+            <a:pPr algn="l" indent="0" marL="0">
+              <a:buNone/>
+            </a:pPr>
+            <a:r>
+              <a:rPr lang="en-US" sz="1000" dirty="0">
+                <a:solidFill>
+                  <a:srgbClr val="3A2E3F"/>
                 </a:solidFill>
                 <a:latin typeface="Calibri" pitchFamily="34" charset="0"/>
                 <a:ea typeface="Calibri" pitchFamily="34" charset="-122"/>
                 <a:cs typeface="Calibri" pitchFamily="34" charset="-120"/>
               </a:rPr>
-              <a:t>sits at the center of it all.</a:t>
-            </a:r>
-            <a:endParaRPr lang="en-US" sz="1200" dirty="0"/>
-          </a:p>
-        </p:txBody>
-      </p:sp>
-      <p:sp>
-        <p:nvSpPr>
-          <p:cNvPr id="11" name="Shape 8"/>
-          <p:cNvSpPr/>
-          <p:nvPr/>
-        </p:nvSpPr>
-        <p:spPr>
-          <a:xfrm>
-            <a:off x="3749040" y="2212848"/>
-            <a:ext cx="4892040" cy="1874520"/>
+              <a:t>Adobe’s creative network and jobs.</a:t>
+            </a:r>
+            <a:endParaRPr lang="en-US" sz="1000" dirty="0"/>
+          </a:p>
+        </p:txBody>
+      </p:sp>
+      <p:sp>
+        <p:nvSpPr>
+          <p:cNvPr id="14" name="Shape 12"/>
+          <p:cNvSpPr/>
+          <p:nvPr/>
+        </p:nvSpPr>
+        <p:spPr>
+          <a:xfrm>
+            <a:off x="4727448" y="2121408"/>
+            <a:ext cx="1993392" cy="1078992"/>
           </a:xfrm>
           <a:prstGeom prst="rect">
             <a:avLst/>
@@ -5184,9 +5143,9 @@
           </a:solidFill>
           <a:ln/>
           <a:effectLst>
-            <a:outerShdw sx="100000" sy="100000" kx="0" ky="0" algn="bl" rotWithShape="0" blurRad="114300" dist="38100" dir="5400000">
+            <a:outerShdw sx="100000" sy="100000" kx="0" ky="0" algn="bl" rotWithShape="0" blurRad="50800" dist="25400" dir="8100000">
               <a:srgbClr val="000000">
-                <a:alpha val="10000"/>
+                <a:alpha val="9000"/>
               </a:srgbClr>
             </a:outerShdw>
           </a:effectLst>
@@ -5194,84 +5153,175 @@
       </p:sp>
       <p:sp>
         <p:nvSpPr>
-          <p:cNvPr id="12" name="Shape 9"/>
-          <p:cNvSpPr/>
-          <p:nvPr/>
-        </p:nvSpPr>
-        <p:spPr>
-          <a:xfrm>
-            <a:off x="3977640" y="2395728"/>
-            <a:ext cx="475488" cy="475488"/>
-          </a:xfrm>
-          <a:prstGeom prst="ellipse">
-            <a:avLst/>
-          </a:prstGeom>
-          <a:solidFill>
-            <a:srgbClr val="7A5080"/>
+          <p:cNvPr id="15" name="Shape 13"/>
+          <p:cNvSpPr/>
+          <p:nvPr/>
+        </p:nvSpPr>
+        <p:spPr>
+          <a:xfrm>
+            <a:off x="4727448" y="2121408"/>
+            <a:ext cx="1993392" cy="91440"/>
+          </a:xfrm>
+          <a:prstGeom prst="rect">
+            <a:avLst/>
+          </a:prstGeom>
+          <a:solidFill>
+            <a:srgbClr val="6B8F6E"/>
+          </a:solidFill>
+          <a:ln/>
+        </p:spPr>
+      </p:sp>
+      <p:sp>
+        <p:nvSpPr>
+          <p:cNvPr id="16" name="Text 14"/>
+          <p:cNvSpPr/>
+          <p:nvPr/>
+        </p:nvSpPr>
+        <p:spPr>
+          <a:xfrm>
+            <a:off x="4910328" y="2304288"/>
+            <a:ext cx="1673352" cy="411480"/>
+          </a:xfrm>
+          <a:prstGeom prst="rect">
+            <a:avLst/>
+          </a:prstGeom>
+          <a:noFill/>
+          <a:ln/>
+        </p:spPr>
+        <p:txBody>
+          <a:bodyPr wrap="square" lIns="0" tIns="0" rIns="0" bIns="0" rtlCol="0" anchor="t"/>
+          <a:lstStyle/>
+          <a:p>
+            <a:pPr algn="l" indent="0" marL="0">
+              <a:buNone/>
+            </a:pPr>
+            <a:r>
+              <a:rPr lang="en-US" sz="1350" b="1" dirty="0">
+                <a:solidFill>
+                  <a:srgbClr val="7A5080"/>
+                </a:solidFill>
+                <a:latin typeface="Georgia" pitchFamily="34" charset="0"/>
+                <a:ea typeface="Georgia" pitchFamily="34" charset="-122"/>
+                <a:cs typeface="Georgia" pitchFamily="34" charset="-120"/>
+              </a:rPr>
+              <a:t>Dribbble</a:t>
+            </a:r>
+            <a:endParaRPr lang="en-US" sz="1350" dirty="0"/>
+          </a:p>
+        </p:txBody>
+      </p:sp>
+      <p:sp>
+        <p:nvSpPr>
+          <p:cNvPr id="17" name="Text 15"/>
+          <p:cNvSpPr/>
+          <p:nvPr/>
+        </p:nvSpPr>
+        <p:spPr>
+          <a:xfrm>
+            <a:off x="4910328" y="2724912"/>
+            <a:ext cx="1673352" cy="411480"/>
+          </a:xfrm>
+          <a:prstGeom prst="rect">
+            <a:avLst/>
+          </a:prstGeom>
+          <a:noFill/>
+          <a:ln/>
+        </p:spPr>
+        <p:txBody>
+          <a:bodyPr wrap="square" lIns="0" tIns="0" rIns="0" bIns="0" rtlCol="0" anchor="t"/>
+          <a:lstStyle/>
+          <a:p>
+            <a:pPr algn="l" indent="0" marL="0">
+              <a:buNone/>
+            </a:pPr>
+            <a:r>
+              <a:rPr lang="en-US" sz="1000" dirty="0">
+                <a:solidFill>
+                  <a:srgbClr val="3A2E3F"/>
+                </a:solidFill>
+                <a:latin typeface="Calibri" pitchFamily="34" charset="0"/>
+                <a:ea typeface="Calibri" pitchFamily="34" charset="-122"/>
+                <a:cs typeface="Calibri" pitchFamily="34" charset="-120"/>
+              </a:rPr>
+              <a:t>Design community with a job board.</a:t>
+            </a:r>
+            <a:endParaRPr lang="en-US" sz="1000" dirty="0"/>
+          </a:p>
+        </p:txBody>
+      </p:sp>
+      <p:sp>
+        <p:nvSpPr>
+          <p:cNvPr id="18" name="Shape 16"/>
+          <p:cNvSpPr/>
+          <p:nvPr/>
+        </p:nvSpPr>
+        <p:spPr>
+          <a:xfrm>
+            <a:off x="6839712" y="2121408"/>
+            <a:ext cx="1993392" cy="1078992"/>
+          </a:xfrm>
+          <a:prstGeom prst="rect">
+            <a:avLst/>
+          </a:prstGeom>
+          <a:solidFill>
+            <a:srgbClr val="FFFFFF"/>
           </a:solidFill>
           <a:ln/>
           <a:effectLst>
-            <a:outerShdw sx="100000" sy="100000" kx="0" ky="0" algn="bl" rotWithShape="0" blurRad="88900" dist="38100" dir="5400000">
+            <a:outerShdw sx="100000" sy="100000" kx="0" ky="0" algn="bl" rotWithShape="0" blurRad="50800" dist="25400" dir="8100000">
               <a:srgbClr val="000000">
-                <a:alpha val="12000"/>
+                <a:alpha val="9000"/>
               </a:srgbClr>
             </a:outerShdw>
           </a:effectLst>
         </p:spPr>
       </p:sp>
-      <p:pic>
-        <p:nvPicPr>
-          <p:cNvPr id="13" name="Image 1" descr="preencoded.png">    </p:cNvPr>
-          <p:cNvPicPr>
-            <a:picLocks noChangeAspect="1"/>
-          </p:cNvPicPr>
-          <p:nvPr/>
-        </p:nvPicPr>
-        <p:blipFill>
-          <a:blip r:embed="rId2"/>
-          <a:stretch>
-            <a:fillRect/>
-          </a:stretch>
-        </p:blipFill>
-        <p:spPr>
-          <a:xfrm>
-            <a:off x="4096512" y="2514600"/>
-            <a:ext cx="237744" cy="237744"/>
-          </a:xfrm>
-          <a:prstGeom prst="rect">
-            <a:avLst/>
-          </a:prstGeom>
-        </p:spPr>
-      </p:pic>
-      <p:sp>
-        <p:nvSpPr>
-          <p:cNvPr id="14" name="Text 10"/>
-          <p:cNvSpPr/>
-          <p:nvPr/>
-        </p:nvSpPr>
-        <p:spPr>
-          <a:xfrm>
-            <a:off x="4617720" y="2395728"/>
-            <a:ext cx="3931920" cy="475488"/>
-          </a:xfrm>
-          <a:prstGeom prst="rect">
-            <a:avLst/>
-          </a:prstGeom>
-          <a:noFill/>
-          <a:ln/>
-        </p:spPr>
-        <p:txBody>
-          <a:bodyPr wrap="square" lIns="0" tIns="0" rIns="0" bIns="0" rtlCol="0" anchor="ctr"/>
-          <a:lstStyle/>
-          <a:p>
-            <a:pPr indent="0" marL="0">
-              <a:lnSpc>
-                <a:spcPct val="100000"/>
-              </a:lnSpc>
-              <a:buNone/>
-            </a:pPr>
-            <a:r>
-              <a:rPr lang="en-US" sz="1300" b="1" dirty="0">
+      <p:sp>
+        <p:nvSpPr>
+          <p:cNvPr id="19" name="Shape 17"/>
+          <p:cNvSpPr/>
+          <p:nvPr/>
+        </p:nvSpPr>
+        <p:spPr>
+          <a:xfrm>
+            <a:off x="6839712" y="2121408"/>
+            <a:ext cx="1993392" cy="91440"/>
+          </a:xfrm>
+          <a:prstGeom prst="rect">
+            <a:avLst/>
+          </a:prstGeom>
+          <a:solidFill>
+            <a:srgbClr val="B8956A"/>
+          </a:solidFill>
+          <a:ln/>
+        </p:spPr>
+      </p:sp>
+      <p:sp>
+        <p:nvSpPr>
+          <p:cNvPr id="20" name="Text 18"/>
+          <p:cNvSpPr/>
+          <p:nvPr/>
+        </p:nvSpPr>
+        <p:spPr>
+          <a:xfrm>
+            <a:off x="7022592" y="2304288"/>
+            <a:ext cx="1673352" cy="411480"/>
+          </a:xfrm>
+          <a:prstGeom prst="rect">
+            <a:avLst/>
+          </a:prstGeom>
+          <a:noFill/>
+          <a:ln/>
+        </p:spPr>
+        <p:txBody>
+          <a:bodyPr wrap="square" lIns="0" tIns="0" rIns="0" bIns="0" rtlCol="0" anchor="t"/>
+          <a:lstStyle/>
+          <a:p>
+            <a:pPr algn="l" indent="0" marL="0">
+              <a:buNone/>
+            </a:pPr>
+            <a:r>
+              <a:rPr lang="en-US" sz="1350" b="1" dirty="0">
                 <a:solidFill>
                   <a:srgbClr val="7A5080"/>
                 </a:solidFill>
@@ -5279,16 +5329,38 @@
                 <a:ea typeface="Georgia" pitchFamily="34" charset="-122"/>
                 <a:cs typeface="Georgia" pitchFamily="34" charset="-120"/>
               </a:rPr>
-              <a:t>Resume  </a:t>
-            </a:r>
-            <a:pPr indent="0" marL="0">
-              <a:lnSpc>
-                <a:spcPct val="100000"/>
-              </a:lnSpc>
-              <a:buNone/>
-            </a:pPr>
-            <a:r>
-              <a:rPr lang="en-US" sz="1150" dirty="0">
+              <a:t>ArtStation</a:t>
+            </a:r>
+            <a:endParaRPr lang="en-US" sz="1350" dirty="0"/>
+          </a:p>
+        </p:txBody>
+      </p:sp>
+      <p:sp>
+        <p:nvSpPr>
+          <p:cNvPr id="21" name="Text 19"/>
+          <p:cNvSpPr/>
+          <p:nvPr/>
+        </p:nvSpPr>
+        <p:spPr>
+          <a:xfrm>
+            <a:off x="7022592" y="2724912"/>
+            <a:ext cx="1673352" cy="411480"/>
+          </a:xfrm>
+          <a:prstGeom prst="rect">
+            <a:avLst/>
+          </a:prstGeom>
+          <a:noFill/>
+          <a:ln/>
+        </p:spPr>
+        <p:txBody>
+          <a:bodyPr wrap="square" lIns="0" tIns="0" rIns="0" bIns="0" rtlCol="0" anchor="t"/>
+          <a:lstStyle/>
+          <a:p>
+            <a:pPr algn="l" indent="0" marL="0">
+              <a:buNone/>
+            </a:pPr>
+            <a:r>
+              <a:rPr lang="en-US" sz="1000" dirty="0">
                 <a:solidFill>
                   <a:srgbClr val="3A2E3F"/>
                 </a:solidFill>
@@ -5296,92 +5368,85 @@
                 <a:ea typeface="Calibri" pitchFamily="34" charset="-122"/>
                 <a:cs typeface="Calibri" pitchFamily="34" charset="-120"/>
               </a:rPr>
-              <a:t>tailored to its exact requirements.</a:t>
-            </a:r>
-            <a:endParaRPr lang="en-US" sz="1300" dirty="0"/>
-          </a:p>
-        </p:txBody>
-      </p:sp>
-      <p:sp>
-        <p:nvSpPr>
-          <p:cNvPr id="15" name="Shape 11"/>
-          <p:cNvSpPr/>
-          <p:nvPr/>
-        </p:nvSpPr>
-        <p:spPr>
-          <a:xfrm>
-            <a:off x="3977640" y="2948940"/>
-            <a:ext cx="475488" cy="475488"/>
-          </a:xfrm>
-          <a:prstGeom prst="ellipse">
-            <a:avLst/>
-          </a:prstGeom>
-          <a:solidFill>
-            <a:srgbClr val="6B8F6E"/>
+              <a:t>Strong for games and visual dev.</a:t>
+            </a:r>
+            <a:endParaRPr lang="en-US" sz="1000" dirty="0"/>
+          </a:p>
+        </p:txBody>
+      </p:sp>
+      <p:sp>
+        <p:nvSpPr>
+          <p:cNvPr id="22" name="Shape 20"/>
+          <p:cNvSpPr/>
+          <p:nvPr/>
+        </p:nvSpPr>
+        <p:spPr>
+          <a:xfrm>
+            <a:off x="502920" y="3346704"/>
+            <a:ext cx="1993392" cy="1078992"/>
+          </a:xfrm>
+          <a:prstGeom prst="rect">
+            <a:avLst/>
+          </a:prstGeom>
+          <a:solidFill>
+            <a:srgbClr val="FFFFFF"/>
           </a:solidFill>
           <a:ln/>
           <a:effectLst>
-            <a:outerShdw sx="100000" sy="100000" kx="0" ky="0" algn="bl" rotWithShape="0" blurRad="88900" dist="38100" dir="5400000">
+            <a:outerShdw sx="100000" sy="100000" kx="0" ky="0" algn="bl" rotWithShape="0" blurRad="50800" dist="25400" dir="8100000">
               <a:srgbClr val="000000">
-                <a:alpha val="12000"/>
+                <a:alpha val="9000"/>
               </a:srgbClr>
             </a:outerShdw>
           </a:effectLst>
         </p:spPr>
       </p:sp>
-      <p:pic>
-        <p:nvPicPr>
-          <p:cNvPr id="16" name="Image 2" descr="preencoded.png">    </p:cNvPr>
-          <p:cNvPicPr>
-            <a:picLocks noChangeAspect="1"/>
-          </p:cNvPicPr>
-          <p:nvPr/>
-        </p:nvPicPr>
-        <p:blipFill>
-          <a:blip r:embed="rId3"/>
-          <a:stretch>
-            <a:fillRect/>
-          </a:stretch>
-        </p:blipFill>
-        <p:spPr>
-          <a:xfrm>
-            <a:off x="4096512" y="3067812"/>
-            <a:ext cx="237744" cy="237744"/>
-          </a:xfrm>
-          <a:prstGeom prst="rect">
-            <a:avLst/>
-          </a:prstGeom>
-        </p:spPr>
-      </p:pic>
-      <p:sp>
-        <p:nvSpPr>
-          <p:cNvPr id="17" name="Text 12"/>
-          <p:cNvSpPr/>
-          <p:nvPr/>
-        </p:nvSpPr>
-        <p:spPr>
-          <a:xfrm>
-            <a:off x="4617720" y="2948940"/>
-            <a:ext cx="3931920" cy="475488"/>
-          </a:xfrm>
-          <a:prstGeom prst="rect">
-            <a:avLst/>
-          </a:prstGeom>
-          <a:noFill/>
-          <a:ln/>
-        </p:spPr>
-        <p:txBody>
-          <a:bodyPr wrap="square" lIns="0" tIns="0" rIns="0" bIns="0" rtlCol="0" anchor="ctr"/>
-          <a:lstStyle/>
-          <a:p>
-            <a:pPr indent="0" marL="0">
-              <a:lnSpc>
-                <a:spcPct val="100000"/>
-              </a:lnSpc>
-              <a:buNone/>
-            </a:pPr>
-            <a:r>
-              <a:rPr lang="en-US" sz="1300" b="1" dirty="0">
+      <p:sp>
+        <p:nvSpPr>
+          <p:cNvPr id="23" name="Shape 21"/>
+          <p:cNvSpPr/>
+          <p:nvPr/>
+        </p:nvSpPr>
+        <p:spPr>
+          <a:xfrm>
+            <a:off x="502920" y="3346704"/>
+            <a:ext cx="1993392" cy="91440"/>
+          </a:xfrm>
+          <a:prstGeom prst="rect">
+            <a:avLst/>
+          </a:prstGeom>
+          <a:solidFill>
+            <a:srgbClr val="C4929E"/>
+          </a:solidFill>
+          <a:ln/>
+        </p:spPr>
+      </p:sp>
+      <p:sp>
+        <p:nvSpPr>
+          <p:cNvPr id="24" name="Text 22"/>
+          <p:cNvSpPr/>
+          <p:nvPr/>
+        </p:nvSpPr>
+        <p:spPr>
+          <a:xfrm>
+            <a:off x="685800" y="3529584"/>
+            <a:ext cx="1673352" cy="411480"/>
+          </a:xfrm>
+          <a:prstGeom prst="rect">
+            <a:avLst/>
+          </a:prstGeom>
+          <a:noFill/>
+          <a:ln/>
+        </p:spPr>
+        <p:txBody>
+          <a:bodyPr wrap="square" lIns="0" tIns="0" rIns="0" bIns="0" rtlCol="0" anchor="t"/>
+          <a:lstStyle/>
+          <a:p>
+            <a:pPr algn="l" indent="0" marL="0">
+              <a:buNone/>
+            </a:pPr>
+            <a:r>
+              <a:rPr lang="en-US" sz="1350" b="1" dirty="0">
                 <a:solidFill>
                   <a:srgbClr val="7A5080"/>
                 </a:solidFill>
@@ -5389,16 +5454,38 @@
                 <a:ea typeface="Georgia" pitchFamily="34" charset="-122"/>
                 <a:cs typeface="Georgia" pitchFamily="34" charset="-120"/>
               </a:rPr>
-              <a:t>Interview prep  </a:t>
-            </a:r>
-            <a:pPr indent="0" marL="0">
-              <a:lnSpc>
-                <a:spcPct val="100000"/>
-              </a:lnSpc>
-              <a:buNone/>
-            </a:pPr>
-            <a:r>
-              <a:rPr lang="en-US" sz="1150" dirty="0">
+              <a:t>CreativeHeads</a:t>
+            </a:r>
+            <a:endParaRPr lang="en-US" sz="1350" dirty="0"/>
+          </a:p>
+        </p:txBody>
+      </p:sp>
+      <p:sp>
+        <p:nvSpPr>
+          <p:cNvPr id="25" name="Text 23"/>
+          <p:cNvSpPr/>
+          <p:nvPr/>
+        </p:nvSpPr>
+        <p:spPr>
+          <a:xfrm>
+            <a:off x="685800" y="3950208"/>
+            <a:ext cx="1673352" cy="411480"/>
+          </a:xfrm>
+          <a:prstGeom prst="rect">
+            <a:avLst/>
+          </a:prstGeom>
+          <a:noFill/>
+          <a:ln/>
+        </p:spPr>
+        <p:txBody>
+          <a:bodyPr wrap="square" lIns="0" tIns="0" rIns="0" bIns="0" rtlCol="0" anchor="t"/>
+          <a:lstStyle/>
+          <a:p>
+            <a:pPr algn="l" indent="0" marL="0">
+              <a:buNone/>
+            </a:pPr>
+            <a:r>
+              <a:rPr lang="en-US" sz="1000" dirty="0">
                 <a:solidFill>
                   <a:srgbClr val="3A2E3F"/>
                 </a:solidFill>
@@ -5406,92 +5493,85 @@
                 <a:ea typeface="Calibri" pitchFamily="34" charset="-122"/>
                 <a:cs typeface="Calibri" pitchFamily="34" charset="-120"/>
               </a:rPr>
-              <a:t>built around its team and role.</a:t>
-            </a:r>
-            <a:endParaRPr lang="en-US" sz="1300" dirty="0"/>
-          </a:p>
-        </p:txBody>
-      </p:sp>
-      <p:sp>
-        <p:nvSpPr>
-          <p:cNvPr id="18" name="Shape 13"/>
-          <p:cNvSpPr/>
-          <p:nvPr/>
-        </p:nvSpPr>
-        <p:spPr>
-          <a:xfrm>
-            <a:off x="3977640" y="3502152"/>
-            <a:ext cx="475488" cy="475488"/>
-          </a:xfrm>
-          <a:prstGeom prst="ellipse">
-            <a:avLst/>
-          </a:prstGeom>
-          <a:solidFill>
-            <a:srgbClr val="C4929E"/>
+              <a:t>Games, film, and animation roles.</a:t>
+            </a:r>
+            <a:endParaRPr lang="en-US" sz="1000" dirty="0"/>
+          </a:p>
+        </p:txBody>
+      </p:sp>
+      <p:sp>
+        <p:nvSpPr>
+          <p:cNvPr id="26" name="Shape 24"/>
+          <p:cNvSpPr/>
+          <p:nvPr/>
+        </p:nvSpPr>
+        <p:spPr>
+          <a:xfrm>
+            <a:off x="2615184" y="3346704"/>
+            <a:ext cx="1993392" cy="1078992"/>
+          </a:xfrm>
+          <a:prstGeom prst="rect">
+            <a:avLst/>
+          </a:prstGeom>
+          <a:solidFill>
+            <a:srgbClr val="FFFFFF"/>
           </a:solidFill>
           <a:ln/>
           <a:effectLst>
-            <a:outerShdw sx="100000" sy="100000" kx="0" ky="0" algn="bl" rotWithShape="0" blurRad="88900" dist="38100" dir="5400000">
+            <a:outerShdw sx="100000" sy="100000" kx="0" ky="0" algn="bl" rotWithShape="0" blurRad="50800" dist="25400" dir="8100000">
               <a:srgbClr val="000000">
-                <a:alpha val="12000"/>
+                <a:alpha val="9000"/>
               </a:srgbClr>
             </a:outerShdw>
           </a:effectLst>
         </p:spPr>
       </p:sp>
-      <p:pic>
-        <p:nvPicPr>
-          <p:cNvPr id="19" name="Image 3" descr="preencoded.png">    </p:cNvPr>
-          <p:cNvPicPr>
-            <a:picLocks noChangeAspect="1"/>
-          </p:cNvPicPr>
-          <p:nvPr/>
-        </p:nvPicPr>
-        <p:blipFill>
-          <a:blip r:embed="rId4"/>
-          <a:stretch>
-            <a:fillRect/>
-          </a:stretch>
-        </p:blipFill>
-        <p:spPr>
-          <a:xfrm>
-            <a:off x="4096512" y="3621024"/>
-            <a:ext cx="237744" cy="237744"/>
-          </a:xfrm>
-          <a:prstGeom prst="rect">
-            <a:avLst/>
-          </a:prstGeom>
-        </p:spPr>
-      </p:pic>
-      <p:sp>
-        <p:nvSpPr>
-          <p:cNvPr id="20" name="Text 14"/>
-          <p:cNvSpPr/>
-          <p:nvPr/>
-        </p:nvSpPr>
-        <p:spPr>
-          <a:xfrm>
-            <a:off x="4617720" y="3502152"/>
-            <a:ext cx="3931920" cy="475488"/>
-          </a:xfrm>
-          <a:prstGeom prst="rect">
-            <a:avLst/>
-          </a:prstGeom>
-          <a:noFill/>
-          <a:ln/>
-        </p:spPr>
-        <p:txBody>
-          <a:bodyPr wrap="square" lIns="0" tIns="0" rIns="0" bIns="0" rtlCol="0" anchor="ctr"/>
-          <a:lstStyle/>
-          <a:p>
-            <a:pPr indent="0" marL="0">
-              <a:lnSpc>
-                <a:spcPct val="100000"/>
-              </a:lnSpc>
-              <a:buNone/>
-            </a:pPr>
-            <a:r>
-              <a:rPr lang="en-US" sz="1300" b="1" dirty="0">
+      <p:sp>
+        <p:nvSpPr>
+          <p:cNvPr id="27" name="Shape 25"/>
+          <p:cNvSpPr/>
+          <p:nvPr/>
+        </p:nvSpPr>
+        <p:spPr>
+          <a:xfrm>
+            <a:off x="2615184" y="3346704"/>
+            <a:ext cx="1993392" cy="91440"/>
+          </a:xfrm>
+          <a:prstGeom prst="rect">
+            <a:avLst/>
+          </a:prstGeom>
+          <a:solidFill>
+            <a:srgbClr val="7A5080"/>
+          </a:solidFill>
+          <a:ln/>
+        </p:spPr>
+      </p:sp>
+      <p:sp>
+        <p:nvSpPr>
+          <p:cNvPr id="28" name="Text 26"/>
+          <p:cNvSpPr/>
+          <p:nvPr/>
+        </p:nvSpPr>
+        <p:spPr>
+          <a:xfrm>
+            <a:off x="2798064" y="3529584"/>
+            <a:ext cx="1673352" cy="411480"/>
+          </a:xfrm>
+          <a:prstGeom prst="rect">
+            <a:avLst/>
+          </a:prstGeom>
+          <a:noFill/>
+          <a:ln/>
+        </p:spPr>
+        <p:txBody>
+          <a:bodyPr wrap="square" lIns="0" tIns="0" rIns="0" bIns="0" rtlCol="0" anchor="t"/>
+          <a:lstStyle/>
+          <a:p>
+            <a:pPr algn="l" indent="0" marL="0">
+              <a:buNone/>
+            </a:pPr>
+            <a:r>
+              <a:rPr lang="en-US" sz="1350" b="1" dirty="0">
                 <a:solidFill>
                   <a:srgbClr val="7A5080"/>
                 </a:solidFill>
@@ -5499,16 +5579,38 @@
                 <a:ea typeface="Georgia" pitchFamily="34" charset="-122"/>
                 <a:cs typeface="Georgia" pitchFamily="34" charset="-120"/>
               </a:rPr>
-              <a:t>Skill-building  </a:t>
-            </a:r>
-            <a:pPr indent="0" marL="0">
-              <a:lnSpc>
-                <a:spcPct val="100000"/>
-              </a:lnSpc>
-              <a:buNone/>
-            </a:pPr>
-            <a:r>
-              <a:rPr lang="en-US" sz="1150" dirty="0">
+              <a:t>Authentic Jobs</a:t>
+            </a:r>
+            <a:endParaRPr lang="en-US" sz="1350" dirty="0"/>
+          </a:p>
+        </p:txBody>
+      </p:sp>
+      <p:sp>
+        <p:nvSpPr>
+          <p:cNvPr id="29" name="Text 27"/>
+          <p:cNvSpPr/>
+          <p:nvPr/>
+        </p:nvSpPr>
+        <p:spPr>
+          <a:xfrm>
+            <a:off x="2798064" y="3950208"/>
+            <a:ext cx="1673352" cy="411480"/>
+          </a:xfrm>
+          <a:prstGeom prst="rect">
+            <a:avLst/>
+          </a:prstGeom>
+          <a:noFill/>
+          <a:ln/>
+        </p:spPr>
+        <p:txBody>
+          <a:bodyPr wrap="square" lIns="0" tIns="0" rIns="0" bIns="0" rtlCol="0" anchor="t"/>
+          <a:lstStyle/>
+          <a:p>
+            <a:pPr algn="l" indent="0" marL="0">
+              <a:buNone/>
+            </a:pPr>
+            <a:r>
+              <a:rPr lang="en-US" sz="1000" dirty="0">
                 <a:solidFill>
                   <a:srgbClr val="3A2E3F"/>
                 </a:solidFill>
@@ -5516,34 +5618,34 @@
                 <a:ea typeface="Calibri" pitchFamily="34" charset="-122"/>
                 <a:cs typeface="Calibri" pitchFamily="34" charset="-120"/>
               </a:rPr>
-              <a:t>aimed at the gaps it reveals.</a:t>
-            </a:r>
-            <a:endParaRPr lang="en-US" sz="1300" dirty="0"/>
-          </a:p>
-        </p:txBody>
-      </p:sp>
-      <p:sp>
-        <p:nvSpPr>
-          <p:cNvPr id="21" name="Shape 15"/>
-          <p:cNvSpPr/>
-          <p:nvPr/>
-        </p:nvSpPr>
-        <p:spPr>
-          <a:xfrm>
-            <a:off x="457200" y="4370832"/>
-            <a:ext cx="8229600" cy="566928"/>
-          </a:xfrm>
-          <a:prstGeom prst="rect">
-            <a:avLst/>
-          </a:prstGeom>
-          <a:solidFill>
-            <a:srgbClr val="5C3A63"/>
+              <a:t>Long-running design and dev board.</a:t>
+            </a:r>
+            <a:endParaRPr lang="en-US" sz="1000" dirty="0"/>
+          </a:p>
+        </p:txBody>
+      </p:sp>
+      <p:sp>
+        <p:nvSpPr>
+          <p:cNvPr id="30" name="Shape 28"/>
+          <p:cNvSpPr/>
+          <p:nvPr/>
+        </p:nvSpPr>
+        <p:spPr>
+          <a:xfrm>
+            <a:off x="4727448" y="3346704"/>
+            <a:ext cx="1993392" cy="1078992"/>
+          </a:xfrm>
+          <a:prstGeom prst="rect">
+            <a:avLst/>
+          </a:prstGeom>
+          <a:solidFill>
+            <a:srgbClr val="FFFFFF"/>
           </a:solidFill>
           <a:ln/>
           <a:effectLst>
-            <a:outerShdw sx="100000" sy="100000" kx="0" ky="0" algn="bl" rotWithShape="0" blurRad="114300" dist="38100" dir="5400000">
+            <a:outerShdw sx="100000" sy="100000" kx="0" ky="0" algn="bl" rotWithShape="0" blurRad="50800" dist="25400" dir="8100000">
               <a:srgbClr val="000000">
-                <a:alpha val="10000"/>
+                <a:alpha val="9000"/>
               </a:srgbClr>
             </a:outerShdw>
           </a:effectLst>
@@ -5551,52 +5653,281 @@
       </p:sp>
       <p:sp>
         <p:nvSpPr>
-          <p:cNvPr id="22" name="Text 16"/>
-          <p:cNvSpPr/>
-          <p:nvPr/>
-        </p:nvSpPr>
-        <p:spPr>
-          <a:xfrm>
-            <a:off x="457200" y="4370832"/>
-            <a:ext cx="8229600" cy="566928"/>
-          </a:xfrm>
-          <a:prstGeom prst="rect">
-            <a:avLst/>
-          </a:prstGeom>
-          <a:noFill/>
-          <a:ln/>
-        </p:spPr>
-        <p:txBody>
-          <a:bodyPr wrap="square" lIns="0" tIns="0" rIns="0" bIns="0" rtlCol="0" anchor="ctr"/>
-          <a:lstStyle/>
-          <a:p>
-            <a:pPr algn="ctr" indent="0" marL="0">
-              <a:buNone/>
-            </a:pPr>
-            <a:r>
-              <a:rPr lang="en-US" sz="1500" b="1" dirty="0">
-                <a:solidFill>
-                  <a:srgbClr val="B8956A"/>
+          <p:cNvPr id="31" name="Shape 29"/>
+          <p:cNvSpPr/>
+          <p:nvPr/>
+        </p:nvSpPr>
+        <p:spPr>
+          <a:xfrm>
+            <a:off x="4727448" y="3346704"/>
+            <a:ext cx="1993392" cy="91440"/>
+          </a:xfrm>
+          <a:prstGeom prst="rect">
+            <a:avLst/>
+          </a:prstGeom>
+          <a:solidFill>
+            <a:srgbClr val="6B8F6E"/>
+          </a:solidFill>
+          <a:ln/>
+        </p:spPr>
+      </p:sp>
+      <p:sp>
+        <p:nvSpPr>
+          <p:cNvPr id="32" name="Text 30"/>
+          <p:cNvSpPr/>
+          <p:nvPr/>
+        </p:nvSpPr>
+        <p:spPr>
+          <a:xfrm>
+            <a:off x="4910328" y="3529584"/>
+            <a:ext cx="1673352" cy="411480"/>
+          </a:xfrm>
+          <a:prstGeom prst="rect">
+            <a:avLst/>
+          </a:prstGeom>
+          <a:noFill/>
+          <a:ln/>
+        </p:spPr>
+        <p:txBody>
+          <a:bodyPr wrap="square" lIns="0" tIns="0" rIns="0" bIns="0" rtlCol="0" anchor="t"/>
+          <a:lstStyle/>
+          <a:p>
+            <a:pPr algn="l" indent="0" marL="0">
+              <a:buNone/>
+            </a:pPr>
+            <a:r>
+              <a:rPr lang="en-US" sz="1350" b="1" dirty="0">
+                <a:solidFill>
+                  <a:srgbClr val="7A5080"/>
                 </a:solidFill>
                 <a:latin typeface="Georgia" pitchFamily="34" charset="0"/>
                 <a:ea typeface="Georgia" pitchFamily="34" charset="-122"/>
                 <a:cs typeface="Georgia" pitchFamily="34" charset="-120"/>
               </a:rPr>
-              <a:t>One job, total alignment.  </a:t>
-            </a:r>
-            <a:pPr algn="ctr" indent="0" marL="0">
-              <a:buNone/>
-            </a:pPr>
-            <a:r>
-              <a:rPr lang="en-US" sz="1500" dirty="0">
-                <a:solidFill>
-                  <a:srgbClr val="FFFFFF"/>
+              <a:t>Working Not Working</a:t>
+            </a:r>
+            <a:endParaRPr lang="en-US" sz="1350" dirty="0"/>
+          </a:p>
+        </p:txBody>
+      </p:sp>
+      <p:sp>
+        <p:nvSpPr>
+          <p:cNvPr id="33" name="Text 31"/>
+          <p:cNvSpPr/>
+          <p:nvPr/>
+        </p:nvSpPr>
+        <p:spPr>
+          <a:xfrm>
+            <a:off x="4910328" y="3950208"/>
+            <a:ext cx="1673352" cy="411480"/>
+          </a:xfrm>
+          <a:prstGeom prst="rect">
+            <a:avLst/>
+          </a:prstGeom>
+          <a:noFill/>
+          <a:ln/>
+        </p:spPr>
+        <p:txBody>
+          <a:bodyPr wrap="square" lIns="0" tIns="0" rIns="0" bIns="0" rtlCol="0" anchor="t"/>
+          <a:lstStyle/>
+          <a:p>
+            <a:pPr algn="l" indent="0" marL="0">
+              <a:buNone/>
+            </a:pPr>
+            <a:r>
+              <a:rPr lang="en-US" sz="1000" dirty="0">
+                <a:solidFill>
+                  <a:srgbClr val="3A2E3F"/>
+                </a:solidFill>
+                <a:latin typeface="Calibri" pitchFamily="34" charset="0"/>
+                <a:ea typeface="Calibri" pitchFamily="34" charset="-122"/>
+                <a:cs typeface="Calibri" pitchFamily="34" charset="-120"/>
+              </a:rPr>
+              <a:t>Curated creative talent network.</a:t>
+            </a:r>
+            <a:endParaRPr lang="en-US" sz="1000" dirty="0"/>
+          </a:p>
+        </p:txBody>
+      </p:sp>
+      <p:sp>
+        <p:nvSpPr>
+          <p:cNvPr id="34" name="Shape 32"/>
+          <p:cNvSpPr/>
+          <p:nvPr/>
+        </p:nvSpPr>
+        <p:spPr>
+          <a:xfrm>
+            <a:off x="6839712" y="3346704"/>
+            <a:ext cx="1993392" cy="1078992"/>
+          </a:xfrm>
+          <a:prstGeom prst="rect">
+            <a:avLst/>
+          </a:prstGeom>
+          <a:solidFill>
+            <a:srgbClr val="FFFFFF"/>
+          </a:solidFill>
+          <a:ln/>
+          <a:effectLst>
+            <a:outerShdw sx="100000" sy="100000" kx="0" ky="0" algn="bl" rotWithShape="0" blurRad="50800" dist="25400" dir="8100000">
+              <a:srgbClr val="000000">
+                <a:alpha val="9000"/>
+              </a:srgbClr>
+            </a:outerShdw>
+          </a:effectLst>
+        </p:spPr>
+      </p:sp>
+      <p:sp>
+        <p:nvSpPr>
+          <p:cNvPr id="35" name="Shape 33"/>
+          <p:cNvSpPr/>
+          <p:nvPr/>
+        </p:nvSpPr>
+        <p:spPr>
+          <a:xfrm>
+            <a:off x="6839712" y="3346704"/>
+            <a:ext cx="1993392" cy="91440"/>
+          </a:xfrm>
+          <a:prstGeom prst="rect">
+            <a:avLst/>
+          </a:prstGeom>
+          <a:solidFill>
+            <a:srgbClr val="B8956A"/>
+          </a:solidFill>
+          <a:ln/>
+        </p:spPr>
+      </p:sp>
+      <p:sp>
+        <p:nvSpPr>
+          <p:cNvPr id="36" name="Text 34"/>
+          <p:cNvSpPr/>
+          <p:nvPr/>
+        </p:nvSpPr>
+        <p:spPr>
+          <a:xfrm>
+            <a:off x="7022592" y="3529584"/>
+            <a:ext cx="1673352" cy="411480"/>
+          </a:xfrm>
+          <a:prstGeom prst="rect">
+            <a:avLst/>
+          </a:prstGeom>
+          <a:noFill/>
+          <a:ln/>
+        </p:spPr>
+        <p:txBody>
+          <a:bodyPr wrap="square" lIns="0" tIns="0" rIns="0" bIns="0" rtlCol="0" anchor="t"/>
+          <a:lstStyle/>
+          <a:p>
+            <a:pPr algn="l" indent="0" marL="0">
+              <a:buNone/>
+            </a:pPr>
+            <a:r>
+              <a:rPr lang="en-US" sz="1350" b="1" dirty="0">
+                <a:solidFill>
+                  <a:srgbClr val="7A5080"/>
                 </a:solidFill>
                 <a:latin typeface="Georgia" pitchFamily="34" charset="0"/>
                 <a:ea typeface="Georgia" pitchFamily="34" charset="-122"/>
                 <a:cs typeface="Georgia" pitchFamily="34" charset="-120"/>
               </a:rPr>
-              <a:t>No wasted effort, no guessing what to work on next.</a:t>
+              <a:t>Studio careers pages</a:t>
+            </a:r>
+            <a:endParaRPr lang="en-US" sz="1350" dirty="0"/>
+          </a:p>
+        </p:txBody>
+      </p:sp>
+      <p:sp>
+        <p:nvSpPr>
+          <p:cNvPr id="37" name="Text 35"/>
+          <p:cNvSpPr/>
+          <p:nvPr/>
+        </p:nvSpPr>
+        <p:spPr>
+          <a:xfrm>
+            <a:off x="7022592" y="3950208"/>
+            <a:ext cx="1673352" cy="411480"/>
+          </a:xfrm>
+          <a:prstGeom prst="rect">
+            <a:avLst/>
+          </a:prstGeom>
+          <a:noFill/>
+          <a:ln/>
+        </p:spPr>
+        <p:txBody>
+          <a:bodyPr wrap="square" lIns="0" tIns="0" rIns="0" bIns="0" rtlCol="0" anchor="t"/>
+          <a:lstStyle/>
+          <a:p>
+            <a:pPr algn="l" indent="0" marL="0">
+              <a:buNone/>
+            </a:pPr>
+            <a:r>
+              <a:rPr lang="en-US" sz="1000" dirty="0">
+                <a:solidFill>
+                  <a:srgbClr val="3A2E3F"/>
+                </a:solidFill>
+                <a:latin typeface="Calibri" pitchFamily="34" charset="0"/>
+                <a:ea typeface="Calibri" pitchFamily="34" charset="-122"/>
+                <a:cs typeface="Calibri" pitchFamily="34" charset="-120"/>
+              </a:rPr>
+              <a:t>Apply direct on a studio’s own site.</a:t>
+            </a:r>
+            <a:endParaRPr lang="en-US" sz="1000" dirty="0"/>
+          </a:p>
+        </p:txBody>
+      </p:sp>
+      <p:sp>
+        <p:nvSpPr>
+          <p:cNvPr id="38" name="Shape 36"/>
+          <p:cNvSpPr/>
+          <p:nvPr/>
+        </p:nvSpPr>
+        <p:spPr>
+          <a:xfrm>
+            <a:off x="457200" y="4526280"/>
+            <a:ext cx="8229600" cy="566928"/>
+          </a:xfrm>
+          <a:prstGeom prst="rect">
+            <a:avLst/>
+          </a:prstGeom>
+          <a:solidFill>
+            <a:srgbClr val="5C3A63"/>
+          </a:solidFill>
+          <a:ln/>
+        </p:spPr>
+      </p:sp>
+      <p:sp>
+        <p:nvSpPr>
+          <p:cNvPr id="39" name="Text 37"/>
+          <p:cNvSpPr/>
+          <p:nvPr/>
+        </p:nvSpPr>
+        <p:spPr>
+          <a:xfrm>
+            <a:off x="457200" y="4526280"/>
+            <a:ext cx="8229600" cy="566928"/>
+          </a:xfrm>
+          <a:prstGeom prst="rect">
+            <a:avLst/>
+          </a:prstGeom>
+          <a:noFill/>
+          <a:ln/>
+        </p:spPr>
+        <p:txBody>
+          <a:bodyPr wrap="square" lIns="1270" tIns="1270" rIns="1270" bIns="1270" rtlCol="0" anchor="ctr"/>
+          <a:lstStyle/>
+          <a:p>
+            <a:pPr algn="ctr" indent="0" marL="0">
+              <a:buNone/>
+            </a:pPr>
+            <a:r>
+              <a:rPr lang="en-US" sz="1500" b="1" i="1" dirty="0">
+                <a:solidFill>
+                  <a:srgbClr val="B8956A"/>
+                </a:solidFill>
+                <a:latin typeface="Calibri" pitchFamily="34" charset="0"/>
+                <a:ea typeface="Calibri" pitchFamily="34" charset="-122"/>
+                <a:cs typeface="Calibri" pitchFamily="34" charset="-120"/>
+              </a:rPr>
+              <a:t>Also find your local AIGA chapter. It is where nearby studios and designers gather.</a:t>
             </a:r>
             <a:endParaRPr lang="en-US" sz="1500" dirty="0"/>
           </a:p>
@@ -5687,7 +6018,7 @@
                 <a:ea typeface="Calibri" pitchFamily="34" charset="-122"/>
                 <a:cs typeface="Calibri" pitchFamily="34" charset="-120"/>
               </a:rPr>
-              <a:t>WHY REACH</a:t>
+              <a:t>TWO TARGETS</a:t>
             </a:r>
             <a:endParaRPr lang="en-US" sz="1100" dirty="0"/>
           </a:p>
@@ -5711,13 +6042,10 @@
           <a:ln/>
         </p:spPr>
         <p:txBody>
-          <a:bodyPr wrap="square" lIns="0" tIns="0" rIns="0" bIns="0" rtlCol="0" anchor="t"/>
-          <a:lstStyle/>
-          <a:p>
-            <a:pPr algn="l" indent="0" marL="0">
-              <a:lnSpc>
-                <a:spcPct val="98000"/>
-              </a:lnSpc>
+          <a:bodyPr wrap="square" lIns="0" tIns="0" rIns="0" bIns="0" rtlCol="0" anchor="ctr"/>
+          <a:lstStyle/>
+          <a:p>
+            <a:pPr algn="l" indent="0" marL="0">
               <a:buNone/>
             </a:pPr>
             <a:r>
@@ -5729,7 +6057,7 @@
                 <a:ea typeface="Georgia" pitchFamily="34" charset="-122"/>
                 <a:cs typeface="Georgia" pitchFamily="34" charset="-120"/>
               </a:rPr>
-              <a:t>Aim a little higher</a:t>
+              <a:t>Everything aligns to them</a:t>
             </a:r>
             <a:endParaRPr lang="en-US" sz="3300" dirty="0"/>
           </a:p>
@@ -5744,7 +6072,7 @@
         <p:spPr>
           <a:xfrm>
             <a:off x="502920" y="1444752"/>
-            <a:ext cx="8183880" cy="502920"/>
+            <a:ext cx="8183880" cy="548640"/>
           </a:xfrm>
           <a:prstGeom prst="rect">
             <a:avLst/>
@@ -5757,9 +6085,6 @@
           <a:lstStyle/>
           <a:p>
             <a:pPr algn="l" indent="0" marL="0">
-              <a:lnSpc>
-                <a:spcPct val="105000"/>
-              </a:lnSpc>
               <a:buNone/>
             </a:pPr>
             <a:r>
@@ -5771,7 +6096,7 @@
                 <a:ea typeface="Calibri" pitchFamily="34" charset="-122"/>
                 <a:cs typeface="Calibri" pitchFamily="34" charset="-120"/>
               </a:rPr>
-              <a:t>A reach job stretches you on purpose. Even if you don’t land that exact role, the work you do chasing it lifts everything.</a:t>
+              <a:t>Once your local and reach jobs are set, every assignment this semester points back at them. That is what keeps your work focused.</a:t>
             </a:r>
             <a:endParaRPr lang="en-US" sz="1300" dirty="0"/>
           </a:p>
@@ -5785,45 +6110,18 @@
         </p:nvSpPr>
         <p:spPr>
           <a:xfrm>
-            <a:off x="502920" y="2240280"/>
-            <a:ext cx="2697480" cy="1828800"/>
-          </a:xfrm>
-          <a:prstGeom prst="rect">
-            <a:avLst/>
-          </a:prstGeom>
-          <a:solidFill>
-            <a:srgbClr val="FFFFFF"/>
+            <a:off x="502920" y="2212848"/>
+            <a:ext cx="3017520" cy="1874520"/>
+          </a:xfrm>
+          <a:prstGeom prst="rect">
+            <a:avLst/>
+          </a:prstGeom>
+          <a:solidFill>
+            <a:srgbClr val="7A5080"/>
           </a:solidFill>
           <a:ln/>
           <a:effectLst>
-            <a:outerShdw sx="100000" sy="100000" kx="0" ky="0" algn="bl" rotWithShape="0" blurRad="114300" dist="38100" dir="5400000">
-              <a:srgbClr val="000000">
-                <a:alpha val="10000"/>
-              </a:srgbClr>
-            </a:outerShdw>
-          </a:effectLst>
-        </p:spPr>
-      </p:sp>
-      <p:sp>
-        <p:nvSpPr>
-          <p:cNvPr id="7" name="Shape 5"/>
-          <p:cNvSpPr/>
-          <p:nvPr/>
-        </p:nvSpPr>
-        <p:spPr>
-          <a:xfrm>
-            <a:off x="758952" y="2468880"/>
-            <a:ext cx="548640" cy="548640"/>
-          </a:xfrm>
-          <a:prstGeom prst="ellipse">
-            <a:avLst/>
-          </a:prstGeom>
-          <a:solidFill>
-            <a:srgbClr val="6B8F6E"/>
-          </a:solidFill>
-          <a:ln/>
-          <a:effectLst>
-            <a:outerShdw sx="100000" sy="100000" kx="0" ky="0" algn="bl" rotWithShape="0" blurRad="88900" dist="38100" dir="5400000">
+            <a:outerShdw sx="100000" sy="100000" kx="0" ky="0" algn="bl" rotWithShape="0" blurRad="63500" dist="25400" dir="8100000">
               <a:srgbClr val="000000">
                 <a:alpha val="12000"/>
               </a:srgbClr>
@@ -5831,9 +6129,466 @@
           </a:effectLst>
         </p:spPr>
       </p:sp>
+      <p:sp>
+        <p:nvSpPr>
+          <p:cNvPr id="7" name="Shape 5"/>
+          <p:cNvSpPr/>
+          <p:nvPr/>
+        </p:nvSpPr>
+        <p:spPr>
+          <a:xfrm>
+            <a:off x="777240" y="2468880"/>
+            <a:ext cx="566928" cy="566928"/>
+          </a:xfrm>
+          <a:prstGeom prst="ellipse">
+            <a:avLst/>
+          </a:prstGeom>
+          <a:solidFill>
+            <a:srgbClr val="B8956A"/>
+          </a:solidFill>
+          <a:ln/>
+        </p:spPr>
+      </p:sp>
+      <p:sp>
+        <p:nvSpPr>
+          <p:cNvPr id="8" name="Text 6"/>
+          <p:cNvSpPr/>
+          <p:nvPr/>
+        </p:nvSpPr>
+        <p:spPr>
+          <a:xfrm>
+            <a:off x="777240" y="3127248"/>
+            <a:ext cx="2468880" cy="457200"/>
+          </a:xfrm>
+          <a:prstGeom prst="rect">
+            <a:avLst/>
+          </a:prstGeom>
+          <a:noFill/>
+          <a:ln/>
+        </p:spPr>
+        <p:txBody>
+          <a:bodyPr wrap="square" lIns="0" tIns="0" rIns="0" bIns="0" rtlCol="0" anchor="ctr"/>
+          <a:lstStyle/>
+          <a:p>
+            <a:pPr algn="l" indent="0" marL="0">
+              <a:buNone/>
+            </a:pPr>
+            <a:r>
+              <a:rPr lang="en-US" sz="1800" b="1" dirty="0">
+                <a:solidFill>
+                  <a:srgbClr val="FFFFFF"/>
+                </a:solidFill>
+                <a:latin typeface="Georgia" pitchFamily="34" charset="0"/>
+                <a:ea typeface="Georgia" pitchFamily="34" charset="-122"/>
+                <a:cs typeface="Georgia" pitchFamily="34" charset="-120"/>
+              </a:rPr>
+              <a:t>Your target jobs</a:t>
+            </a:r>
+            <a:endParaRPr lang="en-US" sz="1800" dirty="0"/>
+          </a:p>
+        </p:txBody>
+      </p:sp>
+      <p:sp>
+        <p:nvSpPr>
+          <p:cNvPr id="9" name="Text 7"/>
+          <p:cNvSpPr/>
+          <p:nvPr/>
+        </p:nvSpPr>
+        <p:spPr>
+          <a:xfrm>
+            <a:off x="777240" y="3602736"/>
+            <a:ext cx="2468880" cy="411480"/>
+          </a:xfrm>
+          <a:prstGeom prst="rect">
+            <a:avLst/>
+          </a:prstGeom>
+          <a:noFill/>
+          <a:ln/>
+        </p:spPr>
+        <p:txBody>
+          <a:bodyPr wrap="square" lIns="0" tIns="0" rIns="0" bIns="0" rtlCol="0" anchor="t"/>
+          <a:lstStyle/>
+          <a:p>
+            <a:pPr algn="l" indent="0" marL="0">
+              <a:buNone/>
+            </a:pPr>
+            <a:r>
+              <a:rPr lang="en-US" sz="1200" dirty="0">
+                <a:solidFill>
+                  <a:srgbClr val="FFFFFF"/>
+                </a:solidFill>
+                <a:latin typeface="Calibri" pitchFamily="34" charset="0"/>
+                <a:ea typeface="Calibri" pitchFamily="34" charset="-122"/>
+                <a:cs typeface="Calibri" pitchFamily="34" charset="-120"/>
+              </a:rPr>
+              <a:t>sit at the center of it all.</a:t>
+            </a:r>
+            <a:endParaRPr lang="en-US" sz="1200" dirty="0"/>
+          </a:p>
+        </p:txBody>
+      </p:sp>
+      <p:sp>
+        <p:nvSpPr>
+          <p:cNvPr id="10" name="Shape 8"/>
+          <p:cNvSpPr/>
+          <p:nvPr/>
+        </p:nvSpPr>
+        <p:spPr>
+          <a:xfrm>
+            <a:off x="3749040" y="2212848"/>
+            <a:ext cx="4892040" cy="475488"/>
+          </a:xfrm>
+          <a:prstGeom prst="rect">
+            <a:avLst/>
+          </a:prstGeom>
+          <a:solidFill>
+            <a:srgbClr val="FFFFFF"/>
+          </a:solidFill>
+          <a:ln/>
+          <a:effectLst>
+            <a:outerShdw sx="100000" sy="100000" kx="0" ky="0" algn="bl" rotWithShape="0" blurRad="38100" dist="12700" dir="8100000">
+              <a:srgbClr val="000000">
+                <a:alpha val="7000"/>
+              </a:srgbClr>
+            </a:outerShdw>
+          </a:effectLst>
+        </p:spPr>
+      </p:sp>
+      <p:sp>
+        <p:nvSpPr>
+          <p:cNvPr id="11" name="Shape 9"/>
+          <p:cNvSpPr/>
+          <p:nvPr/>
+        </p:nvSpPr>
+        <p:spPr>
+          <a:xfrm>
+            <a:off x="3886200" y="2249424"/>
+            <a:ext cx="402336" cy="402336"/>
+          </a:xfrm>
+          <a:prstGeom prst="ellipse">
+            <a:avLst/>
+          </a:prstGeom>
+          <a:solidFill>
+            <a:srgbClr val="7A5080"/>
+          </a:solidFill>
+          <a:ln/>
+        </p:spPr>
+      </p:sp>
+      <p:sp>
+        <p:nvSpPr>
+          <p:cNvPr id="12" name="Text 10"/>
+          <p:cNvSpPr/>
+          <p:nvPr/>
+        </p:nvSpPr>
+        <p:spPr>
+          <a:xfrm>
+            <a:off x="4526280" y="2212848"/>
+            <a:ext cx="4023360" cy="475488"/>
+          </a:xfrm>
+          <a:prstGeom prst="rect">
+            <a:avLst/>
+          </a:prstGeom>
+          <a:noFill/>
+          <a:ln/>
+        </p:spPr>
+        <p:txBody>
+          <a:bodyPr wrap="square" lIns="0" tIns="0" rIns="0" bIns="0" rtlCol="0" anchor="ctr"/>
+          <a:lstStyle/>
+          <a:p>
+            <a:pPr algn="l" indent="0" marL="0">
+              <a:buNone/>
+            </a:pPr>
+            <a:r>
+              <a:rPr lang="en-US" sz="1200" b="1" dirty="0">
+                <a:solidFill>
+                  <a:srgbClr val="7A5080"/>
+                </a:solidFill>
+                <a:latin typeface="Calibri" pitchFamily="34" charset="0"/>
+                <a:ea typeface="Calibri" pitchFamily="34" charset="-122"/>
+                <a:cs typeface="Calibri" pitchFamily="34" charset="-120"/>
+              </a:rPr>
+              <a:t>Resume </a:t>
+            </a:r>
+            <a:pPr algn="l" indent="0" marL="0">
+              <a:buNone/>
+            </a:pPr>
+            <a:r>
+              <a:rPr lang="en-US" sz="1200" dirty="0">
+                <a:solidFill>
+                  <a:srgbClr val="3A2E3F"/>
+                </a:solidFill>
+                <a:latin typeface="Calibri" pitchFamily="34" charset="0"/>
+                <a:ea typeface="Calibri" pitchFamily="34" charset="-122"/>
+                <a:cs typeface="Calibri" pitchFamily="34" charset="-120"/>
+              </a:rPr>
+              <a:t> tailored to their exact requirements.</a:t>
+            </a:r>
+            <a:endParaRPr lang="en-US" sz="1200" dirty="0"/>
+          </a:p>
+        </p:txBody>
+      </p:sp>
+      <p:sp>
+        <p:nvSpPr>
+          <p:cNvPr id="13" name="Shape 11"/>
+          <p:cNvSpPr/>
+          <p:nvPr/>
+        </p:nvSpPr>
+        <p:spPr>
+          <a:xfrm>
+            <a:off x="3749040" y="2766060"/>
+            <a:ext cx="4892040" cy="475488"/>
+          </a:xfrm>
+          <a:prstGeom prst="rect">
+            <a:avLst/>
+          </a:prstGeom>
+          <a:solidFill>
+            <a:srgbClr val="FFFFFF"/>
+          </a:solidFill>
+          <a:ln/>
+          <a:effectLst>
+            <a:outerShdw sx="100000" sy="100000" kx="0" ky="0" algn="bl" rotWithShape="0" blurRad="38100" dist="12700" dir="8100000">
+              <a:srgbClr val="000000">
+                <a:alpha val="7000"/>
+              </a:srgbClr>
+            </a:outerShdw>
+          </a:effectLst>
+        </p:spPr>
+      </p:sp>
+      <p:sp>
+        <p:nvSpPr>
+          <p:cNvPr id="14" name="Shape 12"/>
+          <p:cNvSpPr/>
+          <p:nvPr/>
+        </p:nvSpPr>
+        <p:spPr>
+          <a:xfrm>
+            <a:off x="3886200" y="2802636"/>
+            <a:ext cx="402336" cy="402336"/>
+          </a:xfrm>
+          <a:prstGeom prst="ellipse">
+            <a:avLst/>
+          </a:prstGeom>
+          <a:solidFill>
+            <a:srgbClr val="6B8F6E"/>
+          </a:solidFill>
+          <a:ln/>
+        </p:spPr>
+      </p:sp>
+      <p:sp>
+        <p:nvSpPr>
+          <p:cNvPr id="15" name="Text 13"/>
+          <p:cNvSpPr/>
+          <p:nvPr/>
+        </p:nvSpPr>
+        <p:spPr>
+          <a:xfrm>
+            <a:off x="4526280" y="2766060"/>
+            <a:ext cx="4023360" cy="475488"/>
+          </a:xfrm>
+          <a:prstGeom prst="rect">
+            <a:avLst/>
+          </a:prstGeom>
+          <a:noFill/>
+          <a:ln/>
+        </p:spPr>
+        <p:txBody>
+          <a:bodyPr wrap="square" lIns="0" tIns="0" rIns="0" bIns="0" rtlCol="0" anchor="ctr"/>
+          <a:lstStyle/>
+          <a:p>
+            <a:pPr algn="l" indent="0" marL="0">
+              <a:buNone/>
+            </a:pPr>
+            <a:r>
+              <a:rPr lang="en-US" sz="1200" b="1" dirty="0">
+                <a:solidFill>
+                  <a:srgbClr val="7A5080"/>
+                </a:solidFill>
+                <a:latin typeface="Calibri" pitchFamily="34" charset="0"/>
+                <a:ea typeface="Calibri" pitchFamily="34" charset="-122"/>
+                <a:cs typeface="Calibri" pitchFamily="34" charset="-120"/>
+              </a:rPr>
+              <a:t>Interview prep </a:t>
+            </a:r>
+            <a:pPr algn="l" indent="0" marL="0">
+              <a:buNone/>
+            </a:pPr>
+            <a:r>
+              <a:rPr lang="en-US" sz="1200" dirty="0">
+                <a:solidFill>
+                  <a:srgbClr val="3A2E3F"/>
+                </a:solidFill>
+                <a:latin typeface="Calibri" pitchFamily="34" charset="0"/>
+                <a:ea typeface="Calibri" pitchFamily="34" charset="-122"/>
+                <a:cs typeface="Calibri" pitchFamily="34" charset="-120"/>
+              </a:rPr>
+              <a:t> built around their teams and roles.</a:t>
+            </a:r>
+            <a:endParaRPr lang="en-US" sz="1200" dirty="0"/>
+          </a:p>
+        </p:txBody>
+      </p:sp>
+      <p:sp>
+        <p:nvSpPr>
+          <p:cNvPr id="16" name="Shape 14"/>
+          <p:cNvSpPr/>
+          <p:nvPr/>
+        </p:nvSpPr>
+        <p:spPr>
+          <a:xfrm>
+            <a:off x="3749040" y="3319272"/>
+            <a:ext cx="4892040" cy="475488"/>
+          </a:xfrm>
+          <a:prstGeom prst="rect">
+            <a:avLst/>
+          </a:prstGeom>
+          <a:solidFill>
+            <a:srgbClr val="FFFFFF"/>
+          </a:solidFill>
+          <a:ln/>
+          <a:effectLst>
+            <a:outerShdw sx="100000" sy="100000" kx="0" ky="0" algn="bl" rotWithShape="0" blurRad="38100" dist="12700" dir="8100000">
+              <a:srgbClr val="000000">
+                <a:alpha val="7000"/>
+              </a:srgbClr>
+            </a:outerShdw>
+          </a:effectLst>
+        </p:spPr>
+      </p:sp>
+      <p:sp>
+        <p:nvSpPr>
+          <p:cNvPr id="17" name="Shape 15"/>
+          <p:cNvSpPr/>
+          <p:nvPr/>
+        </p:nvSpPr>
+        <p:spPr>
+          <a:xfrm>
+            <a:off x="3886200" y="3355848"/>
+            <a:ext cx="402336" cy="402336"/>
+          </a:xfrm>
+          <a:prstGeom prst="ellipse">
+            <a:avLst/>
+          </a:prstGeom>
+          <a:solidFill>
+            <a:srgbClr val="C4929E"/>
+          </a:solidFill>
+          <a:ln/>
+        </p:spPr>
+      </p:sp>
+      <p:sp>
+        <p:nvSpPr>
+          <p:cNvPr id="18" name="Text 16"/>
+          <p:cNvSpPr/>
+          <p:nvPr/>
+        </p:nvSpPr>
+        <p:spPr>
+          <a:xfrm>
+            <a:off x="4526280" y="3319272"/>
+            <a:ext cx="4023360" cy="475488"/>
+          </a:xfrm>
+          <a:prstGeom prst="rect">
+            <a:avLst/>
+          </a:prstGeom>
+          <a:noFill/>
+          <a:ln/>
+        </p:spPr>
+        <p:txBody>
+          <a:bodyPr wrap="square" lIns="0" tIns="0" rIns="0" bIns="0" rtlCol="0" anchor="ctr"/>
+          <a:lstStyle/>
+          <a:p>
+            <a:pPr algn="l" indent="0" marL="0">
+              <a:buNone/>
+            </a:pPr>
+            <a:r>
+              <a:rPr lang="en-US" sz="1200" b="1" dirty="0">
+                <a:solidFill>
+                  <a:srgbClr val="7A5080"/>
+                </a:solidFill>
+                <a:latin typeface="Calibri" pitchFamily="34" charset="0"/>
+                <a:ea typeface="Calibri" pitchFamily="34" charset="-122"/>
+                <a:cs typeface="Calibri" pitchFamily="34" charset="-120"/>
+              </a:rPr>
+              <a:t>Skill-building </a:t>
+            </a:r>
+            <a:pPr algn="l" indent="0" marL="0">
+              <a:buNone/>
+            </a:pPr>
+            <a:r>
+              <a:rPr lang="en-US" sz="1200" dirty="0">
+                <a:solidFill>
+                  <a:srgbClr val="3A2E3F"/>
+                </a:solidFill>
+                <a:latin typeface="Calibri" pitchFamily="34" charset="0"/>
+                <a:ea typeface="Calibri" pitchFamily="34" charset="-122"/>
+                <a:cs typeface="Calibri" pitchFamily="34" charset="-120"/>
+              </a:rPr>
+              <a:t> aimed at the gaps they reveal.</a:t>
+            </a:r>
+            <a:endParaRPr lang="en-US" sz="1200" dirty="0"/>
+          </a:p>
+        </p:txBody>
+      </p:sp>
+      <p:sp>
+        <p:nvSpPr>
+          <p:cNvPr id="19" name="Shape 17"/>
+          <p:cNvSpPr/>
+          <p:nvPr/>
+        </p:nvSpPr>
+        <p:spPr>
+          <a:xfrm>
+            <a:off x="457200" y="4370832"/>
+            <a:ext cx="8229600" cy="566928"/>
+          </a:xfrm>
+          <a:prstGeom prst="rect">
+            <a:avLst/>
+          </a:prstGeom>
+          <a:solidFill>
+            <a:srgbClr val="5C3A63"/>
+          </a:solidFill>
+          <a:ln/>
+        </p:spPr>
+      </p:sp>
+      <p:sp>
+        <p:nvSpPr>
+          <p:cNvPr id="20" name="Text 18"/>
+          <p:cNvSpPr/>
+          <p:nvPr/>
+        </p:nvSpPr>
+        <p:spPr>
+          <a:xfrm>
+            <a:off x="457200" y="4370832"/>
+            <a:ext cx="8229600" cy="566928"/>
+          </a:xfrm>
+          <a:prstGeom prst="rect">
+            <a:avLst/>
+          </a:prstGeom>
+          <a:noFill/>
+          <a:ln/>
+        </p:spPr>
+        <p:txBody>
+          <a:bodyPr wrap="square" lIns="1270" tIns="1270" rIns="1270" bIns="1270" rtlCol="0" anchor="ctr"/>
+          <a:lstStyle/>
+          <a:p>
+            <a:pPr algn="ctr" indent="0" marL="0">
+              <a:buNone/>
+            </a:pPr>
+            <a:r>
+              <a:rPr lang="en-US" sz="1500" b="1" i="1" dirty="0">
+                <a:solidFill>
+                  <a:srgbClr val="B8956A"/>
+                </a:solidFill>
+                <a:latin typeface="Calibri" pitchFamily="34" charset="0"/>
+                <a:ea typeface="Calibri" pitchFamily="34" charset="-122"/>
+                <a:cs typeface="Calibri" pitchFamily="34" charset="-120"/>
+              </a:rPr>
+              <a:t>Two jobs, total alignment.  No wasted effort, no guessing what to work on next.</a:t>
+            </a:r>
+            <a:endParaRPr lang="en-US" sz="1500" dirty="0"/>
+          </a:p>
+        </p:txBody>
+      </p:sp>
       <p:pic>
         <p:nvPicPr>
-          <p:cNvPr id="8" name="Image 0" descr="preencoded.png">    </p:cNvPr>
+          <p:cNvPr id="21" name="Image 0" descr="preencoded.png">    </p:cNvPr>
           <p:cNvPicPr>
             <a:picLocks noChangeAspect="1"/>
           </p:cNvPicPr>
@@ -5847,155 +6602,17 @@
         </p:blipFill>
         <p:spPr>
           <a:xfrm>
-            <a:off x="901598" y="2611526"/>
-            <a:ext cx="263347" cy="263347"/>
+            <a:off x="924641" y="2616281"/>
+            <a:ext cx="272125" cy="272125"/>
           </a:xfrm>
           <a:prstGeom prst="rect">
             <a:avLst/>
           </a:prstGeom>
         </p:spPr>
       </p:pic>
-      <p:sp>
-        <p:nvSpPr>
-          <p:cNvPr id="9" name="Text 6"/>
-          <p:cNvSpPr/>
-          <p:nvPr/>
-        </p:nvSpPr>
-        <p:spPr>
-          <a:xfrm>
-            <a:off x="758952" y="3054096"/>
-            <a:ext cx="2240280" cy="384048"/>
-          </a:xfrm>
-          <a:prstGeom prst="rect">
-            <a:avLst/>
-          </a:prstGeom>
-          <a:noFill/>
-          <a:ln/>
-        </p:spPr>
-        <p:txBody>
-          <a:bodyPr wrap="square" lIns="0" tIns="0" rIns="0" bIns="0" rtlCol="0" anchor="ctr"/>
-          <a:lstStyle/>
-          <a:p>
-            <a:pPr indent="0" marL="0">
-              <a:lnSpc>
-                <a:spcPct val="95000"/>
-              </a:lnSpc>
-              <a:buNone/>
-            </a:pPr>
-            <a:r>
-              <a:rPr lang="en-US" sz="1500" b="1" dirty="0">
-                <a:solidFill>
-                  <a:srgbClr val="7A5080"/>
-                </a:solidFill>
-                <a:latin typeface="Georgia" pitchFamily="34" charset="0"/>
-                <a:ea typeface="Georgia" pitchFamily="34" charset="-122"/>
-                <a:cs typeface="Georgia" pitchFamily="34" charset="-120"/>
-              </a:rPr>
-              <a:t>It pulls you up</a:t>
-            </a:r>
-            <a:endParaRPr lang="en-US" sz="1500" dirty="0"/>
-          </a:p>
-        </p:txBody>
-      </p:sp>
-      <p:sp>
-        <p:nvSpPr>
-          <p:cNvPr id="10" name="Text 7"/>
-          <p:cNvSpPr/>
-          <p:nvPr/>
-        </p:nvSpPr>
-        <p:spPr>
-          <a:xfrm>
-            <a:off x="758952" y="3493008"/>
-            <a:ext cx="2185416" cy="566928"/>
-          </a:xfrm>
-          <a:prstGeom prst="rect">
-            <a:avLst/>
-          </a:prstGeom>
-          <a:noFill/>
-          <a:ln/>
-        </p:spPr>
-        <p:txBody>
-          <a:bodyPr wrap="square" lIns="0" tIns="0" rIns="0" bIns="0" rtlCol="0" anchor="ctr"/>
-          <a:lstStyle/>
-          <a:p>
-            <a:pPr indent="0" marL="0">
-              <a:lnSpc>
-                <a:spcPct val="105000"/>
-              </a:lnSpc>
-              <a:buNone/>
-            </a:pPr>
-            <a:r>
-              <a:rPr lang="en-US" sz="1150" dirty="0">
-                <a:solidFill>
-                  <a:srgbClr val="3A2E3F"/>
-                </a:solidFill>
-                <a:latin typeface="Calibri" pitchFamily="34" charset="0"/>
-                <a:ea typeface="Calibri" pitchFamily="34" charset="-122"/>
-                <a:cs typeface="Calibri" pitchFamily="34" charset="-120"/>
-              </a:rPr>
-              <a:t>Building toward a stretch role grows skills a safe job never would.</a:t>
-            </a:r>
-            <a:endParaRPr lang="en-US" sz="1150" dirty="0"/>
-          </a:p>
-        </p:txBody>
-      </p:sp>
-      <p:sp>
-        <p:nvSpPr>
-          <p:cNvPr id="11" name="Shape 8"/>
-          <p:cNvSpPr/>
-          <p:nvPr/>
-        </p:nvSpPr>
-        <p:spPr>
-          <a:xfrm>
-            <a:off x="3355848" y="2240280"/>
-            <a:ext cx="2697480" cy="1828800"/>
-          </a:xfrm>
-          <a:prstGeom prst="rect">
-            <a:avLst/>
-          </a:prstGeom>
-          <a:solidFill>
-            <a:srgbClr val="FFFFFF"/>
-          </a:solidFill>
-          <a:ln/>
-          <a:effectLst>
-            <a:outerShdw sx="100000" sy="100000" kx="0" ky="0" algn="bl" rotWithShape="0" blurRad="114300" dist="38100" dir="5400000">
-              <a:srgbClr val="000000">
-                <a:alpha val="10000"/>
-              </a:srgbClr>
-            </a:outerShdw>
-          </a:effectLst>
-        </p:spPr>
-      </p:sp>
-      <p:sp>
-        <p:nvSpPr>
-          <p:cNvPr id="12" name="Shape 9"/>
-          <p:cNvSpPr/>
-          <p:nvPr/>
-        </p:nvSpPr>
-        <p:spPr>
-          <a:xfrm>
-            <a:off x="3611880" y="2468880"/>
-            <a:ext cx="548640" cy="548640"/>
-          </a:xfrm>
-          <a:prstGeom prst="ellipse">
-            <a:avLst/>
-          </a:prstGeom>
-          <a:solidFill>
-            <a:srgbClr val="C4929E"/>
-          </a:solidFill>
-          <a:ln/>
-          <a:effectLst>
-            <a:outerShdw sx="100000" sy="100000" kx="0" ky="0" algn="bl" rotWithShape="0" blurRad="88900" dist="38100" dir="5400000">
-              <a:srgbClr val="000000">
-                <a:alpha val="12000"/>
-              </a:srgbClr>
-            </a:outerShdw>
-          </a:effectLst>
-        </p:spPr>
-      </p:sp>
       <p:pic>
         <p:nvPicPr>
-          <p:cNvPr id="13" name="Image 1" descr="preencoded.png">    </p:cNvPr>
+          <p:cNvPr id="22" name="Image 1" descr="preencoded.png">    </p:cNvPr>
           <p:cNvPicPr>
             <a:picLocks noChangeAspect="1"/>
           </p:cNvPicPr>
@@ -6009,155 +6626,17 @@
         </p:blipFill>
         <p:spPr>
           <a:xfrm>
-            <a:off x="3754526" y="2611526"/>
-            <a:ext cx="263347" cy="263347"/>
+            <a:off x="3990807" y="2354031"/>
+            <a:ext cx="193121" cy="193121"/>
           </a:xfrm>
           <a:prstGeom prst="rect">
             <a:avLst/>
           </a:prstGeom>
         </p:spPr>
       </p:pic>
-      <p:sp>
-        <p:nvSpPr>
-          <p:cNvPr id="14" name="Text 10"/>
-          <p:cNvSpPr/>
-          <p:nvPr/>
-        </p:nvSpPr>
-        <p:spPr>
-          <a:xfrm>
-            <a:off x="3611880" y="3054096"/>
-            <a:ext cx="2240280" cy="384048"/>
-          </a:xfrm>
-          <a:prstGeom prst="rect">
-            <a:avLst/>
-          </a:prstGeom>
-          <a:noFill/>
-          <a:ln/>
-        </p:spPr>
-        <p:txBody>
-          <a:bodyPr wrap="square" lIns="0" tIns="0" rIns="0" bIns="0" rtlCol="0" anchor="ctr"/>
-          <a:lstStyle/>
-          <a:p>
-            <a:pPr indent="0" marL="0">
-              <a:lnSpc>
-                <a:spcPct val="95000"/>
-              </a:lnSpc>
-              <a:buNone/>
-            </a:pPr>
-            <a:r>
-              <a:rPr lang="en-US" sz="1500" b="1" dirty="0">
-                <a:solidFill>
-                  <a:srgbClr val="7A5080"/>
-                </a:solidFill>
-                <a:latin typeface="Georgia" pitchFamily="34" charset="0"/>
-                <a:ea typeface="Georgia" pitchFamily="34" charset="-122"/>
-                <a:cs typeface="Georgia" pitchFamily="34" charset="-120"/>
-              </a:rPr>
-              <a:t>It keeps you motivated</a:t>
-            </a:r>
-            <a:endParaRPr lang="en-US" sz="1500" dirty="0"/>
-          </a:p>
-        </p:txBody>
-      </p:sp>
-      <p:sp>
-        <p:nvSpPr>
-          <p:cNvPr id="15" name="Text 11"/>
-          <p:cNvSpPr/>
-          <p:nvPr/>
-        </p:nvSpPr>
-        <p:spPr>
-          <a:xfrm>
-            <a:off x="3611880" y="3493008"/>
-            <a:ext cx="2185416" cy="566928"/>
-          </a:xfrm>
-          <a:prstGeom prst="rect">
-            <a:avLst/>
-          </a:prstGeom>
-          <a:noFill/>
-          <a:ln/>
-        </p:spPr>
-        <p:txBody>
-          <a:bodyPr wrap="square" lIns="0" tIns="0" rIns="0" bIns="0" rtlCol="0" anchor="ctr"/>
-          <a:lstStyle/>
-          <a:p>
-            <a:pPr indent="0" marL="0">
-              <a:lnSpc>
-                <a:spcPct val="105000"/>
-              </a:lnSpc>
-              <a:buNone/>
-            </a:pPr>
-            <a:r>
-              <a:rPr lang="en-US" sz="1150" dirty="0">
-                <a:solidFill>
-                  <a:srgbClr val="3A2E3F"/>
-                </a:solidFill>
-                <a:latin typeface="Calibri" pitchFamily="34" charset="0"/>
-                <a:ea typeface="Calibri" pitchFamily="34" charset="-122"/>
-                <a:cs typeface="Calibri" pitchFamily="34" charset="-120"/>
-              </a:rPr>
-              <a:t>A job you actually want is worth the steady effort all term.</a:t>
-            </a:r>
-            <a:endParaRPr lang="en-US" sz="1150" dirty="0"/>
-          </a:p>
-        </p:txBody>
-      </p:sp>
-      <p:sp>
-        <p:nvSpPr>
-          <p:cNvPr id="16" name="Shape 12"/>
-          <p:cNvSpPr/>
-          <p:nvPr/>
-        </p:nvSpPr>
-        <p:spPr>
-          <a:xfrm>
-            <a:off x="6208776" y="2240280"/>
-            <a:ext cx="2697480" cy="1828800"/>
-          </a:xfrm>
-          <a:prstGeom prst="rect">
-            <a:avLst/>
-          </a:prstGeom>
-          <a:solidFill>
-            <a:srgbClr val="FFFFFF"/>
-          </a:solidFill>
-          <a:ln/>
-          <a:effectLst>
-            <a:outerShdw sx="100000" sy="100000" kx="0" ky="0" algn="bl" rotWithShape="0" blurRad="114300" dist="38100" dir="5400000">
-              <a:srgbClr val="000000">
-                <a:alpha val="10000"/>
-              </a:srgbClr>
-            </a:outerShdw>
-          </a:effectLst>
-        </p:spPr>
-      </p:sp>
-      <p:sp>
-        <p:nvSpPr>
-          <p:cNvPr id="17" name="Shape 13"/>
-          <p:cNvSpPr/>
-          <p:nvPr/>
-        </p:nvSpPr>
-        <p:spPr>
-          <a:xfrm>
-            <a:off x="6464808" y="2468880"/>
-            <a:ext cx="548640" cy="548640"/>
-          </a:xfrm>
-          <a:prstGeom prst="ellipse">
-            <a:avLst/>
-          </a:prstGeom>
-          <a:solidFill>
-            <a:srgbClr val="B8956A"/>
-          </a:solidFill>
-          <a:ln/>
-          <a:effectLst>
-            <a:outerShdw sx="100000" sy="100000" kx="0" ky="0" algn="bl" rotWithShape="0" blurRad="88900" dist="38100" dir="5400000">
-              <a:srgbClr val="000000">
-                <a:alpha val="12000"/>
-              </a:srgbClr>
-            </a:outerShdw>
-          </a:effectLst>
-        </p:spPr>
-      </p:sp>
       <p:pic>
         <p:nvPicPr>
-          <p:cNvPr id="18" name="Image 2" descr="preencoded.png">    </p:cNvPr>
+          <p:cNvPr id="23" name="Image 2" descr="preencoded.png">    </p:cNvPr>
           <p:cNvPicPr>
             <a:picLocks noChangeAspect="1"/>
           </p:cNvPicPr>
@@ -6171,137 +6650,38 @@
         </p:blipFill>
         <p:spPr>
           <a:xfrm>
-            <a:off x="6607454" y="2611526"/>
-            <a:ext cx="263347" cy="263347"/>
+            <a:off x="3990807" y="2907243"/>
+            <a:ext cx="193121" cy="193121"/>
           </a:xfrm>
           <a:prstGeom prst="rect">
             <a:avLst/>
           </a:prstGeom>
         </p:spPr>
       </p:pic>
-      <p:sp>
-        <p:nvSpPr>
-          <p:cNvPr id="19" name="Text 14"/>
-          <p:cNvSpPr/>
-          <p:nvPr/>
-        </p:nvSpPr>
-        <p:spPr>
-          <a:xfrm>
-            <a:off x="6464808" y="3054096"/>
-            <a:ext cx="2240280" cy="384048"/>
-          </a:xfrm>
-          <a:prstGeom prst="rect">
-            <a:avLst/>
-          </a:prstGeom>
-          <a:noFill/>
-          <a:ln/>
-        </p:spPr>
-        <p:txBody>
-          <a:bodyPr wrap="square" lIns="0" tIns="0" rIns="0" bIns="0" rtlCol="0" anchor="ctr"/>
-          <a:lstStyle/>
-          <a:p>
-            <a:pPr indent="0" marL="0">
-              <a:lnSpc>
-                <a:spcPct val="95000"/>
-              </a:lnSpc>
-              <a:buNone/>
-            </a:pPr>
-            <a:r>
-              <a:rPr lang="en-US" sz="1500" b="1" dirty="0">
-                <a:solidFill>
-                  <a:srgbClr val="7A5080"/>
-                </a:solidFill>
-                <a:latin typeface="Georgia" pitchFamily="34" charset="0"/>
-                <a:ea typeface="Georgia" pitchFamily="34" charset="-122"/>
-                <a:cs typeface="Georgia" pitchFamily="34" charset="-120"/>
-              </a:rPr>
-              <a:t>You’re ready either way</a:t>
-            </a:r>
-            <a:endParaRPr lang="en-US" sz="1500" dirty="0"/>
-          </a:p>
-        </p:txBody>
-      </p:sp>
-      <p:sp>
-        <p:nvSpPr>
-          <p:cNvPr id="20" name="Text 15"/>
-          <p:cNvSpPr/>
-          <p:nvPr/>
-        </p:nvSpPr>
-        <p:spPr>
-          <a:xfrm>
-            <a:off x="6464808" y="3493008"/>
-            <a:ext cx="2185416" cy="566928"/>
-          </a:xfrm>
-          <a:prstGeom prst="rect">
-            <a:avLst/>
-          </a:prstGeom>
-          <a:noFill/>
-          <a:ln/>
-        </p:spPr>
-        <p:txBody>
-          <a:bodyPr wrap="square" lIns="0" tIns="0" rIns="0" bIns="0" rtlCol="0" anchor="ctr"/>
-          <a:lstStyle/>
-          <a:p>
-            <a:pPr indent="0" marL="0">
-              <a:lnSpc>
-                <a:spcPct val="105000"/>
-              </a:lnSpc>
-              <a:buNone/>
-            </a:pPr>
-            <a:r>
-              <a:rPr lang="en-US" sz="1150" dirty="0">
-                <a:solidFill>
-                  <a:srgbClr val="3A2E3F"/>
-                </a:solidFill>
-                <a:latin typeface="Calibri" pitchFamily="34" charset="0"/>
-                <a:ea typeface="Calibri" pitchFamily="34" charset="-122"/>
-                <a:cs typeface="Calibri" pitchFamily="34" charset="-120"/>
-              </a:rPr>
-              <a:t>Land it, or land the next tier down fully prepared. You win both.</a:t>
-            </a:r>
-            <a:endParaRPr lang="en-US" sz="1150" dirty="0"/>
-          </a:p>
-        </p:txBody>
-      </p:sp>
-      <p:sp>
-        <p:nvSpPr>
-          <p:cNvPr id="21" name="Text 16"/>
-          <p:cNvSpPr/>
-          <p:nvPr/>
-        </p:nvSpPr>
-        <p:spPr>
-          <a:xfrm>
-            <a:off x="502920" y="4736592"/>
-            <a:ext cx="8229600" cy="274320"/>
-          </a:xfrm>
-          <a:prstGeom prst="rect">
-            <a:avLst/>
-          </a:prstGeom>
-          <a:noFill/>
-          <a:ln/>
-        </p:spPr>
-        <p:txBody>
-          <a:bodyPr wrap="square" lIns="0" tIns="0" rIns="0" bIns="0" rtlCol="0" anchor="ctr"/>
-          <a:lstStyle/>
-          <a:p>
-            <a:pPr algn="l" indent="0" marL="0">
-              <a:buNone/>
-            </a:pPr>
-            <a:r>
-              <a:rPr lang="en-US" sz="1350" i="1" dirty="0">
-                <a:solidFill>
-                  <a:srgbClr val="B8956A"/>
-                </a:solidFill>
-                <a:latin typeface="Georgia" pitchFamily="34" charset="0"/>
-                <a:ea typeface="Georgia" pitchFamily="34" charset="-122"/>
-                <a:cs typeface="Georgia" pitchFamily="34" charset="-120"/>
-              </a:rPr>
-              <a:t>Reach high. The climb is where the growth happens.</a:t>
-            </a:r>
-            <a:endParaRPr lang="en-US" sz="1350" dirty="0"/>
-          </a:p>
-        </p:txBody>
-      </p:sp>
+      <p:pic>
+        <p:nvPicPr>
+          <p:cNvPr id="24" name="Image 3" descr="preencoded.png">    </p:cNvPr>
+          <p:cNvPicPr>
+            <a:picLocks noChangeAspect="1"/>
+          </p:cNvPicPr>
+          <p:nvPr/>
+        </p:nvPicPr>
+        <p:blipFill>
+          <a:blip r:embed="rId4"/>
+          <a:stretch>
+            <a:fillRect/>
+          </a:stretch>
+        </p:blipFill>
+        <p:spPr>
+          <a:xfrm>
+            <a:off x="3990807" y="3460455"/>
+            <a:ext cx="193121" cy="193121"/>
+          </a:xfrm>
+          <a:prstGeom prst="rect">
+            <a:avLst/>
+          </a:prstGeom>
+        </p:spPr>
+      </p:pic>
     </p:spTree>
   </p:cSld>
   <p:clrMapOvr>
@@ -6313,6 +6693,661 @@
 <file path=ppt/slides/slide8.xml><?xml version="1.0" encoding="utf-8"?>
 <p:sld xmlns:a="http://schemas.openxmlformats.org/drawingml/2006/main" xmlns:r="http://schemas.openxmlformats.org/officeDocument/2006/relationships" xmlns:p="http://schemas.openxmlformats.org/presentationml/2006/main">
   <p:cSld name="Slide 8">
+    <p:bg>
+      <p:bgPr>
+        <a:solidFill>
+          <a:srgbClr val="FAF7F2"/>
+        </a:solidFill>
+      </p:bgPr>
+    </p:bg>
+    <p:spTree>
+      <p:nvGrpSpPr>
+        <p:cNvPr id="1" name=""/>
+        <p:cNvGrpSpPr/>
+        <p:nvPr/>
+      </p:nvGrpSpPr>
+      <p:grpSpPr>
+        <a:xfrm>
+          <a:off x="0" y="0"/>
+          <a:ext cx="0" cy="0"/>
+          <a:chOff x="0" y="0"/>
+          <a:chExt cx="0" cy="0"/>
+        </a:xfrm>
+      </p:grpSpPr>
+      <p:sp>
+        <p:nvSpPr>
+          <p:cNvPr id="2" name="Shape 0"/>
+          <p:cNvSpPr/>
+          <p:nvPr/>
+        </p:nvSpPr>
+        <p:spPr>
+          <a:xfrm>
+            <a:off x="0" y="0"/>
+            <a:ext cx="9144000" cy="109728"/>
+          </a:xfrm>
+          <a:prstGeom prst="rect">
+            <a:avLst/>
+          </a:prstGeom>
+          <a:solidFill>
+            <a:srgbClr val="7A5080"/>
+          </a:solidFill>
+          <a:ln/>
+        </p:spPr>
+      </p:sp>
+      <p:sp>
+        <p:nvSpPr>
+          <p:cNvPr id="3" name="Text 1"/>
+          <p:cNvSpPr/>
+          <p:nvPr/>
+        </p:nvSpPr>
+        <p:spPr>
+          <a:xfrm>
+            <a:off x="502920" y="274320"/>
+            <a:ext cx="8229600" cy="256032"/>
+          </a:xfrm>
+          <a:prstGeom prst="rect">
+            <a:avLst/>
+          </a:prstGeom>
+          <a:noFill/>
+          <a:ln/>
+        </p:spPr>
+        <p:txBody>
+          <a:bodyPr wrap="square" lIns="0" tIns="0" rIns="0" bIns="0" rtlCol="0" anchor="ctr"/>
+          <a:lstStyle/>
+          <a:p>
+            <a:pPr algn="l" indent="0" marL="0">
+              <a:buNone/>
+            </a:pPr>
+            <a:r>
+              <a:rPr lang="en-US" sz="1100" b="1" spc="200" kern="0" dirty="0">
+                <a:solidFill>
+                  <a:srgbClr val="B8956A"/>
+                </a:solidFill>
+                <a:latin typeface="Calibri" pitchFamily="34" charset="0"/>
+                <a:ea typeface="Calibri" pitchFamily="34" charset="-122"/>
+                <a:cs typeface="Calibri" pitchFamily="34" charset="-120"/>
+              </a:rPr>
+              <a:t>WHY REACH</a:t>
+            </a:r>
+            <a:endParaRPr lang="en-US" sz="1100" dirty="0"/>
+          </a:p>
+        </p:txBody>
+      </p:sp>
+      <p:sp>
+        <p:nvSpPr>
+          <p:cNvPr id="4" name="Text 2"/>
+          <p:cNvSpPr/>
+          <p:nvPr/>
+        </p:nvSpPr>
+        <p:spPr>
+          <a:xfrm>
+            <a:off x="475488" y="566928"/>
+            <a:ext cx="8229600" cy="868680"/>
+          </a:xfrm>
+          <a:prstGeom prst="rect">
+            <a:avLst/>
+          </a:prstGeom>
+          <a:noFill/>
+          <a:ln/>
+        </p:spPr>
+        <p:txBody>
+          <a:bodyPr wrap="square" lIns="0" tIns="0" rIns="0" bIns="0" rtlCol="0" anchor="ctr"/>
+          <a:lstStyle/>
+          <a:p>
+            <a:pPr algn="l" indent="0" marL="0">
+              <a:buNone/>
+            </a:pPr>
+            <a:r>
+              <a:rPr lang="en-US" sz="3300" b="1" dirty="0">
+                <a:solidFill>
+                  <a:srgbClr val="7A5080"/>
+                </a:solidFill>
+                <a:latin typeface="Georgia" pitchFamily="34" charset="0"/>
+                <a:ea typeface="Georgia" pitchFamily="34" charset="-122"/>
+                <a:cs typeface="Georgia" pitchFamily="34" charset="-120"/>
+              </a:rPr>
+              <a:t>Aim a little higher</a:t>
+            </a:r>
+            <a:endParaRPr lang="en-US" sz="3300" dirty="0"/>
+          </a:p>
+        </p:txBody>
+      </p:sp>
+      <p:sp>
+        <p:nvSpPr>
+          <p:cNvPr id="5" name="Text 3"/>
+          <p:cNvSpPr/>
+          <p:nvPr/>
+        </p:nvSpPr>
+        <p:spPr>
+          <a:xfrm>
+            <a:off x="502920" y="1444752"/>
+            <a:ext cx="8183880" cy="548640"/>
+          </a:xfrm>
+          <a:prstGeom prst="rect">
+            <a:avLst/>
+          </a:prstGeom>
+          <a:noFill/>
+          <a:ln/>
+        </p:spPr>
+        <p:txBody>
+          <a:bodyPr wrap="square" lIns="0" tIns="0" rIns="0" bIns="0" rtlCol="0" anchor="t"/>
+          <a:lstStyle/>
+          <a:p>
+            <a:pPr algn="l" indent="0" marL="0">
+              <a:buNone/>
+            </a:pPr>
+            <a:r>
+              <a:rPr lang="en-US" sz="1300" dirty="0">
+                <a:solidFill>
+                  <a:srgbClr val="3A2E3F"/>
+                </a:solidFill>
+                <a:latin typeface="Calibri" pitchFamily="34" charset="0"/>
+                <a:ea typeface="Calibri" pitchFamily="34" charset="-122"/>
+                <a:cs typeface="Calibri" pitchFamily="34" charset="-120"/>
+              </a:rPr>
+              <a:t>A reach job stretches you on purpose. Even if you don’t land that exact role, the work you do chasing it lifts everything.</a:t>
+            </a:r>
+            <a:endParaRPr lang="en-US" sz="1300" dirty="0"/>
+          </a:p>
+        </p:txBody>
+      </p:sp>
+      <p:sp>
+        <p:nvSpPr>
+          <p:cNvPr id="6" name="Shape 4"/>
+          <p:cNvSpPr/>
+          <p:nvPr/>
+        </p:nvSpPr>
+        <p:spPr>
+          <a:xfrm>
+            <a:off x="502920" y="2240280"/>
+            <a:ext cx="2697480" cy="1828800"/>
+          </a:xfrm>
+          <a:prstGeom prst="rect">
+            <a:avLst/>
+          </a:prstGeom>
+          <a:solidFill>
+            <a:srgbClr val="FFFFFF"/>
+          </a:solidFill>
+          <a:ln/>
+          <a:effectLst>
+            <a:outerShdw sx="100000" sy="100000" kx="0" ky="0" algn="bl" rotWithShape="0" blurRad="63500" dist="25400" dir="8100000">
+              <a:srgbClr val="000000">
+                <a:alpha val="10000"/>
+              </a:srgbClr>
+            </a:outerShdw>
+          </a:effectLst>
+        </p:spPr>
+      </p:sp>
+      <p:sp>
+        <p:nvSpPr>
+          <p:cNvPr id="7" name="Shape 5"/>
+          <p:cNvSpPr/>
+          <p:nvPr/>
+        </p:nvSpPr>
+        <p:spPr>
+          <a:xfrm>
+            <a:off x="758952" y="2468880"/>
+            <a:ext cx="548640" cy="548640"/>
+          </a:xfrm>
+          <a:prstGeom prst="ellipse">
+            <a:avLst/>
+          </a:prstGeom>
+          <a:solidFill>
+            <a:srgbClr val="C4929E"/>
+          </a:solidFill>
+          <a:ln/>
+        </p:spPr>
+      </p:sp>
+      <p:sp>
+        <p:nvSpPr>
+          <p:cNvPr id="8" name="Text 6"/>
+          <p:cNvSpPr/>
+          <p:nvPr/>
+        </p:nvSpPr>
+        <p:spPr>
+          <a:xfrm>
+            <a:off x="758952" y="3072384"/>
+            <a:ext cx="2240280" cy="310896"/>
+          </a:xfrm>
+          <a:prstGeom prst="rect">
+            <a:avLst/>
+          </a:prstGeom>
+          <a:noFill/>
+          <a:ln/>
+        </p:spPr>
+        <p:txBody>
+          <a:bodyPr wrap="square" lIns="0" tIns="0" rIns="0" bIns="0" rtlCol="0" anchor="ctr"/>
+          <a:lstStyle/>
+          <a:p>
+            <a:pPr algn="l" indent="0" marL="0">
+              <a:buNone/>
+            </a:pPr>
+            <a:r>
+              <a:rPr lang="en-US" sz="1600" b="1" dirty="0">
+                <a:solidFill>
+                  <a:srgbClr val="7A5080"/>
+                </a:solidFill>
+                <a:latin typeface="Georgia" pitchFamily="34" charset="0"/>
+                <a:ea typeface="Georgia" pitchFamily="34" charset="-122"/>
+                <a:cs typeface="Georgia" pitchFamily="34" charset="-120"/>
+              </a:rPr>
+              <a:t>It pulls you up</a:t>
+            </a:r>
+            <a:endParaRPr lang="en-US" sz="1600" dirty="0"/>
+          </a:p>
+        </p:txBody>
+      </p:sp>
+      <p:sp>
+        <p:nvSpPr>
+          <p:cNvPr id="9" name="Text 7"/>
+          <p:cNvSpPr/>
+          <p:nvPr/>
+        </p:nvSpPr>
+        <p:spPr>
+          <a:xfrm>
+            <a:off x="758952" y="3401568"/>
+            <a:ext cx="2240280" cy="658368"/>
+          </a:xfrm>
+          <a:prstGeom prst="rect">
+            <a:avLst/>
+          </a:prstGeom>
+          <a:noFill/>
+          <a:ln/>
+        </p:spPr>
+        <p:txBody>
+          <a:bodyPr wrap="square" lIns="0" tIns="0" rIns="0" bIns="0" rtlCol="0" anchor="t"/>
+          <a:lstStyle/>
+          <a:p>
+            <a:pPr algn="l" indent="0" marL="0">
+              <a:buNone/>
+            </a:pPr>
+            <a:r>
+              <a:rPr lang="en-US" sz="1150" dirty="0">
+                <a:solidFill>
+                  <a:srgbClr val="3A2E3F"/>
+                </a:solidFill>
+                <a:latin typeface="Calibri" pitchFamily="34" charset="0"/>
+                <a:ea typeface="Calibri" pitchFamily="34" charset="-122"/>
+                <a:cs typeface="Calibri" pitchFamily="34" charset="-120"/>
+              </a:rPr>
+              <a:t>Building toward a stretch role grows skills a safe job never would.</a:t>
+            </a:r>
+            <a:endParaRPr lang="en-US" sz="1150" dirty="0"/>
+          </a:p>
+        </p:txBody>
+      </p:sp>
+      <p:sp>
+        <p:nvSpPr>
+          <p:cNvPr id="10" name="Shape 8"/>
+          <p:cNvSpPr/>
+          <p:nvPr/>
+        </p:nvSpPr>
+        <p:spPr>
+          <a:xfrm>
+            <a:off x="3396996" y="2240280"/>
+            <a:ext cx="2697480" cy="1828800"/>
+          </a:xfrm>
+          <a:prstGeom prst="rect">
+            <a:avLst/>
+          </a:prstGeom>
+          <a:solidFill>
+            <a:srgbClr val="FFFFFF"/>
+          </a:solidFill>
+          <a:ln/>
+          <a:effectLst>
+            <a:outerShdw sx="100000" sy="100000" kx="0" ky="0" algn="bl" rotWithShape="0" blurRad="63500" dist="25400" dir="8100000">
+              <a:srgbClr val="000000">
+                <a:alpha val="10000"/>
+              </a:srgbClr>
+            </a:outerShdw>
+          </a:effectLst>
+        </p:spPr>
+      </p:sp>
+      <p:sp>
+        <p:nvSpPr>
+          <p:cNvPr id="11" name="Shape 9"/>
+          <p:cNvSpPr/>
+          <p:nvPr/>
+        </p:nvSpPr>
+        <p:spPr>
+          <a:xfrm>
+            <a:off x="3653028" y="2468880"/>
+            <a:ext cx="548640" cy="548640"/>
+          </a:xfrm>
+          <a:prstGeom prst="ellipse">
+            <a:avLst/>
+          </a:prstGeom>
+          <a:solidFill>
+            <a:srgbClr val="7A5080"/>
+          </a:solidFill>
+          <a:ln/>
+        </p:spPr>
+      </p:sp>
+      <p:sp>
+        <p:nvSpPr>
+          <p:cNvPr id="12" name="Text 10"/>
+          <p:cNvSpPr/>
+          <p:nvPr/>
+        </p:nvSpPr>
+        <p:spPr>
+          <a:xfrm>
+            <a:off x="3653028" y="3072384"/>
+            <a:ext cx="2240280" cy="310896"/>
+          </a:xfrm>
+          <a:prstGeom prst="rect">
+            <a:avLst/>
+          </a:prstGeom>
+          <a:noFill/>
+          <a:ln/>
+        </p:spPr>
+        <p:txBody>
+          <a:bodyPr wrap="square" lIns="0" tIns="0" rIns="0" bIns="0" rtlCol="0" anchor="ctr"/>
+          <a:lstStyle/>
+          <a:p>
+            <a:pPr algn="l" indent="0" marL="0">
+              <a:buNone/>
+            </a:pPr>
+            <a:r>
+              <a:rPr lang="en-US" sz="1600" b="1" dirty="0">
+                <a:solidFill>
+                  <a:srgbClr val="7A5080"/>
+                </a:solidFill>
+                <a:latin typeface="Georgia" pitchFamily="34" charset="0"/>
+                <a:ea typeface="Georgia" pitchFamily="34" charset="-122"/>
+                <a:cs typeface="Georgia" pitchFamily="34" charset="-120"/>
+              </a:rPr>
+              <a:t>It keeps you motivated</a:t>
+            </a:r>
+            <a:endParaRPr lang="en-US" sz="1600" dirty="0"/>
+          </a:p>
+        </p:txBody>
+      </p:sp>
+      <p:sp>
+        <p:nvSpPr>
+          <p:cNvPr id="13" name="Text 11"/>
+          <p:cNvSpPr/>
+          <p:nvPr/>
+        </p:nvSpPr>
+        <p:spPr>
+          <a:xfrm>
+            <a:off x="3653028" y="3401568"/>
+            <a:ext cx="2240280" cy="658368"/>
+          </a:xfrm>
+          <a:prstGeom prst="rect">
+            <a:avLst/>
+          </a:prstGeom>
+          <a:noFill/>
+          <a:ln/>
+        </p:spPr>
+        <p:txBody>
+          <a:bodyPr wrap="square" lIns="0" tIns="0" rIns="0" bIns="0" rtlCol="0" anchor="t"/>
+          <a:lstStyle/>
+          <a:p>
+            <a:pPr algn="l" indent="0" marL="0">
+              <a:buNone/>
+            </a:pPr>
+            <a:r>
+              <a:rPr lang="en-US" sz="1150" dirty="0">
+                <a:solidFill>
+                  <a:srgbClr val="3A2E3F"/>
+                </a:solidFill>
+                <a:latin typeface="Calibri" pitchFamily="34" charset="0"/>
+                <a:ea typeface="Calibri" pitchFamily="34" charset="-122"/>
+                <a:cs typeface="Calibri" pitchFamily="34" charset="-120"/>
+              </a:rPr>
+              <a:t>A job you actually want is worth the steady effort all term.</a:t>
+            </a:r>
+            <a:endParaRPr lang="en-US" sz="1150" dirty="0"/>
+          </a:p>
+        </p:txBody>
+      </p:sp>
+      <p:sp>
+        <p:nvSpPr>
+          <p:cNvPr id="14" name="Shape 12"/>
+          <p:cNvSpPr/>
+          <p:nvPr/>
+        </p:nvSpPr>
+        <p:spPr>
+          <a:xfrm>
+            <a:off x="6291072" y="2240280"/>
+            <a:ext cx="2697480" cy="1828800"/>
+          </a:xfrm>
+          <a:prstGeom prst="rect">
+            <a:avLst/>
+          </a:prstGeom>
+          <a:solidFill>
+            <a:srgbClr val="FFFFFF"/>
+          </a:solidFill>
+          <a:ln/>
+          <a:effectLst>
+            <a:outerShdw sx="100000" sy="100000" kx="0" ky="0" algn="bl" rotWithShape="0" blurRad="63500" dist="25400" dir="8100000">
+              <a:srgbClr val="000000">
+                <a:alpha val="10000"/>
+              </a:srgbClr>
+            </a:outerShdw>
+          </a:effectLst>
+        </p:spPr>
+      </p:sp>
+      <p:sp>
+        <p:nvSpPr>
+          <p:cNvPr id="15" name="Shape 13"/>
+          <p:cNvSpPr/>
+          <p:nvPr/>
+        </p:nvSpPr>
+        <p:spPr>
+          <a:xfrm>
+            <a:off x="6547104" y="2468880"/>
+            <a:ext cx="548640" cy="548640"/>
+          </a:xfrm>
+          <a:prstGeom prst="ellipse">
+            <a:avLst/>
+          </a:prstGeom>
+          <a:solidFill>
+            <a:srgbClr val="6B8F6E"/>
+          </a:solidFill>
+          <a:ln/>
+        </p:spPr>
+      </p:sp>
+      <p:sp>
+        <p:nvSpPr>
+          <p:cNvPr id="16" name="Text 14"/>
+          <p:cNvSpPr/>
+          <p:nvPr/>
+        </p:nvSpPr>
+        <p:spPr>
+          <a:xfrm>
+            <a:off x="6547104" y="3072384"/>
+            <a:ext cx="2240280" cy="310896"/>
+          </a:xfrm>
+          <a:prstGeom prst="rect">
+            <a:avLst/>
+          </a:prstGeom>
+          <a:noFill/>
+          <a:ln/>
+        </p:spPr>
+        <p:txBody>
+          <a:bodyPr wrap="square" lIns="0" tIns="0" rIns="0" bIns="0" rtlCol="0" anchor="ctr"/>
+          <a:lstStyle/>
+          <a:p>
+            <a:pPr algn="l" indent="0" marL="0">
+              <a:buNone/>
+            </a:pPr>
+            <a:r>
+              <a:rPr lang="en-US" sz="1600" b="1" dirty="0">
+                <a:solidFill>
+                  <a:srgbClr val="7A5080"/>
+                </a:solidFill>
+                <a:latin typeface="Georgia" pitchFamily="34" charset="0"/>
+                <a:ea typeface="Georgia" pitchFamily="34" charset="-122"/>
+                <a:cs typeface="Georgia" pitchFamily="34" charset="-120"/>
+              </a:rPr>
+              <a:t>You’re ready either way</a:t>
+            </a:r>
+            <a:endParaRPr lang="en-US" sz="1600" dirty="0"/>
+          </a:p>
+        </p:txBody>
+      </p:sp>
+      <p:sp>
+        <p:nvSpPr>
+          <p:cNvPr id="17" name="Text 15"/>
+          <p:cNvSpPr/>
+          <p:nvPr/>
+        </p:nvSpPr>
+        <p:spPr>
+          <a:xfrm>
+            <a:off x="6547104" y="3401568"/>
+            <a:ext cx="2240280" cy="658368"/>
+          </a:xfrm>
+          <a:prstGeom prst="rect">
+            <a:avLst/>
+          </a:prstGeom>
+          <a:noFill/>
+          <a:ln/>
+        </p:spPr>
+        <p:txBody>
+          <a:bodyPr wrap="square" lIns="0" tIns="0" rIns="0" bIns="0" rtlCol="0" anchor="t"/>
+          <a:lstStyle/>
+          <a:p>
+            <a:pPr algn="l" indent="0" marL="0">
+              <a:buNone/>
+            </a:pPr>
+            <a:r>
+              <a:rPr lang="en-US" sz="1150" dirty="0">
+                <a:solidFill>
+                  <a:srgbClr val="3A2E3F"/>
+                </a:solidFill>
+                <a:latin typeface="Calibri" pitchFamily="34" charset="0"/>
+                <a:ea typeface="Calibri" pitchFamily="34" charset="-122"/>
+                <a:cs typeface="Calibri" pitchFamily="34" charset="-120"/>
+              </a:rPr>
+              <a:t>Land it, or land the next tier down fully prepared. You win both.</a:t>
+            </a:r>
+            <a:endParaRPr lang="en-US" sz="1150" dirty="0"/>
+          </a:p>
+        </p:txBody>
+      </p:sp>
+      <p:sp>
+        <p:nvSpPr>
+          <p:cNvPr id="18" name="Text 16"/>
+          <p:cNvSpPr/>
+          <p:nvPr/>
+        </p:nvSpPr>
+        <p:spPr>
+          <a:xfrm>
+            <a:off x="502920" y="4736592"/>
+            <a:ext cx="8229600" cy="274320"/>
+          </a:xfrm>
+          <a:prstGeom prst="rect">
+            <a:avLst/>
+          </a:prstGeom>
+          <a:noFill/>
+          <a:ln/>
+        </p:spPr>
+        <p:txBody>
+          <a:bodyPr wrap="square" lIns="0" tIns="0" rIns="0" bIns="0" rtlCol="0" anchor="ctr"/>
+          <a:lstStyle/>
+          <a:p>
+            <a:pPr algn="l" indent="0" marL="0">
+              <a:buNone/>
+            </a:pPr>
+            <a:r>
+              <a:rPr lang="en-US" sz="1350" b="1" i="1" dirty="0">
+                <a:solidFill>
+                  <a:srgbClr val="B8956A"/>
+                </a:solidFill>
+                <a:latin typeface="Calibri" pitchFamily="34" charset="0"/>
+                <a:ea typeface="Calibri" pitchFamily="34" charset="-122"/>
+                <a:cs typeface="Calibri" pitchFamily="34" charset="-120"/>
+              </a:rPr>
+              <a:t>Reach high. The climb is where the growth happens.</a:t>
+            </a:r>
+            <a:endParaRPr lang="en-US" sz="1350" dirty="0"/>
+          </a:p>
+        </p:txBody>
+      </p:sp>
+      <p:pic>
+        <p:nvPicPr>
+          <p:cNvPr id="19" name="Image 0" descr="preencoded.png">    </p:cNvPr>
+          <p:cNvPicPr>
+            <a:picLocks noChangeAspect="1"/>
+          </p:cNvPicPr>
+          <p:nvPr/>
+        </p:nvPicPr>
+        <p:blipFill>
+          <a:blip r:embed="rId1"/>
+          <a:stretch>
+            <a:fillRect/>
+          </a:stretch>
+        </p:blipFill>
+        <p:spPr>
+          <a:xfrm>
+            <a:off x="901598" y="2611526"/>
+            <a:ext cx="263347" cy="263347"/>
+          </a:xfrm>
+          <a:prstGeom prst="rect">
+            <a:avLst/>
+          </a:prstGeom>
+        </p:spPr>
+      </p:pic>
+      <p:pic>
+        <p:nvPicPr>
+          <p:cNvPr id="20" name="Image 1" descr="preencoded.png">    </p:cNvPr>
+          <p:cNvPicPr>
+            <a:picLocks noChangeAspect="1"/>
+          </p:cNvPicPr>
+          <p:nvPr/>
+        </p:nvPicPr>
+        <p:blipFill>
+          <a:blip r:embed="rId2"/>
+          <a:stretch>
+            <a:fillRect/>
+          </a:stretch>
+        </p:blipFill>
+        <p:spPr>
+          <a:xfrm>
+            <a:off x="3795674" y="2611526"/>
+            <a:ext cx="263347" cy="263347"/>
+          </a:xfrm>
+          <a:prstGeom prst="rect">
+            <a:avLst/>
+          </a:prstGeom>
+        </p:spPr>
+      </p:pic>
+      <p:pic>
+        <p:nvPicPr>
+          <p:cNvPr id="21" name="Image 2" descr="preencoded.png">    </p:cNvPr>
+          <p:cNvPicPr>
+            <a:picLocks noChangeAspect="1"/>
+          </p:cNvPicPr>
+          <p:nvPr/>
+        </p:nvPicPr>
+        <p:blipFill>
+          <a:blip r:embed="rId3"/>
+          <a:stretch>
+            <a:fillRect/>
+          </a:stretch>
+        </p:blipFill>
+        <p:spPr>
+          <a:xfrm>
+            <a:off x="6689750" y="2611526"/>
+            <a:ext cx="263347" cy="263347"/>
+          </a:xfrm>
+          <a:prstGeom prst="rect">
+            <a:avLst/>
+          </a:prstGeom>
+        </p:spPr>
+      </p:pic>
+    </p:spTree>
+  </p:cSld>
+  <p:clrMapOvr>
+    <a:masterClrMapping/>
+  </p:clrMapOvr>
+</p:sld>
+</file>
+
+<file path=ppt/slides/slide9.xml><?xml version="1.0" encoding="utf-8"?>
+<p:sld xmlns:a="http://schemas.openxmlformats.org/drawingml/2006/main" xmlns:r="http://schemas.openxmlformats.org/officeDocument/2006/relationships" xmlns:p="http://schemas.openxmlformats.org/presentationml/2006/main">
+  <p:cSld name="Slide 9">
     <p:bg>
       <p:bgPr>
         <a:solidFill>
@@ -6421,7 +7456,7 @@
           <a:p>
             <a:pPr algn="l" indent="0" marL="0">
               <a:lnSpc>
-                <a:spcPct val="100000"/>
+                <a:spcPct val="105000"/>
               </a:lnSpc>
               <a:buNone/>
             </a:pPr>
@@ -6434,14 +7469,14 @@
                 <a:ea typeface="Georgia" pitchFamily="34" charset="-122"/>
                 <a:cs typeface="Georgia" pitchFamily="34" charset="-120"/>
               </a:rPr>
-              <a:t>Your goal and reach job</a:t>
+              <a:t>Your goals and jobs</a:t>
             </a:r>
             <a:endParaRPr lang="en-US" sz="4000" dirty="0"/>
           </a:p>
           <a:p>
             <a:pPr algn="l" indent="0" marL="0">
               <a:lnSpc>
-                <a:spcPct val="100000"/>
+                <a:spcPct val="105000"/>
               </a:lnSpc>
               <a:buNone/>
             </a:pPr>
@@ -6485,13 +7520,13 @@
               <a:buNone/>
             </a:pPr>
             <a:r>
-              <a:rPr lang="en-US" sz="1600" i="1" dirty="0">
+              <a:rPr lang="en-US" sz="1600" b="1" i="1" dirty="0">
                 <a:solidFill>
                   <a:srgbClr val="B8956A"/>
                 </a:solidFill>
-                <a:latin typeface="Georgia" pitchFamily="34" charset="0"/>
-                <a:ea typeface="Georgia" pitchFamily="34" charset="-122"/>
-                <a:cs typeface="Georgia" pitchFamily="34" charset="-120"/>
+                <a:latin typeface="Calibri" pitchFamily="34" charset="0"/>
+                <a:ea typeface="Calibri" pitchFamily="34" charset="-122"/>
+                <a:cs typeface="Calibri" pitchFamily="34" charset="-120"/>
               </a:rPr>
               <a:t>“Everything else is built on top of this.”</a:t>
             </a:r>
